--- a/lecons/F3/20_FORM4_LESSON17_Chemical_Weathering.pptx
+++ b/lecons/F3/20_FORM4_LESSON17_Chemical_Weathering.pptx
@@ -48,9 +48,16 @@
     <p:sldId id="296" r:id="rId42"/>
     <p:sldId id="297" r:id="rId43"/>
     <p:sldId id="298" r:id="rId44"/>
+    <p:sldId id="299" r:id="rId45"/>
+    <p:sldId id="300" r:id="rId46"/>
+    <p:sldId id="301" r:id="rId47"/>
+    <p:sldId id="302" r:id="rId48"/>
+    <p:sldId id="303" r:id="rId49"/>
+    <p:sldId id="304" r:id="rId50"/>
+    <p:sldId id="305" r:id="rId51"/>
   </p:sldIdLst>
   <p:notesMasterIdLst>
-    <p:notesMasterId r:id="rId45"/>
+    <p:notesMasterId r:id="rId52"/>
   </p:notesMasterIdLst>
   <p:sldSz cx="12192000" cy="6858000"/>
   <p:notesSz cx="6858000" cy="12192000"/>
@@ -720,7 +727,7 @@
           <a:p>
             <a:r>
               <a:rPr lang="en-US" dirty="0"/>
-              <a:t>Good. The old gate is rusting and breaking.</a:t>
+              <a:t>Good. Kaltouma does not know how water and air change metals and rocks.</a:t>
             </a:r>
             <a:endParaRPr lang="en-US" dirty="0"/>
           </a:p>
@@ -808,7 +815,7 @@
           <a:p>
             <a:r>
               <a:rPr lang="en-US" dirty="0"/>
-              <a:t>Question 2: What makes it rust? Think for a moment, then raise your hand to answer.</a:t>
+              <a:t>Question 2: What colour is the old gate? Think for a moment, then raise your hand to answer.</a:t>
             </a:r>
             <a:endParaRPr lang="en-US" dirty="0"/>
           </a:p>
@@ -896,7 +903,7 @@
           <a:p>
             <a:r>
               <a:rPr lang="en-US" dirty="0"/>
-              <a:t>Good. Rain and the air (oxygen).</a:t>
+              <a:t>Good. Reddish-brown (rusty).</a:t>
             </a:r>
             <a:endParaRPr lang="en-US" dirty="0"/>
           </a:p>
@@ -984,7 +991,7 @@
           <a:p>
             <a:r>
               <a:rPr lang="en-US" dirty="0"/>
-              <a:t>Question 3: Can rocks also rust? Think for a moment, then raise your hand to answer.</a:t>
+              <a:t>Question 3: What do rain and air do to rocks? Think for a moment, then raise your hand to answer.</a:t>
             </a:r>
             <a:endParaRPr lang="en-US" dirty="0"/>
           </a:p>
@@ -1072,7 +1079,7 @@
           <a:p>
             <a:r>
               <a:rPr lang="en-US" dirty="0"/>
-              <a:t>Good. Yes, rocks with iron become red: oxidation.</a:t>
+              <a:t>Good. They change their minerals, so the rocks rot: this is chemical weathering.</a:t>
             </a:r>
             <a:endParaRPr lang="en-US" dirty="0"/>
           </a:p>
@@ -1336,7 +1343,7 @@
           <a:p>
             <a:r>
               <a:rPr lang="en-US" dirty="0"/>
-              <a:t>Activity 1. Look carefully at this picture: rusty metal. Observe every detail before I ask the question.</a:t>
+              <a:t>Activity 1. Look carefully at this picture: rusty iron. Observe every detail before I ask the question.</a:t>
             </a:r>
             <a:endParaRPr lang="en-US" dirty="0"/>
           </a:p>
@@ -1424,7 +1431,7 @@
           <a:p>
             <a:r>
               <a:rPr lang="en-US" dirty="0"/>
-              <a:t>Here is the question for Activity 1: Rain and air make iron red. What is this process? Take one minute to think and write your answer in your rough notebook.</a:t>
+              <a:t>Here is the question for Activity 1: Rain and air make iron red and weak. What is this process called? Take one minute to think and write your answer in your rough notebook.</a:t>
             </a:r>
             <a:endParaRPr lang="en-US" dirty="0"/>
           </a:p>
@@ -1688,7 +1695,7 @@
           <a:p>
             <a:r>
               <a:rPr lang="en-US" dirty="0"/>
-              <a:t>Activity 2. Look carefully at this picture: red soil in a dry area. Observe every detail before I ask the question.</a:t>
+              <a:t>Activity 2. Look carefully at this picture: a red soil. Observe every detail before I ask the question.</a:t>
             </a:r>
             <a:endParaRPr lang="en-US" dirty="0"/>
           </a:p>
@@ -1864,7 +1871,7 @@
           <a:p>
             <a:r>
               <a:rPr lang="en-US" dirty="0"/>
-              <a:t>Let us check the answer together. The iron in the soil is oxidised (rusted).</a:t>
+              <a:t>Let us check the answer together. The iron in the rocks and soil has been oxidised (rusted).</a:t>
             </a:r>
             <a:endParaRPr lang="en-US" dirty="0"/>
           </a:p>
@@ -1952,7 +1959,7 @@
           <a:p>
             <a:r>
               <a:rPr lang="en-US" dirty="0"/>
-              <a:t>Activity 3. Look carefully at this picture: a cave in limestone. Observe every detail before I ask the question.</a:t>
+              <a:t>Activity 3. Look carefully at this picture: a limestone cave. Observe every detail before I ask the question.</a:t>
             </a:r>
             <a:endParaRPr lang="en-US" dirty="0"/>
           </a:p>
@@ -2040,7 +2047,7 @@
           <a:p>
             <a:r>
               <a:rPr lang="en-US" dirty="0"/>
-              <a:t>Here is the question for Activity 3: Rain water dissolves limestone. What forms after a long time? Take one minute to think and write your answer in your rough notebook.</a:t>
+              <a:t>Here is the question for Activity 3: Rain water slowly dissolves limestone. What forms after a very long time? Take one minute to think and write your answer in your rough notebook.</a:t>
             </a:r>
             <a:endParaRPr lang="en-US" dirty="0"/>
           </a:p>
@@ -2128,7 +2135,7 @@
           <a:p>
             <a:r>
               <a:rPr lang="en-US" dirty="0"/>
-              <a:t>Let us check the answer together. Caves (with stalactites).</a:t>
+              <a:t>Let us check the answer together. Caves, with stalactites and stalagmites.</a:t>
             </a:r>
             <a:endParaRPr lang="en-US" dirty="0"/>
           </a:p>
@@ -2392,7 +2399,7 @@
           <a:p>
             <a:r>
               <a:rPr lang="en-US" dirty="0"/>
-              <a:t>Let us copy Processes and Products of Chemical Weathering. Chemical weathering takes place through the following processes. On this slide we have Solution and Carbonation. Write each point on a new line, with the key term first, and explain it in your own words when we revise. When you finish, we go to the next slide.</a:t>
+              <a:t>Let us copy Solution. Solution works as follows. Copy the point on Process on the left, then draw the diagram on the right: processes of chemical weathering. Give it a title and label it clearly.</a:t>
             </a:r>
             <a:endParaRPr lang="en-US" dirty="0"/>
           </a:p>
@@ -2568,7 +2575,7 @@
           <a:p>
             <a:r>
               <a:rPr lang="en-US" dirty="0"/>
-              <a:t>We continue with Processes and Products of Chemical Weathering. On this slide we have Hydrolysis, Oxidation and Hydration. Write each point on a new line, with the key term first, and explain it in your own words when we revise. When you finish, we go to the next slide.</a:t>
+              <a:t>We continue with Solution. On this slide we have Products. Write each point on a new line, with the key term first, and explain it in your own words when we revise.</a:t>
             </a:r>
             <a:endParaRPr lang="en-US" dirty="0"/>
           </a:p>
@@ -2656,7 +2663,7 @@
           <a:p>
             <a:r>
               <a:rPr lang="en-US" dirty="0"/>
-              <a:t>We continue with Processes and Products of Chemical Weathering. On this slide we have Biological action. Write each point on a new line, with the key term first, and explain it in your own words when we revise.</a:t>
+              <a:t>Let us copy Carbonation. Carbonation works as follows. Copy the point on Process on the left, then draw the diagram on the right: a limestone cave. Give it a title and label it clearly.</a:t>
             </a:r>
             <a:endParaRPr lang="en-US" dirty="0"/>
           </a:p>
@@ -2744,7 +2751,7 @@
           <a:p>
             <a:r>
               <a:rPr lang="en-US" dirty="0"/>
-              <a:t>Now let us check what you have understood. Question 1: Why are the soils of Garoua red? Answer in your exercise book.</a:t>
+              <a:t>We continue with Carbonation. On this slide we have Products. Write each point on a new line, with the key term first, and explain it in your own words when we revise.</a:t>
             </a:r>
             <a:endParaRPr lang="en-US" dirty="0"/>
           </a:p>
@@ -2832,7 +2839,7 @@
           <a:p>
             <a:r>
               <a:rPr lang="en-US" dirty="0"/>
-              <a:t>The expected answer is: the iron in them is oxidised. If you got it right, well done.</a:t>
+              <a:t>Let us copy Hydrolysis. Hydrolysis works as follows. On this slide we have Process and Products. Write each point on a new line, with the key term first, and explain it in your own words when we revise.</a:t>
             </a:r>
             <a:endParaRPr lang="en-US" dirty="0"/>
           </a:p>
@@ -2920,7 +2927,7 @@
           <a:p>
             <a:r>
               <a:rPr lang="en-US" dirty="0"/>
-              <a:t>Now let us check what you have understood. Question 2: What does carbonation produce in limestone? Answer in your exercise book.</a:t>
+              <a:t>Let us copy Oxidation. Oxidation works as follows. Copy the point on Process on the left, then draw the diagram on the right: rusty iron. Give it a title and label it clearly.</a:t>
             </a:r>
             <a:endParaRPr lang="en-US" dirty="0"/>
           </a:p>
@@ -3008,7 +3015,7 @@
           <a:p>
             <a:r>
               <a:rPr lang="en-US" dirty="0"/>
-              <a:t>The expected answer is: caves. If you got it right, well done.</a:t>
+              <a:t>Copy the point on Products on the left, then draw the diagram on the right: a red soil. Give it a title and label it clearly.</a:t>
             </a:r>
             <a:endParaRPr lang="en-US" dirty="0"/>
           </a:p>
@@ -3096,7 +3103,7 @@
           <a:p>
             <a:r>
               <a:rPr lang="en-US" dirty="0"/>
-              <a:t>For those who need more practice, fill in the blanks in your exercise book. The answers are: number 1, oxidation; number 2, carbonation; number 3, hydrolysis.</a:t>
+              <a:t>Let us copy Hydration. Hydration works as follows. On this slide we have Process and Products. Write each point on a new line, with the key term first, and explain it in your own words when we revise.</a:t>
             </a:r>
             <a:endParaRPr lang="en-US" dirty="0"/>
           </a:p>
@@ -3184,7 +3191,7 @@
           <a:p>
             <a:r>
               <a:rPr lang="en-US" dirty="0"/>
-              <a:t>For your homework: Ask a farmer in your family where the soil of his farm comes from, and ask if he has seen rocks fall or roads blocked after heavy rain. Write his answers. We shall correct it at the beginning of our next lesson.</a:t>
+              <a:t>Let us copy Chemically Induced Biological Weathering. Living things weather rocks chemically as follows. Copy the point on Process on the left, then draw the diagram on the right: lichens on a rock. Give it a title and label it clearly.</a:t>
             </a:r>
             <a:endParaRPr lang="en-US" dirty="0"/>
           </a:p>
@@ -3272,7 +3279,7 @@
           <a:p>
             <a:r>
               <a:rPr lang="en-US" dirty="0"/>
-              <a:t>Our next lesson will be on Further Study 2: The Impact of Weathering on the Environment. Thank you for your attention, and see you next time.</a:t>
+              <a:t>We continue with Chemically Induced Biological Weathering. On this slide we have Products. Write each point on a new line, with the key term first, and explain it in your own words when we revise.</a:t>
             </a:r>
             <a:endParaRPr lang="en-US" dirty="0"/>
           </a:p>
@@ -3360,7 +3367,7 @@
           <a:p>
             <a:r>
               <a:rPr lang="en-US" dirty="0"/>
-              <a:t>Let us play the bilingual game. I say a word in English, and you give me the French word. Then we do the reverse.</a:t>
+              <a:t>Now let us check what you have understood. Question 1: Why are the soils of Garoua red? Answer in your exercise book.</a:t>
             </a:r>
             <a:endParaRPr lang="en-US" dirty="0"/>
           </a:p>
@@ -3536,7 +3543,7 @@
           <a:p>
             <a:r>
               <a:rPr lang="en-US" dirty="0"/>
-              <a:t>I record this information in the official logbook of the class after the lesson.</a:t>
+              <a:t>The expected answer is: the iron in them is oxidised. If you got it right, well done.</a:t>
             </a:r>
             <a:endParaRPr lang="en-US" dirty="0"/>
           </a:p>
@@ -3624,7 +3631,7 @@
           <a:p>
             <a:r>
               <a:rPr lang="en-US" dirty="0"/>
-              <a:t>I complete the second page of the logbook: the matter taught, the evaluation, the homework and the attendance.</a:t>
+              <a:t>Now let us check what you have understood. Question 2: What does carbonation produce in limestone? Answer in your exercise book.</a:t>
             </a:r>
             <a:endParaRPr lang="en-US" dirty="0"/>
           </a:p>
@@ -3712,7 +3719,7 @@
           <a:p>
             <a:r>
               <a:rPr lang="en-US" dirty="0"/>
-              <a:t>This slide is for me, the teacher: it gives the timing of the lesson and what to do if the projector is not available.</a:t>
+              <a:t>The expected answer is: caves. If you got it right, well done.</a:t>
             </a:r>
             <a:endParaRPr lang="en-US" dirty="0"/>
           </a:p>
@@ -3800,7 +3807,7 @@
           <a:p>
             <a:r>
               <a:rPr lang="en-US" dirty="0"/>
-              <a:t>These are the references and picture credits used to prepare this lesson.</a:t>
+              <a:t>For those who need more practice, fill in the blanks in your exercise book. The answers are: number 1, oxidation; number 2, carbonation; number 3, hydrolysis.</a:t>
             </a:r>
             <a:endParaRPr lang="en-US" dirty="0"/>
           </a:p>
@@ -3824,6 +3831,534 @@
             <a:fld id="{F7021451-1387-4CA6-816F-3879F97B5CBC}" type="slidenum">
               <a:rPr lang="en-US"/>
               <a:t>43</a:t>
+            </a:fld>
+            <a:endParaRPr lang="en-US"/>
+          </a:p>
+        </p:txBody>
+      </p:sp>
+    </p:spTree>
+    <p:extLst>
+      <p:ext uri="{BB962C8B-B14F-4D97-AF65-F5344CB8AC3E}">
+        <p14:creationId xmlns:p14="http://schemas.microsoft.com/office/powerpoint/2010/main" val="1024086991"/>
+      </p:ext>
+    </p:extLst>
+  </p:cSld>
+  <p:clrMapOvr>
+    <a:masterClrMapping/>
+  </p:clrMapOvr>
+</p:notes>
+</file>
+
+<file path=ppt/notesSlides/notesSlide44.xml><?xml version="1.0" encoding="utf-8"?>
+<p:notes xmlns:a="http://schemas.openxmlformats.org/drawingml/2006/main" xmlns:r="http://schemas.openxmlformats.org/officeDocument/2006/relationships" xmlns:p="http://schemas.openxmlformats.org/presentationml/2006/main">
+  <p:cSld>
+    <p:spTree>
+      <p:nvGrpSpPr>
+        <p:cNvPr id="1" name=""/>
+        <p:cNvGrpSpPr/>
+        <p:nvPr/>
+      </p:nvGrpSpPr>
+      <p:grpSpPr>
+        <a:xfrm>
+          <a:off x="0" y="0"/>
+          <a:ext cx="0" cy="0"/>
+          <a:chOff x="0" y="0"/>
+          <a:chExt cx="0" cy="0"/>
+        </a:xfrm>
+      </p:grpSpPr>
+      <p:sp>
+        <p:nvSpPr>
+          <p:cNvPr id="2" name="Slide Image Placeholder 1"/>
+          <p:cNvSpPr>
+            <a:spLocks noGrp="1" noRot="1" noChangeAspect="1"/>
+          </p:cNvSpPr>
+          <p:nvPr>
+            <p:ph type="sldImg"/>
+          </p:nvPr>
+        </p:nvSpPr>
+        <p:spPr/>
+      </p:sp>
+      <p:sp>
+        <p:nvSpPr>
+          <p:cNvPr id="3" name="Notes Placeholder 2"/>
+          <p:cNvSpPr>
+            <a:spLocks noGrp="1"/>
+          </p:cNvSpPr>
+          <p:nvPr>
+            <p:ph type="body" idx="1"/>
+          </p:nvPr>
+        </p:nvSpPr>
+        <p:spPr/>
+        <p:txBody>
+          <a:bodyPr/>
+          <a:lstStyle/>
+          <a:p>
+            <a:r>
+              <a:rPr lang="en-US" dirty="0"/>
+              <a:t>For your homework: Ask a farmer in your family where the soil of his farm comes from, and ask if he has seen rocks fall or roads blocked after heavy rain. Write his answers. We shall correct it at the beginning of our next lesson.</a:t>
+            </a:r>
+            <a:endParaRPr lang="en-US" dirty="0"/>
+          </a:p>
+        </p:txBody>
+      </p:sp>
+      <p:sp>
+        <p:nvSpPr>
+          <p:cNvPr id="4" name="Slide Number Placeholder 3"/>
+          <p:cNvSpPr>
+            <a:spLocks noGrp="1"/>
+          </p:cNvSpPr>
+          <p:nvPr>
+            <p:ph type="sldNum" sz="quarter" idx="10"/>
+          </p:nvPr>
+        </p:nvSpPr>
+        <p:spPr/>
+        <p:txBody>
+          <a:bodyPr/>
+          <a:lstStyle/>
+          <a:p>
+            <a:fld id="{F7021451-1387-4CA6-816F-3879F97B5CBC}" type="slidenum">
+              <a:rPr lang="en-US"/>
+              <a:t>44</a:t>
+            </a:fld>
+            <a:endParaRPr lang="en-US"/>
+          </a:p>
+        </p:txBody>
+      </p:sp>
+    </p:spTree>
+    <p:extLst>
+      <p:ext uri="{BB962C8B-B14F-4D97-AF65-F5344CB8AC3E}">
+        <p14:creationId xmlns:p14="http://schemas.microsoft.com/office/powerpoint/2010/main" val="1024086991"/>
+      </p:ext>
+    </p:extLst>
+  </p:cSld>
+  <p:clrMapOvr>
+    <a:masterClrMapping/>
+  </p:clrMapOvr>
+</p:notes>
+</file>
+
+<file path=ppt/notesSlides/notesSlide45.xml><?xml version="1.0" encoding="utf-8"?>
+<p:notes xmlns:a="http://schemas.openxmlformats.org/drawingml/2006/main" xmlns:r="http://schemas.openxmlformats.org/officeDocument/2006/relationships" xmlns:p="http://schemas.openxmlformats.org/presentationml/2006/main">
+  <p:cSld>
+    <p:spTree>
+      <p:nvGrpSpPr>
+        <p:cNvPr id="1" name=""/>
+        <p:cNvGrpSpPr/>
+        <p:nvPr/>
+      </p:nvGrpSpPr>
+      <p:grpSpPr>
+        <a:xfrm>
+          <a:off x="0" y="0"/>
+          <a:ext cx="0" cy="0"/>
+          <a:chOff x="0" y="0"/>
+          <a:chExt cx="0" cy="0"/>
+        </a:xfrm>
+      </p:grpSpPr>
+      <p:sp>
+        <p:nvSpPr>
+          <p:cNvPr id="2" name="Slide Image Placeholder 1"/>
+          <p:cNvSpPr>
+            <a:spLocks noGrp="1" noRot="1" noChangeAspect="1"/>
+          </p:cNvSpPr>
+          <p:nvPr>
+            <p:ph type="sldImg"/>
+          </p:nvPr>
+        </p:nvSpPr>
+        <p:spPr/>
+      </p:sp>
+      <p:sp>
+        <p:nvSpPr>
+          <p:cNvPr id="3" name="Notes Placeholder 2"/>
+          <p:cNvSpPr>
+            <a:spLocks noGrp="1"/>
+          </p:cNvSpPr>
+          <p:nvPr>
+            <p:ph type="body" idx="1"/>
+          </p:nvPr>
+        </p:nvSpPr>
+        <p:spPr/>
+        <p:txBody>
+          <a:bodyPr/>
+          <a:lstStyle/>
+          <a:p>
+            <a:r>
+              <a:rPr lang="en-US" dirty="0"/>
+              <a:t>Our next lesson will be on Further Study 2: The Impact of Weathering on the Environment. Thank you for your attention, and see you next time.</a:t>
+            </a:r>
+            <a:endParaRPr lang="en-US" dirty="0"/>
+          </a:p>
+        </p:txBody>
+      </p:sp>
+      <p:sp>
+        <p:nvSpPr>
+          <p:cNvPr id="4" name="Slide Number Placeholder 3"/>
+          <p:cNvSpPr>
+            <a:spLocks noGrp="1"/>
+          </p:cNvSpPr>
+          <p:nvPr>
+            <p:ph type="sldNum" sz="quarter" idx="10"/>
+          </p:nvPr>
+        </p:nvSpPr>
+        <p:spPr/>
+        <p:txBody>
+          <a:bodyPr/>
+          <a:lstStyle/>
+          <a:p>
+            <a:fld id="{F7021451-1387-4CA6-816F-3879F97B5CBC}" type="slidenum">
+              <a:rPr lang="en-US"/>
+              <a:t>45</a:t>
+            </a:fld>
+            <a:endParaRPr lang="en-US"/>
+          </a:p>
+        </p:txBody>
+      </p:sp>
+    </p:spTree>
+    <p:extLst>
+      <p:ext uri="{BB962C8B-B14F-4D97-AF65-F5344CB8AC3E}">
+        <p14:creationId xmlns:p14="http://schemas.microsoft.com/office/powerpoint/2010/main" val="1024086991"/>
+      </p:ext>
+    </p:extLst>
+  </p:cSld>
+  <p:clrMapOvr>
+    <a:masterClrMapping/>
+  </p:clrMapOvr>
+</p:notes>
+</file>
+
+<file path=ppt/notesSlides/notesSlide46.xml><?xml version="1.0" encoding="utf-8"?>
+<p:notes xmlns:a="http://schemas.openxmlformats.org/drawingml/2006/main" xmlns:r="http://schemas.openxmlformats.org/officeDocument/2006/relationships" xmlns:p="http://schemas.openxmlformats.org/presentationml/2006/main">
+  <p:cSld>
+    <p:spTree>
+      <p:nvGrpSpPr>
+        <p:cNvPr id="1" name=""/>
+        <p:cNvGrpSpPr/>
+        <p:nvPr/>
+      </p:nvGrpSpPr>
+      <p:grpSpPr>
+        <a:xfrm>
+          <a:off x="0" y="0"/>
+          <a:ext cx="0" cy="0"/>
+          <a:chOff x="0" y="0"/>
+          <a:chExt cx="0" cy="0"/>
+        </a:xfrm>
+      </p:grpSpPr>
+      <p:sp>
+        <p:nvSpPr>
+          <p:cNvPr id="2" name="Slide Image Placeholder 1"/>
+          <p:cNvSpPr>
+            <a:spLocks noGrp="1" noRot="1" noChangeAspect="1"/>
+          </p:cNvSpPr>
+          <p:nvPr>
+            <p:ph type="sldImg"/>
+          </p:nvPr>
+        </p:nvSpPr>
+        <p:spPr/>
+      </p:sp>
+      <p:sp>
+        <p:nvSpPr>
+          <p:cNvPr id="3" name="Notes Placeholder 2"/>
+          <p:cNvSpPr>
+            <a:spLocks noGrp="1"/>
+          </p:cNvSpPr>
+          <p:nvPr>
+            <p:ph type="body" idx="1"/>
+          </p:nvPr>
+        </p:nvSpPr>
+        <p:spPr/>
+        <p:txBody>
+          <a:bodyPr/>
+          <a:lstStyle/>
+          <a:p>
+            <a:r>
+              <a:rPr lang="en-US" dirty="0"/>
+              <a:t>Let us play the bilingual game. I say a word in English, and you give me the French word. Then we do the reverse.</a:t>
+            </a:r>
+            <a:endParaRPr lang="en-US" dirty="0"/>
+          </a:p>
+        </p:txBody>
+      </p:sp>
+      <p:sp>
+        <p:nvSpPr>
+          <p:cNvPr id="4" name="Slide Number Placeholder 3"/>
+          <p:cNvSpPr>
+            <a:spLocks noGrp="1"/>
+          </p:cNvSpPr>
+          <p:nvPr>
+            <p:ph type="sldNum" sz="quarter" idx="10"/>
+          </p:nvPr>
+        </p:nvSpPr>
+        <p:spPr/>
+        <p:txBody>
+          <a:bodyPr/>
+          <a:lstStyle/>
+          <a:p>
+            <a:fld id="{F7021451-1387-4CA6-816F-3879F97B5CBC}" type="slidenum">
+              <a:rPr lang="en-US"/>
+              <a:t>46</a:t>
+            </a:fld>
+            <a:endParaRPr lang="en-US"/>
+          </a:p>
+        </p:txBody>
+      </p:sp>
+    </p:spTree>
+    <p:extLst>
+      <p:ext uri="{BB962C8B-B14F-4D97-AF65-F5344CB8AC3E}">
+        <p14:creationId xmlns:p14="http://schemas.microsoft.com/office/powerpoint/2010/main" val="1024086991"/>
+      </p:ext>
+    </p:extLst>
+  </p:cSld>
+  <p:clrMapOvr>
+    <a:masterClrMapping/>
+  </p:clrMapOvr>
+</p:notes>
+</file>
+
+<file path=ppt/notesSlides/notesSlide47.xml><?xml version="1.0" encoding="utf-8"?>
+<p:notes xmlns:a="http://schemas.openxmlformats.org/drawingml/2006/main" xmlns:r="http://schemas.openxmlformats.org/officeDocument/2006/relationships" xmlns:p="http://schemas.openxmlformats.org/presentationml/2006/main">
+  <p:cSld>
+    <p:spTree>
+      <p:nvGrpSpPr>
+        <p:cNvPr id="1" name=""/>
+        <p:cNvGrpSpPr/>
+        <p:nvPr/>
+      </p:nvGrpSpPr>
+      <p:grpSpPr>
+        <a:xfrm>
+          <a:off x="0" y="0"/>
+          <a:ext cx="0" cy="0"/>
+          <a:chOff x="0" y="0"/>
+          <a:chExt cx="0" cy="0"/>
+        </a:xfrm>
+      </p:grpSpPr>
+      <p:sp>
+        <p:nvSpPr>
+          <p:cNvPr id="2" name="Slide Image Placeholder 1"/>
+          <p:cNvSpPr>
+            <a:spLocks noGrp="1" noRot="1" noChangeAspect="1"/>
+          </p:cNvSpPr>
+          <p:nvPr>
+            <p:ph type="sldImg"/>
+          </p:nvPr>
+        </p:nvSpPr>
+        <p:spPr/>
+      </p:sp>
+      <p:sp>
+        <p:nvSpPr>
+          <p:cNvPr id="3" name="Notes Placeholder 2"/>
+          <p:cNvSpPr>
+            <a:spLocks noGrp="1"/>
+          </p:cNvSpPr>
+          <p:nvPr>
+            <p:ph type="body" idx="1"/>
+          </p:nvPr>
+        </p:nvSpPr>
+        <p:spPr/>
+        <p:txBody>
+          <a:bodyPr/>
+          <a:lstStyle/>
+          <a:p>
+            <a:r>
+              <a:rPr lang="en-US" dirty="0"/>
+              <a:t>I record this information in the official logbook of the class after the lesson.</a:t>
+            </a:r>
+            <a:endParaRPr lang="en-US" dirty="0"/>
+          </a:p>
+        </p:txBody>
+      </p:sp>
+      <p:sp>
+        <p:nvSpPr>
+          <p:cNvPr id="4" name="Slide Number Placeholder 3"/>
+          <p:cNvSpPr>
+            <a:spLocks noGrp="1"/>
+          </p:cNvSpPr>
+          <p:nvPr>
+            <p:ph type="sldNum" sz="quarter" idx="10"/>
+          </p:nvPr>
+        </p:nvSpPr>
+        <p:spPr/>
+        <p:txBody>
+          <a:bodyPr/>
+          <a:lstStyle/>
+          <a:p>
+            <a:fld id="{F7021451-1387-4CA6-816F-3879F97B5CBC}" type="slidenum">
+              <a:rPr lang="en-US"/>
+              <a:t>47</a:t>
+            </a:fld>
+            <a:endParaRPr lang="en-US"/>
+          </a:p>
+        </p:txBody>
+      </p:sp>
+    </p:spTree>
+    <p:extLst>
+      <p:ext uri="{BB962C8B-B14F-4D97-AF65-F5344CB8AC3E}">
+        <p14:creationId xmlns:p14="http://schemas.microsoft.com/office/powerpoint/2010/main" val="1024086991"/>
+      </p:ext>
+    </p:extLst>
+  </p:cSld>
+  <p:clrMapOvr>
+    <a:masterClrMapping/>
+  </p:clrMapOvr>
+</p:notes>
+</file>
+
+<file path=ppt/notesSlides/notesSlide48.xml><?xml version="1.0" encoding="utf-8"?>
+<p:notes xmlns:a="http://schemas.openxmlformats.org/drawingml/2006/main" xmlns:r="http://schemas.openxmlformats.org/officeDocument/2006/relationships" xmlns:p="http://schemas.openxmlformats.org/presentationml/2006/main">
+  <p:cSld>
+    <p:spTree>
+      <p:nvGrpSpPr>
+        <p:cNvPr id="1" name=""/>
+        <p:cNvGrpSpPr/>
+        <p:nvPr/>
+      </p:nvGrpSpPr>
+      <p:grpSpPr>
+        <a:xfrm>
+          <a:off x="0" y="0"/>
+          <a:ext cx="0" cy="0"/>
+          <a:chOff x="0" y="0"/>
+          <a:chExt cx="0" cy="0"/>
+        </a:xfrm>
+      </p:grpSpPr>
+      <p:sp>
+        <p:nvSpPr>
+          <p:cNvPr id="2" name="Slide Image Placeholder 1"/>
+          <p:cNvSpPr>
+            <a:spLocks noGrp="1" noRot="1" noChangeAspect="1"/>
+          </p:cNvSpPr>
+          <p:nvPr>
+            <p:ph type="sldImg"/>
+          </p:nvPr>
+        </p:nvSpPr>
+        <p:spPr/>
+      </p:sp>
+      <p:sp>
+        <p:nvSpPr>
+          <p:cNvPr id="3" name="Notes Placeholder 2"/>
+          <p:cNvSpPr>
+            <a:spLocks noGrp="1"/>
+          </p:cNvSpPr>
+          <p:nvPr>
+            <p:ph type="body" idx="1"/>
+          </p:nvPr>
+        </p:nvSpPr>
+        <p:spPr/>
+        <p:txBody>
+          <a:bodyPr/>
+          <a:lstStyle/>
+          <a:p>
+            <a:r>
+              <a:rPr lang="en-US" dirty="0"/>
+              <a:t>I complete the second page of the logbook: the matter taught, the evaluation, the homework and the attendance.</a:t>
+            </a:r>
+            <a:endParaRPr lang="en-US" dirty="0"/>
+          </a:p>
+        </p:txBody>
+      </p:sp>
+      <p:sp>
+        <p:nvSpPr>
+          <p:cNvPr id="4" name="Slide Number Placeholder 3"/>
+          <p:cNvSpPr>
+            <a:spLocks noGrp="1"/>
+          </p:cNvSpPr>
+          <p:nvPr>
+            <p:ph type="sldNum" sz="quarter" idx="10"/>
+          </p:nvPr>
+        </p:nvSpPr>
+        <p:spPr/>
+        <p:txBody>
+          <a:bodyPr/>
+          <a:lstStyle/>
+          <a:p>
+            <a:fld id="{F7021451-1387-4CA6-816F-3879F97B5CBC}" type="slidenum">
+              <a:rPr lang="en-US"/>
+              <a:t>48</a:t>
+            </a:fld>
+            <a:endParaRPr lang="en-US"/>
+          </a:p>
+        </p:txBody>
+      </p:sp>
+    </p:spTree>
+    <p:extLst>
+      <p:ext uri="{BB962C8B-B14F-4D97-AF65-F5344CB8AC3E}">
+        <p14:creationId xmlns:p14="http://schemas.microsoft.com/office/powerpoint/2010/main" val="1024086991"/>
+      </p:ext>
+    </p:extLst>
+  </p:cSld>
+  <p:clrMapOvr>
+    <a:masterClrMapping/>
+  </p:clrMapOvr>
+</p:notes>
+</file>
+
+<file path=ppt/notesSlides/notesSlide49.xml><?xml version="1.0" encoding="utf-8"?>
+<p:notes xmlns:a="http://schemas.openxmlformats.org/drawingml/2006/main" xmlns:r="http://schemas.openxmlformats.org/officeDocument/2006/relationships" xmlns:p="http://schemas.openxmlformats.org/presentationml/2006/main">
+  <p:cSld>
+    <p:spTree>
+      <p:nvGrpSpPr>
+        <p:cNvPr id="1" name=""/>
+        <p:cNvGrpSpPr/>
+        <p:nvPr/>
+      </p:nvGrpSpPr>
+      <p:grpSpPr>
+        <a:xfrm>
+          <a:off x="0" y="0"/>
+          <a:ext cx="0" cy="0"/>
+          <a:chOff x="0" y="0"/>
+          <a:chExt cx="0" cy="0"/>
+        </a:xfrm>
+      </p:grpSpPr>
+      <p:sp>
+        <p:nvSpPr>
+          <p:cNvPr id="2" name="Slide Image Placeholder 1"/>
+          <p:cNvSpPr>
+            <a:spLocks noGrp="1" noRot="1" noChangeAspect="1"/>
+          </p:cNvSpPr>
+          <p:nvPr>
+            <p:ph type="sldImg"/>
+          </p:nvPr>
+        </p:nvSpPr>
+        <p:spPr/>
+      </p:sp>
+      <p:sp>
+        <p:nvSpPr>
+          <p:cNvPr id="3" name="Notes Placeholder 2"/>
+          <p:cNvSpPr>
+            <a:spLocks noGrp="1"/>
+          </p:cNvSpPr>
+          <p:nvPr>
+            <p:ph type="body" idx="1"/>
+          </p:nvPr>
+        </p:nvSpPr>
+        <p:spPr/>
+        <p:txBody>
+          <a:bodyPr/>
+          <a:lstStyle/>
+          <a:p>
+            <a:r>
+              <a:rPr lang="en-US" dirty="0"/>
+              <a:t>This slide is for me, the teacher: it gives the timing of the lesson and what to do if the projector is not available.</a:t>
+            </a:r>
+            <a:endParaRPr lang="en-US" dirty="0"/>
+          </a:p>
+        </p:txBody>
+      </p:sp>
+      <p:sp>
+        <p:nvSpPr>
+          <p:cNvPr id="4" name="Slide Number Placeholder 3"/>
+          <p:cNvSpPr>
+            <a:spLocks noGrp="1"/>
+          </p:cNvSpPr>
+          <p:nvPr>
+            <p:ph type="sldNum" sz="quarter" idx="10"/>
+          </p:nvPr>
+        </p:nvSpPr>
+        <p:spPr/>
+        <p:txBody>
+          <a:bodyPr/>
+          <a:lstStyle/>
+          <a:p>
+            <a:fld id="{F7021451-1387-4CA6-816F-3879F97B5CBC}" type="slidenum">
+              <a:rPr lang="en-US"/>
+              <a:t>49</a:t>
             </a:fld>
             <a:endParaRPr lang="en-US"/>
           </a:p>
@@ -3930,6 +4465,94 @@
 </p:notes>
 </file>
 
+<file path=ppt/notesSlides/notesSlide50.xml><?xml version="1.0" encoding="utf-8"?>
+<p:notes xmlns:a="http://schemas.openxmlformats.org/drawingml/2006/main" xmlns:r="http://schemas.openxmlformats.org/officeDocument/2006/relationships" xmlns:p="http://schemas.openxmlformats.org/presentationml/2006/main">
+  <p:cSld>
+    <p:spTree>
+      <p:nvGrpSpPr>
+        <p:cNvPr id="1" name=""/>
+        <p:cNvGrpSpPr/>
+        <p:nvPr/>
+      </p:nvGrpSpPr>
+      <p:grpSpPr>
+        <a:xfrm>
+          <a:off x="0" y="0"/>
+          <a:ext cx="0" cy="0"/>
+          <a:chOff x="0" y="0"/>
+          <a:chExt cx="0" cy="0"/>
+        </a:xfrm>
+      </p:grpSpPr>
+      <p:sp>
+        <p:nvSpPr>
+          <p:cNvPr id="2" name="Slide Image Placeholder 1"/>
+          <p:cNvSpPr>
+            <a:spLocks noGrp="1" noRot="1" noChangeAspect="1"/>
+          </p:cNvSpPr>
+          <p:nvPr>
+            <p:ph type="sldImg"/>
+          </p:nvPr>
+        </p:nvSpPr>
+        <p:spPr/>
+      </p:sp>
+      <p:sp>
+        <p:nvSpPr>
+          <p:cNvPr id="3" name="Notes Placeholder 2"/>
+          <p:cNvSpPr>
+            <a:spLocks noGrp="1"/>
+          </p:cNvSpPr>
+          <p:nvPr>
+            <p:ph type="body" idx="1"/>
+          </p:nvPr>
+        </p:nvSpPr>
+        <p:spPr/>
+        <p:txBody>
+          <a:bodyPr/>
+          <a:lstStyle/>
+          <a:p>
+            <a:r>
+              <a:rPr lang="en-US" dirty="0"/>
+              <a:t>These are the references and picture credits used to prepare this lesson.</a:t>
+            </a:r>
+            <a:endParaRPr lang="en-US" dirty="0"/>
+          </a:p>
+        </p:txBody>
+      </p:sp>
+      <p:sp>
+        <p:nvSpPr>
+          <p:cNvPr id="4" name="Slide Number Placeholder 3"/>
+          <p:cNvSpPr>
+            <a:spLocks noGrp="1"/>
+          </p:cNvSpPr>
+          <p:nvPr>
+            <p:ph type="sldNum" sz="quarter" idx="10"/>
+          </p:nvPr>
+        </p:nvSpPr>
+        <p:spPr/>
+        <p:txBody>
+          <a:bodyPr/>
+          <a:lstStyle/>
+          <a:p>
+            <a:fld id="{F7021451-1387-4CA6-816F-3879F97B5CBC}" type="slidenum">
+              <a:rPr lang="en-US"/>
+              <a:t>50</a:t>
+            </a:fld>
+            <a:endParaRPr lang="en-US"/>
+          </a:p>
+        </p:txBody>
+      </p:sp>
+    </p:spTree>
+    <p:extLst>
+      <p:ext uri="{BB962C8B-B14F-4D97-AF65-F5344CB8AC3E}">
+        <p14:creationId xmlns:p14="http://schemas.microsoft.com/office/powerpoint/2010/main" val="1024086991"/>
+      </p:ext>
+    </p:extLst>
+  </p:cSld>
+  <p:clrMapOvr>
+    <a:masterClrMapping/>
+  </p:clrMapOvr>
+</p:notes>
+</file>
+
 <file path=ppt/notesSlides/notesSlide6.xml><?xml version="1.0" encoding="utf-8"?>
 <p:notes xmlns:a="http://schemas.openxmlformats.org/drawingml/2006/main" xmlns:r="http://schemas.openxmlformats.org/officeDocument/2006/relationships" xmlns:p="http://schemas.openxmlformats.org/presentationml/2006/main">
   <p:cSld>
@@ -4240,7 +4863,7 @@
           <a:p>
             <a:r>
               <a:rPr lang="en-US" dirty="0"/>
-              <a:t>Listen carefully to this situation from real life. In the rainy season, Kaltouma sees that the old metal gate of her compound is reddish-brown. It flakes and crumbles. A new gate still shines. Think about it, because I am going to ask you some questions.</a:t>
+              <a:t>Listen carefully to this situation from real life. In the rainy season, Kaltouma sees that the old metal gate of her compound is reddish-brown and crumbles, while a new gate still shines. Around Garoua, many soils are also red. She asks: "How do rain and air change the gate and the rocks, and why are our soils red?" Think about it, because I am going to ask you some questions.</a:t>
             </a:r>
             <a:endParaRPr lang="en-US" dirty="0"/>
           </a:p>
@@ -5923,7 +6546,7 @@
                 <a:ea typeface="Times New Roman" pitchFamily="34" charset="-122"/>
                 <a:cs typeface="Times New Roman" pitchFamily="34" charset="-120"/>
               </a:rPr>
-              <a:t>The old gate is rusting and breaking.</a:t>
+              <a:t>Kaltouma does not know how water and air change metals and rocks.</a:t>
             </a:r>
             <a:endParaRPr lang="en-US" sz="4000" dirty="0"/>
           </a:p>
@@ -6142,7 +6765,7 @@
                 <a:ea typeface="Times New Roman" pitchFamily="34" charset="-122"/>
                 <a:cs typeface="Times New Roman" pitchFamily="34" charset="-120"/>
               </a:rPr>
-              <a:t>What makes it rust?</a:t>
+              <a:t>What colour is the old gate?</a:t>
             </a:r>
             <a:endParaRPr lang="en-US" sz="4000" dirty="0"/>
           </a:p>
@@ -6361,7 +6984,7 @@
                 <a:ea typeface="Times New Roman" pitchFamily="34" charset="-122"/>
                 <a:cs typeface="Times New Roman" pitchFamily="34" charset="-120"/>
               </a:rPr>
-              <a:t>Rain and the air (oxygen).</a:t>
+              <a:t>Reddish-brown (rusty).</a:t>
             </a:r>
             <a:endParaRPr lang="en-US" sz="4000" dirty="0"/>
           </a:p>
@@ -6580,7 +7203,7 @@
                 <a:ea typeface="Times New Roman" pitchFamily="34" charset="-122"/>
                 <a:cs typeface="Times New Roman" pitchFamily="34" charset="-120"/>
               </a:rPr>
-              <a:t>Can rocks also rust?</a:t>
+              <a:t>What do rain and air do to rocks?</a:t>
             </a:r>
             <a:endParaRPr lang="en-US" sz="4000" dirty="0"/>
           </a:p>
@@ -6799,7 +7422,7 @@
                 <a:ea typeface="Times New Roman" pitchFamily="34" charset="-122"/>
                 <a:cs typeface="Times New Roman" pitchFamily="34" charset="-120"/>
               </a:rPr>
-              <a:t>Yes, rocks with iron become red: oxidation.</a:t>
+              <a:t>They change their minerals, so the rocks rot: this is chemical weathering.</a:t>
             </a:r>
             <a:endParaRPr lang="en-US" sz="4000" dirty="0"/>
           </a:p>
@@ -7349,7 +7972,7 @@
                 <a:ea typeface="Calibri" pitchFamily="34" charset="-122"/>
                 <a:cs typeface="Calibri" pitchFamily="34" charset="-120"/>
               </a:rPr>
-              <a:t>1. OXIDATION</a:t>
+              <a:t>4. OXIDATION</a:t>
             </a:r>
             <a:endParaRPr lang="en-US" sz="1400" dirty="0"/>
           </a:p>
@@ -7451,7 +8074,7 @@
                 <a:ea typeface="Times New Roman" pitchFamily="34" charset="-122"/>
                 <a:cs typeface="Times New Roman" pitchFamily="34" charset="-120"/>
               </a:rPr>
-              <a:t>Rusty metal.</a:t>
+              <a:t>Rusty iron.</a:t>
             </a:r>
             <a:endParaRPr lang="en-US" sz="1800" dirty="0"/>
           </a:p>
@@ -7563,7 +8186,7 @@
                 <a:ea typeface="Calibri" pitchFamily="34" charset="-122"/>
                 <a:cs typeface="Calibri" pitchFamily="34" charset="-120"/>
               </a:rPr>
-              <a:t>1. OXIDATION</a:t>
+              <a:t>4. OXIDATION</a:t>
             </a:r>
             <a:endParaRPr lang="en-US" sz="1400" dirty="0"/>
           </a:p>
@@ -7670,7 +8293,7 @@
                 <a:ea typeface="Times New Roman" pitchFamily="34" charset="-122"/>
                 <a:cs typeface="Times New Roman" pitchFamily="34" charset="-120"/>
               </a:rPr>
-              <a:t>Rain and air make iron red. What is this process?</a:t>
+              <a:t>Rain and air make iron red and weak. What is this process called?</a:t>
             </a:r>
             <a:endParaRPr lang="en-US" sz="4000" dirty="0"/>
           </a:p>
@@ -8377,7 +9000,7 @@
                 <a:ea typeface="Calibri" pitchFamily="34" charset="-122"/>
                 <a:cs typeface="Calibri" pitchFamily="34" charset="-120"/>
               </a:rPr>
-              <a:t>1. OXIDATION</a:t>
+              <a:t>4. OXIDATION</a:t>
             </a:r>
             <a:endParaRPr lang="en-US" sz="1400" dirty="0"/>
           </a:p>
@@ -8596,7 +9219,7 @@
                 <a:ea typeface="Calibri" pitchFamily="34" charset="-122"/>
                 <a:cs typeface="Calibri" pitchFamily="34" charset="-120"/>
               </a:rPr>
-              <a:t>1. OXIDATION</a:t>
+              <a:t>4. OXIDATION</a:t>
             </a:r>
             <a:endParaRPr lang="en-US" sz="1400" dirty="0"/>
           </a:p>
@@ -8698,7 +9321,7 @@
                 <a:ea typeface="Times New Roman" pitchFamily="34" charset="-122"/>
                 <a:cs typeface="Times New Roman" pitchFamily="34" charset="-120"/>
               </a:rPr>
-              <a:t>Red soil in a dry area.</a:t>
+              <a:t>A red soil.</a:t>
             </a:r>
             <a:endParaRPr lang="en-US" sz="1800" dirty="0"/>
           </a:p>
@@ -8810,7 +9433,7 @@
                 <a:ea typeface="Calibri" pitchFamily="34" charset="-122"/>
                 <a:cs typeface="Calibri" pitchFamily="34" charset="-120"/>
               </a:rPr>
-              <a:t>1. OXIDATION</a:t>
+              <a:t>4. OXIDATION</a:t>
             </a:r>
             <a:endParaRPr lang="en-US" sz="1400" dirty="0"/>
           </a:p>
@@ -9029,7 +9652,7 @@
                 <a:ea typeface="Calibri" pitchFamily="34" charset="-122"/>
                 <a:cs typeface="Calibri" pitchFamily="34" charset="-120"/>
               </a:rPr>
-              <a:t>1. OXIDATION</a:t>
+              <a:t>4. OXIDATION</a:t>
             </a:r>
             <a:endParaRPr lang="en-US" sz="1400" dirty="0"/>
           </a:p>
@@ -9136,7 +9759,7 @@
                 <a:ea typeface="Times New Roman" pitchFamily="34" charset="-122"/>
                 <a:cs typeface="Times New Roman" pitchFamily="34" charset="-120"/>
               </a:rPr>
-              <a:t>The iron in the soil is oxidised (rusted).</a:t>
+              <a:t>The iron in the rocks and soil has been oxidised (rusted).</a:t>
             </a:r>
             <a:endParaRPr lang="en-US" sz="4000" dirty="0"/>
           </a:p>
@@ -9248,7 +9871,7 @@
                 <a:ea typeface="Calibri" pitchFamily="34" charset="-122"/>
                 <a:cs typeface="Calibri" pitchFamily="34" charset="-120"/>
               </a:rPr>
-              <a:t>1. CARBONATION</a:t>
+              <a:t>2. CARBONATION</a:t>
             </a:r>
             <a:endParaRPr lang="en-US" sz="1400" dirty="0"/>
           </a:p>
@@ -9350,7 +9973,7 @@
                 <a:ea typeface="Times New Roman" pitchFamily="34" charset="-122"/>
                 <a:cs typeface="Times New Roman" pitchFamily="34" charset="-120"/>
               </a:rPr>
-              <a:t>A cave in limestone.</a:t>
+              <a:t>A limestone cave.</a:t>
             </a:r>
             <a:endParaRPr lang="en-US" sz="1800" dirty="0"/>
           </a:p>
@@ -9462,7 +10085,7 @@
                 <a:ea typeface="Calibri" pitchFamily="34" charset="-122"/>
                 <a:cs typeface="Calibri" pitchFamily="34" charset="-120"/>
               </a:rPr>
-              <a:t>1. CARBONATION</a:t>
+              <a:t>2. CARBONATION</a:t>
             </a:r>
             <a:endParaRPr lang="en-US" sz="1400" dirty="0"/>
           </a:p>
@@ -9569,7 +10192,7 @@
                 <a:ea typeface="Times New Roman" pitchFamily="34" charset="-122"/>
                 <a:cs typeface="Times New Roman" pitchFamily="34" charset="-120"/>
               </a:rPr>
-              <a:t>Rain water dissolves limestone. What forms after a long time?</a:t>
+              <a:t>Rain water slowly dissolves limestone. What forms after a very long time?</a:t>
             </a:r>
             <a:endParaRPr lang="en-US" sz="4000" dirty="0"/>
           </a:p>
@@ -9681,7 +10304,7 @@
                 <a:ea typeface="Calibri" pitchFamily="34" charset="-122"/>
                 <a:cs typeface="Calibri" pitchFamily="34" charset="-120"/>
               </a:rPr>
-              <a:t>1. CARBONATION</a:t>
+              <a:t>2. CARBONATION</a:t>
             </a:r>
             <a:endParaRPr lang="en-US" sz="1400" dirty="0"/>
           </a:p>
@@ -9788,7 +10411,7 @@
                 <a:ea typeface="Times New Roman" pitchFamily="34" charset="-122"/>
                 <a:cs typeface="Times New Roman" pitchFamily="34" charset="-120"/>
               </a:rPr>
-              <a:t>Caves (with stalactites).</a:t>
+              <a:t>Caves, with stalactites and stalagmites.</a:t>
             </a:r>
             <a:endParaRPr lang="en-US" sz="4000" dirty="0"/>
           </a:p>
@@ -10303,7 +10926,7 @@
                 <a:ea typeface="Times New Roman" pitchFamily="34" charset="-122"/>
                 <a:cs typeface="Times New Roman" pitchFamily="34" charset="-120"/>
               </a:rPr>
-              <a:t>It is the decay of rocks by a change in their minerals.</a:t>
+              <a:t>It is the decay of rocks by a chemical change in their minerals, mainly by water and air.</a:t>
             </a:r>
             <a:endParaRPr lang="en-US" sz="4000" dirty="0"/>
           </a:p>
@@ -10421,9 +11044,129 @@
           </a:p>
         </p:txBody>
       </p:sp>
+      <p:sp>
+        <p:nvSpPr>
+          <p:cNvPr id="3" name="Text 1"/>
+          <p:cNvSpPr/>
+          <p:nvPr/>
+        </p:nvSpPr>
+        <p:spPr>
+          <a:xfrm>
+            <a:off x="365760" y="1005840"/>
+            <a:ext cx="11460175" cy="731520"/>
+          </a:xfrm>
+          <a:prstGeom prst="rect">
+            <a:avLst/>
+          </a:prstGeom>
+          <a:noFill/>
+          <a:ln/>
+        </p:spPr>
+        <p:txBody>
+          <a:bodyPr wrap="square" lIns="0" tIns="0" rIns="0" bIns="0" rtlCol="0" anchor="ctr">
+            <a:normAutofit/>
+          </a:bodyPr>
+          <a:lstStyle/>
+          <a:p>
+            <a:pPr algn="ctr" indent="0" marL="0">
+              <a:buNone/>
+            </a:pPr>
+            <a:r>
+              <a:rPr lang="en-US" sz="3600" b="1" dirty="0">
+                <a:solidFill>
+                  <a:srgbClr val="990011"/>
+                </a:solidFill>
+                <a:latin typeface="Times New Roman" pitchFamily="34" charset="0"/>
+                <a:ea typeface="Times New Roman" pitchFamily="34" charset="-122"/>
+                <a:cs typeface="Times New Roman" pitchFamily="34" charset="-120"/>
+              </a:rPr>
+              <a:t>1. Solution</a:t>
+            </a:r>
+            <a:endParaRPr lang="en-US" sz="3600" dirty="0"/>
+          </a:p>
+        </p:txBody>
+      </p:sp>
+      <p:sp>
+        <p:nvSpPr>
+          <p:cNvPr id="4" name="Text 2"/>
+          <p:cNvSpPr/>
+          <p:nvPr/>
+        </p:nvSpPr>
+        <p:spPr>
+          <a:xfrm>
+            <a:off x="365760" y="1783080"/>
+            <a:ext cx="4846320" cy="4617720"/>
+          </a:xfrm>
+          <a:prstGeom prst="rect">
+            <a:avLst/>
+          </a:prstGeom>
+          <a:noFill/>
+          <a:ln/>
+        </p:spPr>
+        <p:txBody>
+          <a:bodyPr wrap="square" lIns="0" tIns="0" rIns="0" bIns="0" rtlCol="0" anchor="t"/>
+          <a:lstStyle/>
+          <a:p>
+            <a:pPr algn="l" indent="0" marL="0">
+              <a:spcAft>
+                <a:spcPts val="800"/>
+              </a:spcAft>
+              <a:buNone/>
+            </a:pPr>
+            <a:r>
+              <a:rPr lang="en-US" sz="3600" i="1" dirty="0">
+                <a:solidFill>
+                  <a:srgbClr val="111111"/>
+                </a:solidFill>
+                <a:latin typeface="Times New Roman" pitchFamily="34" charset="0"/>
+                <a:ea typeface="Times New Roman" pitchFamily="34" charset="-122"/>
+                <a:cs typeface="Times New Roman" pitchFamily="34" charset="-120"/>
+              </a:rPr>
+              <a:t>Solution works as follows:</a:t>
+            </a:r>
+            <a:endParaRPr lang="en-US" sz="3600" dirty="0"/>
+          </a:p>
+          <a:p>
+            <a:pPr algn="l" indent="0" marL="0">
+              <a:spcAft>
+                <a:spcPts val="800"/>
+              </a:spcAft>
+              <a:buNone/>
+            </a:pPr>
+            <a:r>
+              <a:rPr lang="en-US" sz="3600" b="1" dirty="0">
+                <a:solidFill>
+                  <a:srgbClr val="111111"/>
+                </a:solidFill>
+                <a:latin typeface="Times New Roman" pitchFamily="34" charset="0"/>
+                <a:ea typeface="Times New Roman" pitchFamily="34" charset="-122"/>
+                <a:cs typeface="Times New Roman" pitchFamily="34" charset="-120"/>
+              </a:rPr>
+              <a:t>Process: </a:t>
+            </a:r>
+            <a:pPr algn="l" indent="0" marL="0">
+              <a:spcAft>
+                <a:spcPts val="800"/>
+              </a:spcAft>
+              <a:buNone/>
+            </a:pPr>
+            <a:r>
+              <a:rPr lang="en-US" sz="3600" dirty="0">
+                <a:solidFill>
+                  <a:srgbClr val="111111"/>
+                </a:solidFill>
+                <a:latin typeface="Times New Roman" pitchFamily="34" charset="0"/>
+                <a:ea typeface="Times New Roman" pitchFamily="34" charset="-122"/>
+                <a:cs typeface="Times New Roman" pitchFamily="34" charset="-120"/>
+              </a:rPr>
+              <a:t>Water dissolves soluble minerals such as rock salt and gypsum.</a:t>
+            </a:r>
+            <a:endParaRPr lang="en-US" sz="3600" dirty="0"/>
+          </a:p>
+        </p:txBody>
+      </p:sp>
       <p:pic>
         <p:nvPicPr>
-          <p:cNvPr id="3" name="Image 0" descr="/home/claude/f4/img/minesec_sheet.png">    </p:cNvPr>
+          <p:cNvPr id="5" name="Image 0" descr="/home/claude/f4/img/chemical_weathering.png">    </p:cNvPr>
           <p:cNvPicPr>
             <a:picLocks noChangeAspect="1"/>
           </p:cNvPicPr>
@@ -10437,8 +11180,8 @@
         </p:blipFill>
         <p:spPr>
           <a:xfrm>
-            <a:off x="0" y="658368"/>
-            <a:ext cx="3840480" cy="5833872"/>
+            <a:off x="5349240" y="2668253"/>
+            <a:ext cx="6659575" cy="2499902"/>
           </a:xfrm>
           <a:prstGeom prst="rect">
             <a:avLst/>
@@ -10447,14 +11190,14 @@
       </p:pic>
       <p:sp>
         <p:nvSpPr>
-          <p:cNvPr id="4" name="Text 1"/>
+          <p:cNvPr id="6" name="Text 3"/>
           <p:cNvSpPr/>
           <p:nvPr/>
         </p:nvSpPr>
         <p:spPr>
           <a:xfrm>
-            <a:off x="4069080" y="1005840"/>
-            <a:ext cx="7802575" cy="731520"/>
+            <a:off x="5349240" y="6089904"/>
+            <a:ext cx="6659575" cy="347472"/>
           </a:xfrm>
           <a:prstGeom prst="rect">
             <a:avLst/>
@@ -10463,142 +11206,24 @@
           <a:ln/>
         </p:spPr>
         <p:txBody>
-          <a:bodyPr wrap="square" lIns="0" tIns="0" rIns="0" bIns="0" rtlCol="0" anchor="ctr">
-            <a:normAutofit/>
-          </a:bodyPr>
+          <a:bodyPr wrap="square" lIns="0" tIns="0" rIns="0" bIns="0" rtlCol="0" anchor="ctr"/>
           <a:lstStyle/>
           <a:p>
             <a:pPr algn="ctr" indent="0" marL="0">
               <a:buNone/>
             </a:pPr>
             <a:r>
-              <a:rPr lang="en-US" sz="3600" b="1" dirty="0">
-                <a:solidFill>
-                  <a:srgbClr val="990011"/>
+              <a:rPr lang="en-US" sz="1600" i="1" dirty="0">
+                <a:solidFill>
+                  <a:srgbClr val="555555"/>
                 </a:solidFill>
                 <a:latin typeface="Times New Roman" pitchFamily="34" charset="0"/>
                 <a:ea typeface="Times New Roman" pitchFamily="34" charset="-122"/>
                 <a:cs typeface="Times New Roman" pitchFamily="34" charset="-120"/>
               </a:rPr>
-              <a:t>1. Processes and Products of Chemical Weathering</a:t>
-            </a:r>
-            <a:endParaRPr lang="en-US" sz="3600" dirty="0"/>
-          </a:p>
-        </p:txBody>
-      </p:sp>
-      <p:sp>
-        <p:nvSpPr>
-          <p:cNvPr id="5" name="Text 2"/>
-          <p:cNvSpPr/>
-          <p:nvPr/>
-        </p:nvSpPr>
-        <p:spPr>
-          <a:xfrm>
-            <a:off x="4069080" y="1783080"/>
-            <a:ext cx="7802575" cy="4663440"/>
-          </a:xfrm>
-          <a:prstGeom prst="rect">
-            <a:avLst/>
-          </a:prstGeom>
-          <a:noFill/>
-          <a:ln/>
-        </p:spPr>
-        <p:txBody>
-          <a:bodyPr wrap="square" lIns="0" tIns="0" rIns="0" bIns="0" rtlCol="0" anchor="t"/>
-          <a:lstStyle/>
-          <a:p>
-            <a:pPr algn="l" indent="0" marL="0">
-              <a:spcAft>
-                <a:spcPts val="800"/>
-              </a:spcAft>
-              <a:buNone/>
-            </a:pPr>
-            <a:r>
-              <a:rPr lang="en-US" sz="4000" i="1" dirty="0">
-                <a:solidFill>
-                  <a:srgbClr val="111111"/>
-                </a:solidFill>
-                <a:latin typeface="Times New Roman" pitchFamily="34" charset="0"/>
-                <a:ea typeface="Times New Roman" pitchFamily="34" charset="-122"/>
-                <a:cs typeface="Times New Roman" pitchFamily="34" charset="-120"/>
-              </a:rPr>
-              <a:t>Chemical weathering takes place through the following processes:</a:t>
-            </a:r>
-            <a:endParaRPr lang="en-US" sz="4000" dirty="0"/>
-          </a:p>
-          <a:p>
-            <a:pPr algn="l" indent="0" marL="0">
-              <a:spcAft>
-                <a:spcPts val="800"/>
-              </a:spcAft>
-              <a:buNone/>
-            </a:pPr>
-            <a:r>
-              <a:rPr lang="en-US" sz="4000" b="1" dirty="0">
-                <a:solidFill>
-                  <a:srgbClr val="111111"/>
-                </a:solidFill>
-                <a:latin typeface="Times New Roman" pitchFamily="34" charset="0"/>
-                <a:ea typeface="Times New Roman" pitchFamily="34" charset="-122"/>
-                <a:cs typeface="Times New Roman" pitchFamily="34" charset="-120"/>
-              </a:rPr>
-              <a:t>Solution: </a:t>
-            </a:r>
-            <a:pPr algn="l" indent="0" marL="0">
-              <a:spcAft>
-                <a:spcPts val="800"/>
-              </a:spcAft>
-              <a:buNone/>
-            </a:pPr>
-            <a:r>
-              <a:rPr lang="en-US" sz="4000" dirty="0">
-                <a:solidFill>
-                  <a:srgbClr val="111111"/>
-                </a:solidFill>
-                <a:latin typeface="Times New Roman" pitchFamily="34" charset="0"/>
-                <a:ea typeface="Times New Roman" pitchFamily="34" charset="-122"/>
-                <a:cs typeface="Times New Roman" pitchFamily="34" charset="-120"/>
-              </a:rPr>
-              <a:t>Water dissolves soluble minerals such as rock salt.</a:t>
-            </a:r>
-            <a:endParaRPr lang="en-US" sz="4000" dirty="0"/>
-          </a:p>
-          <a:p>
-            <a:pPr algn="l" indent="0" marL="0">
-              <a:spcAft>
-                <a:spcPts val="800"/>
-              </a:spcAft>
-              <a:buNone/>
-            </a:pPr>
-            <a:r>
-              <a:rPr lang="en-US" sz="4000" b="1" dirty="0">
-                <a:solidFill>
-                  <a:srgbClr val="111111"/>
-                </a:solidFill>
-                <a:latin typeface="Times New Roman" pitchFamily="34" charset="0"/>
-                <a:ea typeface="Times New Roman" pitchFamily="34" charset="-122"/>
-                <a:cs typeface="Times New Roman" pitchFamily="34" charset="-120"/>
-              </a:rPr>
-              <a:t>Carbonation: </a:t>
-            </a:r>
-            <a:pPr algn="l" indent="0" marL="0">
-              <a:spcAft>
-                <a:spcPts val="800"/>
-              </a:spcAft>
-              <a:buNone/>
-            </a:pPr>
-            <a:r>
-              <a:rPr lang="en-US" sz="4000" dirty="0">
-                <a:solidFill>
-                  <a:srgbClr val="111111"/>
-                </a:solidFill>
-                <a:latin typeface="Times New Roman" pitchFamily="34" charset="0"/>
-                <a:ea typeface="Times New Roman" pitchFamily="34" charset="-122"/>
-                <a:cs typeface="Times New Roman" pitchFamily="34" charset="-120"/>
-              </a:rPr>
-              <a:t>Rainwater with carbon dioxide dissolves limestone and forms caves.</a:t>
-            </a:r>
-            <a:endParaRPr lang="en-US" sz="4000" dirty="0"/>
+              <a:t>Illustration: processes of chemical weathering</a:t>
+            </a:r>
+            <a:endParaRPr lang="en-US" sz="1600" dirty="0"/>
           </a:p>
         </p:txBody>
       </p:sp>
@@ -11740,7 +12365,7 @@
         <p:spPr>
           <a:xfrm>
             <a:off x="0" y="658368"/>
-            <a:ext cx="2468880" cy="5833872"/>
+            <a:ext cx="5120640" cy="5833872"/>
           </a:xfrm>
           <a:prstGeom prst="rect">
             <a:avLst/>
@@ -11755,8 +12380,8 @@
         </p:nvSpPr>
         <p:spPr>
           <a:xfrm>
-            <a:off x="2697480" y="1005840"/>
-            <a:ext cx="9174175" cy="731520"/>
+            <a:off x="5349240" y="1005840"/>
+            <a:ext cx="6522415" cy="731520"/>
           </a:xfrm>
           <a:prstGeom prst="rect">
             <a:avLst/>
@@ -11782,7 +12407,7 @@
                 <a:ea typeface="Times New Roman" pitchFamily="34" charset="-122"/>
                 <a:cs typeface="Times New Roman" pitchFamily="34" charset="-120"/>
               </a:rPr>
-              <a:t>1. Processes and Products of Chemical Weathering (continued)</a:t>
+              <a:t>1. Solution</a:t>
             </a:r>
             <a:endParaRPr lang="en-US" sz="3600" dirty="0"/>
           </a:p>
@@ -11796,8 +12421,8 @@
         </p:nvSpPr>
         <p:spPr>
           <a:xfrm>
-            <a:off x="2697480" y="1783080"/>
-            <a:ext cx="9174175" cy="4663440"/>
+            <a:off x="5349240" y="1783080"/>
+            <a:ext cx="6522415" cy="4663440"/>
           </a:xfrm>
           <a:prstGeom prst="rect">
             <a:avLst/>
@@ -11824,7 +12449,7 @@
                 <a:ea typeface="Times New Roman" pitchFamily="34" charset="-122"/>
                 <a:cs typeface="Times New Roman" pitchFamily="34" charset="-120"/>
               </a:rPr>
-              <a:t>Hydrolysis: </a:t>
+              <a:t>Products: </a:t>
             </a:r>
             <a:pPr algn="l" indent="0" marL="0">
               <a:spcAft>
@@ -11841,81 +12466,7 @@
                 <a:ea typeface="Times New Roman" pitchFamily="34" charset="-122"/>
                 <a:cs typeface="Times New Roman" pitchFamily="34" charset="-120"/>
               </a:rPr>
-              <a:t>Water reacts with feldspar in granite and changes it into clay.</a:t>
-            </a:r>
-            <a:endParaRPr lang="en-US" sz="4000" dirty="0"/>
-          </a:p>
-          <a:p>
-            <a:pPr algn="l" indent="0" marL="0">
-              <a:spcAft>
-                <a:spcPts val="800"/>
-              </a:spcAft>
-              <a:buNone/>
-            </a:pPr>
-            <a:r>
-              <a:rPr lang="en-US" sz="4000" b="1" dirty="0">
-                <a:solidFill>
-                  <a:srgbClr val="111111"/>
-                </a:solidFill>
-                <a:latin typeface="Times New Roman" pitchFamily="34" charset="0"/>
-                <a:ea typeface="Times New Roman" pitchFamily="34" charset="-122"/>
-                <a:cs typeface="Times New Roman" pitchFamily="34" charset="-120"/>
-              </a:rPr>
-              <a:t>Oxidation: </a:t>
-            </a:r>
-            <a:pPr algn="l" indent="0" marL="0">
-              <a:spcAft>
-                <a:spcPts val="800"/>
-              </a:spcAft>
-              <a:buNone/>
-            </a:pPr>
-            <a:r>
-              <a:rPr lang="en-US" sz="4000" dirty="0">
-                <a:solidFill>
-                  <a:srgbClr val="111111"/>
-                </a:solidFill>
-                <a:latin typeface="Times New Roman" pitchFamily="34" charset="0"/>
-                <a:ea typeface="Times New Roman" pitchFamily="34" charset="-122"/>
-                <a:cs typeface="Times New Roman" pitchFamily="34" charset="-120"/>
-              </a:rPr>
-              <a:t>Oxygen reacts with iron in rocks and makes them rusty and red, as in red soils.</a:t>
-            </a:r>
-            <a:endParaRPr lang="en-US" sz="4000" dirty="0"/>
-          </a:p>
-          <a:p>
-            <a:pPr algn="l" indent="0" marL="0">
-              <a:spcAft>
-                <a:spcPts val="800"/>
-              </a:spcAft>
-              <a:buNone/>
-            </a:pPr>
-            <a:r>
-              <a:rPr lang="en-US" sz="4000" b="1" dirty="0">
-                <a:solidFill>
-                  <a:srgbClr val="111111"/>
-                </a:solidFill>
-                <a:latin typeface="Times New Roman" pitchFamily="34" charset="0"/>
-                <a:ea typeface="Times New Roman" pitchFamily="34" charset="-122"/>
-                <a:cs typeface="Times New Roman" pitchFamily="34" charset="-120"/>
-              </a:rPr>
-              <a:t>Hydration: </a:t>
-            </a:r>
-            <a:pPr algn="l" indent="0" marL="0">
-              <a:spcAft>
-                <a:spcPts val="800"/>
-              </a:spcAft>
-              <a:buNone/>
-            </a:pPr>
-            <a:r>
-              <a:rPr lang="en-US" sz="4000" dirty="0">
-                <a:solidFill>
-                  <a:srgbClr val="111111"/>
-                </a:solidFill>
-                <a:latin typeface="Times New Roman" pitchFamily="34" charset="0"/>
-                <a:ea typeface="Times New Roman" pitchFamily="34" charset="-122"/>
-                <a:cs typeface="Times New Roman" pitchFamily="34" charset="-120"/>
-              </a:rPr>
-              <a:t>Some minerals take in water, swell and break the rock.</a:t>
+              <a:t>The minerals are carried away in the water, and hollows and holes are left in the rock.</a:t>
             </a:r>
             <a:endParaRPr lang="en-US" sz="4000" dirty="0"/>
           </a:p>
@@ -12033,9 +12584,129 @@
           </a:p>
         </p:txBody>
       </p:sp>
+      <p:sp>
+        <p:nvSpPr>
+          <p:cNvPr id="3" name="Text 1"/>
+          <p:cNvSpPr/>
+          <p:nvPr/>
+        </p:nvSpPr>
+        <p:spPr>
+          <a:xfrm>
+            <a:off x="365760" y="1005840"/>
+            <a:ext cx="11460175" cy="731520"/>
+          </a:xfrm>
+          <a:prstGeom prst="rect">
+            <a:avLst/>
+          </a:prstGeom>
+          <a:noFill/>
+          <a:ln/>
+        </p:spPr>
+        <p:txBody>
+          <a:bodyPr wrap="square" lIns="0" tIns="0" rIns="0" bIns="0" rtlCol="0" anchor="ctr">
+            <a:normAutofit/>
+          </a:bodyPr>
+          <a:lstStyle/>
+          <a:p>
+            <a:pPr algn="ctr" indent="0" marL="0">
+              <a:buNone/>
+            </a:pPr>
+            <a:r>
+              <a:rPr lang="en-US" sz="3600" b="1" dirty="0">
+                <a:solidFill>
+                  <a:srgbClr val="990011"/>
+                </a:solidFill>
+                <a:latin typeface="Times New Roman" pitchFamily="34" charset="0"/>
+                <a:ea typeface="Times New Roman" pitchFamily="34" charset="-122"/>
+                <a:cs typeface="Times New Roman" pitchFamily="34" charset="-120"/>
+              </a:rPr>
+              <a:t>2. Carbonation</a:t>
+            </a:r>
+            <a:endParaRPr lang="en-US" sz="3600" dirty="0"/>
+          </a:p>
+        </p:txBody>
+      </p:sp>
+      <p:sp>
+        <p:nvSpPr>
+          <p:cNvPr id="4" name="Text 2"/>
+          <p:cNvSpPr/>
+          <p:nvPr/>
+        </p:nvSpPr>
+        <p:spPr>
+          <a:xfrm>
+            <a:off x="365760" y="1783080"/>
+            <a:ext cx="4846320" cy="4617720"/>
+          </a:xfrm>
+          <a:prstGeom prst="rect">
+            <a:avLst/>
+          </a:prstGeom>
+          <a:noFill/>
+          <a:ln/>
+        </p:spPr>
+        <p:txBody>
+          <a:bodyPr wrap="square" lIns="0" tIns="0" rIns="0" bIns="0" rtlCol="0" anchor="t"/>
+          <a:lstStyle/>
+          <a:p>
+            <a:pPr algn="l" indent="0" marL="0">
+              <a:spcAft>
+                <a:spcPts val="800"/>
+              </a:spcAft>
+              <a:buNone/>
+            </a:pPr>
+            <a:r>
+              <a:rPr lang="en-US" sz="3600" i="1" dirty="0">
+                <a:solidFill>
+                  <a:srgbClr val="111111"/>
+                </a:solidFill>
+                <a:latin typeface="Times New Roman" pitchFamily="34" charset="0"/>
+                <a:ea typeface="Times New Roman" pitchFamily="34" charset="-122"/>
+                <a:cs typeface="Times New Roman" pitchFamily="34" charset="-120"/>
+              </a:rPr>
+              <a:t>Carbonation works as follows:</a:t>
+            </a:r>
+            <a:endParaRPr lang="en-US" sz="3600" dirty="0"/>
+          </a:p>
+          <a:p>
+            <a:pPr algn="l" indent="0" marL="0">
+              <a:spcAft>
+                <a:spcPts val="800"/>
+              </a:spcAft>
+              <a:buNone/>
+            </a:pPr>
+            <a:r>
+              <a:rPr lang="en-US" sz="3600" b="1" dirty="0">
+                <a:solidFill>
+                  <a:srgbClr val="111111"/>
+                </a:solidFill>
+                <a:latin typeface="Times New Roman" pitchFamily="34" charset="0"/>
+                <a:ea typeface="Times New Roman" pitchFamily="34" charset="-122"/>
+                <a:cs typeface="Times New Roman" pitchFamily="34" charset="-120"/>
+              </a:rPr>
+              <a:t>Process: </a:t>
+            </a:r>
+            <a:pPr algn="l" indent="0" marL="0">
+              <a:spcAft>
+                <a:spcPts val="800"/>
+              </a:spcAft>
+              <a:buNone/>
+            </a:pPr>
+            <a:r>
+              <a:rPr lang="en-US" sz="3600" dirty="0">
+                <a:solidFill>
+                  <a:srgbClr val="111111"/>
+                </a:solidFill>
+                <a:latin typeface="Times New Roman" pitchFamily="34" charset="0"/>
+                <a:ea typeface="Times New Roman" pitchFamily="34" charset="-122"/>
+                <a:cs typeface="Times New Roman" pitchFamily="34" charset="-120"/>
+              </a:rPr>
+              <a:t>Rain water absorbs carbon dioxide and becomes a weak acid that dissolves limestone.</a:t>
+            </a:r>
+            <a:endParaRPr lang="en-US" sz="3600" dirty="0"/>
+          </a:p>
+        </p:txBody>
+      </p:sp>
       <p:pic>
         <p:nvPicPr>
-          <p:cNvPr id="3" name="Image 0" descr="/home/claude/f4/img/minesec_sheet.png">    </p:cNvPr>
+          <p:cNvPr id="5" name="Image 0" descr="/home/claude/f4/img/v2/f4_karst.jpg">    </p:cNvPr>
           <p:cNvPicPr>
             <a:picLocks noChangeAspect="1"/>
           </p:cNvPicPr>
@@ -12049,8 +12720,8 @@
         </p:blipFill>
         <p:spPr>
           <a:xfrm>
-            <a:off x="0" y="658368"/>
-            <a:ext cx="5120640" cy="5833872"/>
+            <a:off x="5349240" y="2071212"/>
+            <a:ext cx="6659575" cy="3693983"/>
           </a:xfrm>
           <a:prstGeom prst="rect">
             <a:avLst/>
@@ -12059,14 +12730,14 @@
       </p:pic>
       <p:sp>
         <p:nvSpPr>
-          <p:cNvPr id="4" name="Text 1"/>
+          <p:cNvPr id="6" name="Text 3"/>
           <p:cNvSpPr/>
           <p:nvPr/>
         </p:nvSpPr>
         <p:spPr>
           <a:xfrm>
-            <a:off x="5349240" y="1005840"/>
-            <a:ext cx="6522415" cy="731520"/>
+            <a:off x="5349240" y="6089904"/>
+            <a:ext cx="6659575" cy="347472"/>
           </a:xfrm>
           <a:prstGeom prst="rect">
             <a:avLst/>
@@ -12075,85 +12746,24 @@
           <a:ln/>
         </p:spPr>
         <p:txBody>
-          <a:bodyPr wrap="square" lIns="0" tIns="0" rIns="0" bIns="0" rtlCol="0" anchor="ctr">
-            <a:normAutofit/>
-          </a:bodyPr>
+          <a:bodyPr wrap="square" lIns="0" tIns="0" rIns="0" bIns="0" rtlCol="0" anchor="ctr"/>
           <a:lstStyle/>
           <a:p>
             <a:pPr algn="ctr" indent="0" marL="0">
               <a:buNone/>
             </a:pPr>
             <a:r>
-              <a:rPr lang="en-US" sz="3600" b="1" dirty="0">
-                <a:solidFill>
-                  <a:srgbClr val="990011"/>
+              <a:rPr lang="en-US" sz="1600" i="1" dirty="0">
+                <a:solidFill>
+                  <a:srgbClr val="555555"/>
                 </a:solidFill>
                 <a:latin typeface="Times New Roman" pitchFamily="34" charset="0"/>
                 <a:ea typeface="Times New Roman" pitchFamily="34" charset="-122"/>
                 <a:cs typeface="Times New Roman" pitchFamily="34" charset="-120"/>
               </a:rPr>
-              <a:t>1. Processes and Products of Chemical Weathering (continued)</a:t>
-            </a:r>
-            <a:endParaRPr lang="en-US" sz="3600" dirty="0"/>
-          </a:p>
-        </p:txBody>
-      </p:sp>
-      <p:sp>
-        <p:nvSpPr>
-          <p:cNvPr id="5" name="Text 2"/>
-          <p:cNvSpPr/>
-          <p:nvPr/>
-        </p:nvSpPr>
-        <p:spPr>
-          <a:xfrm>
-            <a:off x="5349240" y="1783080"/>
-            <a:ext cx="6522415" cy="4663440"/>
-          </a:xfrm>
-          <a:prstGeom prst="rect">
-            <a:avLst/>
-          </a:prstGeom>
-          <a:noFill/>
-          <a:ln/>
-        </p:spPr>
-        <p:txBody>
-          <a:bodyPr wrap="square" lIns="0" tIns="0" rIns="0" bIns="0" rtlCol="0" anchor="t"/>
-          <a:lstStyle/>
-          <a:p>
-            <a:pPr algn="l" indent="0" marL="0">
-              <a:spcAft>
-                <a:spcPts val="800"/>
-              </a:spcAft>
-              <a:buNone/>
-            </a:pPr>
-            <a:r>
-              <a:rPr lang="en-US" sz="4000" b="1" dirty="0">
-                <a:solidFill>
-                  <a:srgbClr val="111111"/>
-                </a:solidFill>
-                <a:latin typeface="Times New Roman" pitchFamily="34" charset="0"/>
-                <a:ea typeface="Times New Roman" pitchFamily="34" charset="-122"/>
-                <a:cs typeface="Times New Roman" pitchFamily="34" charset="-120"/>
-              </a:rPr>
-              <a:t>Biological action: </a:t>
-            </a:r>
-            <a:pPr algn="l" indent="0" marL="0">
-              <a:spcAft>
-                <a:spcPts val="800"/>
-              </a:spcAft>
-              <a:buNone/>
-            </a:pPr>
-            <a:r>
-              <a:rPr lang="en-US" sz="4000" dirty="0">
-                <a:solidFill>
-                  <a:srgbClr val="111111"/>
-                </a:solidFill>
-                <a:latin typeface="Times New Roman" pitchFamily="34" charset="0"/>
-                <a:ea typeface="Times New Roman" pitchFamily="34" charset="-122"/>
-                <a:cs typeface="Times New Roman" pitchFamily="34" charset="-120"/>
-              </a:rPr>
-              <a:t>Acids from rotting plants and lichens attack rocks.</a:t>
-            </a:r>
-            <a:endParaRPr lang="en-US" sz="4000" dirty="0"/>
+              <a:t>Illustration: a limestone cave</a:t>
+            </a:r>
+            <a:endParaRPr lang="en-US" sz="1600" dirty="0"/>
           </a:p>
         </p:txBody>
       </p:sp>
@@ -12263,7 +12873,7 @@
                 <a:ea typeface="Calibri" pitchFamily="34" charset="-122"/>
                 <a:cs typeface="Calibri" pitchFamily="34" charset="-120"/>
               </a:rPr>
-              <a:t>FORMATIVE EVALUATION</a:t>
+              <a:t>BOARD SUMMARY</a:t>
             </a:r>
             <a:endParaRPr lang="en-US" sz="1400" dirty="0"/>
           </a:p>
@@ -12328,7 +12938,7 @@
                 <a:ea typeface="Times New Roman" pitchFamily="34" charset="-122"/>
                 <a:cs typeface="Times New Roman" pitchFamily="34" charset="-120"/>
               </a:rPr>
-              <a:t>Evaluation 1</a:t>
+              <a:t>2. Carbonation</a:t>
             </a:r>
             <a:endParaRPr lang="en-US" sz="3600" dirty="0"/>
           </a:p>
@@ -12362,7 +12972,7 @@
               <a:buNone/>
             </a:pPr>
             <a:r>
-              <a:rPr lang="en-US" sz="4000" dirty="0">
+              <a:rPr lang="en-US" sz="4000" b="1" dirty="0">
                 <a:solidFill>
                   <a:srgbClr val="111111"/>
                 </a:solidFill>
@@ -12370,7 +12980,24 @@
                 <a:ea typeface="Times New Roman" pitchFamily="34" charset="-122"/>
                 <a:cs typeface="Times New Roman" pitchFamily="34" charset="-120"/>
               </a:rPr>
-              <a:t>Why are the soils of Garoua red?</a:t>
+              <a:t>Products: </a:t>
+            </a:r>
+            <a:pPr algn="l" indent="0" marL="0">
+              <a:spcAft>
+                <a:spcPts val="800"/>
+              </a:spcAft>
+              <a:buNone/>
+            </a:pPr>
+            <a:r>
+              <a:rPr lang="en-US" sz="4000" dirty="0">
+                <a:solidFill>
+                  <a:srgbClr val="111111"/>
+                </a:solidFill>
+                <a:latin typeface="Times New Roman" pitchFamily="34" charset="0"/>
+                <a:ea typeface="Times New Roman" pitchFamily="34" charset="-122"/>
+                <a:cs typeface="Times New Roman" pitchFamily="34" charset="-120"/>
+              </a:rPr>
+              <a:t>Caves, stalactites, stalagmites and grooves in limestone areas.</a:t>
             </a:r>
             <a:endParaRPr lang="en-US" sz="4000" dirty="0"/>
           </a:p>
@@ -12482,7 +13109,7 @@
                 <a:ea typeface="Calibri" pitchFamily="34" charset="-122"/>
                 <a:cs typeface="Calibri" pitchFamily="34" charset="-120"/>
               </a:rPr>
-              <a:t>FORMATIVE EVALUATION</a:t>
+              <a:t>BOARD SUMMARY</a:t>
             </a:r>
             <a:endParaRPr lang="en-US" sz="1400" dirty="0"/>
           </a:p>
@@ -12547,7 +13174,7 @@
                 <a:ea typeface="Times New Roman" pitchFamily="34" charset="-122"/>
                 <a:cs typeface="Times New Roman" pitchFamily="34" charset="-120"/>
               </a:rPr>
-              <a:t>Expected Answer</a:t>
+              <a:t>3. Hydrolysis</a:t>
             </a:r>
             <a:endParaRPr lang="en-US" sz="3600" dirty="0"/>
           </a:p>
@@ -12581,7 +13208,7 @@
               <a:buNone/>
             </a:pPr>
             <a:r>
-              <a:rPr lang="en-US" sz="4000" dirty="0">
+              <a:rPr lang="en-US" sz="4000" i="1" dirty="0">
                 <a:solidFill>
                   <a:srgbClr val="111111"/>
                 </a:solidFill>
@@ -12589,7 +13216,81 @@
                 <a:ea typeface="Times New Roman" pitchFamily="34" charset="-122"/>
                 <a:cs typeface="Times New Roman" pitchFamily="34" charset="-120"/>
               </a:rPr>
-              <a:t>The iron in them is oxidised.</a:t>
+              <a:t>Hydrolysis works as follows:</a:t>
+            </a:r>
+            <a:endParaRPr lang="en-US" sz="4000" dirty="0"/>
+          </a:p>
+          <a:p>
+            <a:pPr algn="l" indent="0" marL="0">
+              <a:spcAft>
+                <a:spcPts val="800"/>
+              </a:spcAft>
+              <a:buNone/>
+            </a:pPr>
+            <a:r>
+              <a:rPr lang="en-US" sz="4000" b="1" dirty="0">
+                <a:solidFill>
+                  <a:srgbClr val="111111"/>
+                </a:solidFill>
+                <a:latin typeface="Times New Roman" pitchFamily="34" charset="0"/>
+                <a:ea typeface="Times New Roman" pitchFamily="34" charset="-122"/>
+                <a:cs typeface="Times New Roman" pitchFamily="34" charset="-120"/>
+              </a:rPr>
+              <a:t>Process: </a:t>
+            </a:r>
+            <a:pPr algn="l" indent="0" marL="0">
+              <a:spcAft>
+                <a:spcPts val="800"/>
+              </a:spcAft>
+              <a:buNone/>
+            </a:pPr>
+            <a:r>
+              <a:rPr lang="en-US" sz="4000" dirty="0">
+                <a:solidFill>
+                  <a:srgbClr val="111111"/>
+                </a:solidFill>
+                <a:latin typeface="Times New Roman" pitchFamily="34" charset="0"/>
+                <a:ea typeface="Times New Roman" pitchFamily="34" charset="-122"/>
+                <a:cs typeface="Times New Roman" pitchFamily="34" charset="-120"/>
+              </a:rPr>
+              <a:t>Water reacts with the feldspar of granite and changes it into clay.</a:t>
+            </a:r>
+            <a:endParaRPr lang="en-US" sz="4000" dirty="0"/>
+          </a:p>
+          <a:p>
+            <a:pPr algn="l" indent="0" marL="0">
+              <a:spcAft>
+                <a:spcPts val="800"/>
+              </a:spcAft>
+              <a:buNone/>
+            </a:pPr>
+            <a:r>
+              <a:rPr lang="en-US" sz="4000" b="1" dirty="0">
+                <a:solidFill>
+                  <a:srgbClr val="111111"/>
+                </a:solidFill>
+                <a:latin typeface="Times New Roman" pitchFamily="34" charset="0"/>
+                <a:ea typeface="Times New Roman" pitchFamily="34" charset="-122"/>
+                <a:cs typeface="Times New Roman" pitchFamily="34" charset="-120"/>
+              </a:rPr>
+              <a:t>Products: </a:t>
+            </a:r>
+            <a:pPr algn="l" indent="0" marL="0">
+              <a:spcAft>
+                <a:spcPts val="800"/>
+              </a:spcAft>
+              <a:buNone/>
+            </a:pPr>
+            <a:r>
+              <a:rPr lang="en-US" sz="4000" dirty="0">
+                <a:solidFill>
+                  <a:srgbClr val="111111"/>
+                </a:solidFill>
+                <a:latin typeface="Times New Roman" pitchFamily="34" charset="0"/>
+                <a:ea typeface="Times New Roman" pitchFamily="34" charset="-122"/>
+                <a:cs typeface="Times New Roman" pitchFamily="34" charset="-120"/>
+              </a:rPr>
+              <a:t>Clay (kaolin) and loose quartz sand, so granite crumbles.</a:t>
             </a:r>
             <a:endParaRPr lang="en-US" sz="4000" dirty="0"/>
           </a:p>
@@ -12701,15 +13402,135 @@
                 <a:ea typeface="Calibri" pitchFamily="34" charset="-122"/>
                 <a:cs typeface="Calibri" pitchFamily="34" charset="-120"/>
               </a:rPr>
-              <a:t>FORMATIVE EVALUATION</a:t>
+              <a:t>BOARD SUMMARY</a:t>
             </a:r>
             <a:endParaRPr lang="en-US" sz="1400" dirty="0"/>
+          </a:p>
+        </p:txBody>
+      </p:sp>
+      <p:sp>
+        <p:nvSpPr>
+          <p:cNvPr id="3" name="Text 1"/>
+          <p:cNvSpPr/>
+          <p:nvPr/>
+        </p:nvSpPr>
+        <p:spPr>
+          <a:xfrm>
+            <a:off x="365760" y="1005840"/>
+            <a:ext cx="11460175" cy="731520"/>
+          </a:xfrm>
+          <a:prstGeom prst="rect">
+            <a:avLst/>
+          </a:prstGeom>
+          <a:noFill/>
+          <a:ln/>
+        </p:spPr>
+        <p:txBody>
+          <a:bodyPr wrap="square" lIns="0" tIns="0" rIns="0" bIns="0" rtlCol="0" anchor="ctr">
+            <a:normAutofit/>
+          </a:bodyPr>
+          <a:lstStyle/>
+          <a:p>
+            <a:pPr algn="ctr" indent="0" marL="0">
+              <a:buNone/>
+            </a:pPr>
+            <a:r>
+              <a:rPr lang="en-US" sz="3600" b="1" dirty="0">
+                <a:solidFill>
+                  <a:srgbClr val="990011"/>
+                </a:solidFill>
+                <a:latin typeface="Times New Roman" pitchFamily="34" charset="0"/>
+                <a:ea typeface="Times New Roman" pitchFamily="34" charset="-122"/>
+                <a:cs typeface="Times New Roman" pitchFamily="34" charset="-120"/>
+              </a:rPr>
+              <a:t>4. Oxidation</a:t>
+            </a:r>
+            <a:endParaRPr lang="en-US" sz="3600" dirty="0"/>
+          </a:p>
+        </p:txBody>
+      </p:sp>
+      <p:sp>
+        <p:nvSpPr>
+          <p:cNvPr id="4" name="Text 2"/>
+          <p:cNvSpPr/>
+          <p:nvPr/>
+        </p:nvSpPr>
+        <p:spPr>
+          <a:xfrm>
+            <a:off x="365760" y="1783080"/>
+            <a:ext cx="4846320" cy="4617720"/>
+          </a:xfrm>
+          <a:prstGeom prst="rect">
+            <a:avLst/>
+          </a:prstGeom>
+          <a:noFill/>
+          <a:ln/>
+        </p:spPr>
+        <p:txBody>
+          <a:bodyPr wrap="square" lIns="0" tIns="0" rIns="0" bIns="0" rtlCol="0" anchor="t"/>
+          <a:lstStyle/>
+          <a:p>
+            <a:pPr algn="l" indent="0" marL="0">
+              <a:spcAft>
+                <a:spcPts val="800"/>
+              </a:spcAft>
+              <a:buNone/>
+            </a:pPr>
+            <a:r>
+              <a:rPr lang="en-US" sz="3600" i="1" dirty="0">
+                <a:solidFill>
+                  <a:srgbClr val="111111"/>
+                </a:solidFill>
+                <a:latin typeface="Times New Roman" pitchFamily="34" charset="0"/>
+                <a:ea typeface="Times New Roman" pitchFamily="34" charset="-122"/>
+                <a:cs typeface="Times New Roman" pitchFamily="34" charset="-120"/>
+              </a:rPr>
+              <a:t>Oxidation works as follows:</a:t>
+            </a:r>
+            <a:endParaRPr lang="en-US" sz="3600" dirty="0"/>
+          </a:p>
+          <a:p>
+            <a:pPr algn="l" indent="0" marL="0">
+              <a:spcAft>
+                <a:spcPts val="800"/>
+              </a:spcAft>
+              <a:buNone/>
+            </a:pPr>
+            <a:r>
+              <a:rPr lang="en-US" sz="3600" b="1" dirty="0">
+                <a:solidFill>
+                  <a:srgbClr val="111111"/>
+                </a:solidFill>
+                <a:latin typeface="Times New Roman" pitchFamily="34" charset="0"/>
+                <a:ea typeface="Times New Roman" pitchFamily="34" charset="-122"/>
+                <a:cs typeface="Times New Roman" pitchFamily="34" charset="-120"/>
+              </a:rPr>
+              <a:t>Process: </a:t>
+            </a:r>
+            <a:pPr algn="l" indent="0" marL="0">
+              <a:spcAft>
+                <a:spcPts val="800"/>
+              </a:spcAft>
+              <a:buNone/>
+            </a:pPr>
+            <a:r>
+              <a:rPr lang="en-US" sz="3600" dirty="0">
+                <a:solidFill>
+                  <a:srgbClr val="111111"/>
+                </a:solidFill>
+                <a:latin typeface="Times New Roman" pitchFamily="34" charset="0"/>
+                <a:ea typeface="Times New Roman" pitchFamily="34" charset="-122"/>
+                <a:cs typeface="Times New Roman" pitchFamily="34" charset="-120"/>
+              </a:rPr>
+              <a:t>Oxygen in air and water reacts with the iron in rocks, as rust forms on iron.</a:t>
+            </a:r>
+            <a:endParaRPr lang="en-US" sz="3600" dirty="0"/>
           </a:p>
         </p:txBody>
       </p:sp>
       <p:pic>
         <p:nvPicPr>
-          <p:cNvPr id="3" name="Image 0" descr="/home/claude/f4/img/minesec_sheet.png">    </p:cNvPr>
+          <p:cNvPr id="5" name="Image 0" descr="/home/claude/f4/img/v2/f4_rust.jpg">    </p:cNvPr>
           <p:cNvPicPr>
             <a:picLocks noChangeAspect="1"/>
           </p:cNvPicPr>
@@ -12723,8 +13544,8 @@
         </p:blipFill>
         <p:spPr>
           <a:xfrm>
-            <a:off x="0" y="658368"/>
-            <a:ext cx="5120640" cy="5833872"/>
+            <a:off x="5349240" y="2071212"/>
+            <a:ext cx="6659575" cy="3693983"/>
           </a:xfrm>
           <a:prstGeom prst="rect">
             <a:avLst/>
@@ -12733,14 +13554,14 @@
       </p:pic>
       <p:sp>
         <p:nvSpPr>
-          <p:cNvPr id="4" name="Text 1"/>
+          <p:cNvPr id="6" name="Text 3"/>
           <p:cNvSpPr/>
           <p:nvPr/>
         </p:nvSpPr>
         <p:spPr>
           <a:xfrm>
-            <a:off x="5349240" y="1005840"/>
-            <a:ext cx="6522415" cy="731520"/>
+            <a:off x="5349240" y="6089904"/>
+            <a:ext cx="6659575" cy="347472"/>
           </a:xfrm>
           <a:prstGeom prst="rect">
             <a:avLst/>
@@ -12749,68 +13570,24 @@
           <a:ln/>
         </p:spPr>
         <p:txBody>
-          <a:bodyPr wrap="square" lIns="0" tIns="0" rIns="0" bIns="0" rtlCol="0" anchor="ctr">
-            <a:normAutofit/>
-          </a:bodyPr>
+          <a:bodyPr wrap="square" lIns="0" tIns="0" rIns="0" bIns="0" rtlCol="0" anchor="ctr"/>
           <a:lstStyle/>
           <a:p>
             <a:pPr algn="ctr" indent="0" marL="0">
               <a:buNone/>
             </a:pPr>
             <a:r>
-              <a:rPr lang="en-US" sz="3600" b="1" dirty="0">
-                <a:solidFill>
-                  <a:srgbClr val="990011"/>
+              <a:rPr lang="en-US" sz="1600" i="1" dirty="0">
+                <a:solidFill>
+                  <a:srgbClr val="555555"/>
                 </a:solidFill>
                 <a:latin typeface="Times New Roman" pitchFamily="34" charset="0"/>
                 <a:ea typeface="Times New Roman" pitchFamily="34" charset="-122"/>
                 <a:cs typeface="Times New Roman" pitchFamily="34" charset="-120"/>
               </a:rPr>
-              <a:t>Evaluation 2</a:t>
-            </a:r>
-            <a:endParaRPr lang="en-US" sz="3600" dirty="0"/>
-          </a:p>
-        </p:txBody>
-      </p:sp>
-      <p:sp>
-        <p:nvSpPr>
-          <p:cNvPr id="5" name="Text 2"/>
-          <p:cNvSpPr/>
-          <p:nvPr/>
-        </p:nvSpPr>
-        <p:spPr>
-          <a:xfrm>
-            <a:off x="5349240" y="1783080"/>
-            <a:ext cx="6522415" cy="4663440"/>
-          </a:xfrm>
-          <a:prstGeom prst="rect">
-            <a:avLst/>
-          </a:prstGeom>
-          <a:noFill/>
-          <a:ln/>
-        </p:spPr>
-        <p:txBody>
-          <a:bodyPr wrap="square" lIns="0" tIns="0" rIns="0" bIns="0" rtlCol="0" anchor="t"/>
-          <a:lstStyle/>
-          <a:p>
-            <a:pPr algn="l" indent="0" marL="0">
-              <a:spcAft>
-                <a:spcPts val="800"/>
-              </a:spcAft>
-              <a:buNone/>
-            </a:pPr>
-            <a:r>
-              <a:rPr lang="en-US" sz="4000" dirty="0">
-                <a:solidFill>
-                  <a:srgbClr val="111111"/>
-                </a:solidFill>
-                <a:latin typeface="Times New Roman" pitchFamily="34" charset="0"/>
-                <a:ea typeface="Times New Roman" pitchFamily="34" charset="-122"/>
-                <a:cs typeface="Times New Roman" pitchFamily="34" charset="-120"/>
-              </a:rPr>
-              <a:t>What does carbonation produce in limestone?</a:t>
-            </a:r>
-            <a:endParaRPr lang="en-US" sz="4000" dirty="0"/>
+              <a:t>Illustration: rusty iron</a:t>
+            </a:r>
+            <a:endParaRPr lang="en-US" sz="1600" dirty="0"/>
           </a:p>
         </p:txBody>
       </p:sp>
@@ -12920,15 +13697,115 @@
                 <a:ea typeface="Calibri" pitchFamily="34" charset="-122"/>
                 <a:cs typeface="Calibri" pitchFamily="34" charset="-120"/>
               </a:rPr>
-              <a:t>FORMATIVE EVALUATION</a:t>
+              <a:t>BOARD SUMMARY</a:t>
             </a:r>
             <a:endParaRPr lang="en-US" sz="1400" dirty="0"/>
+          </a:p>
+        </p:txBody>
+      </p:sp>
+      <p:sp>
+        <p:nvSpPr>
+          <p:cNvPr id="3" name="Text 1"/>
+          <p:cNvSpPr/>
+          <p:nvPr/>
+        </p:nvSpPr>
+        <p:spPr>
+          <a:xfrm>
+            <a:off x="365760" y="1005840"/>
+            <a:ext cx="11460175" cy="731520"/>
+          </a:xfrm>
+          <a:prstGeom prst="rect">
+            <a:avLst/>
+          </a:prstGeom>
+          <a:noFill/>
+          <a:ln/>
+        </p:spPr>
+        <p:txBody>
+          <a:bodyPr wrap="square" lIns="0" tIns="0" rIns="0" bIns="0" rtlCol="0" anchor="ctr">
+            <a:normAutofit/>
+          </a:bodyPr>
+          <a:lstStyle/>
+          <a:p>
+            <a:pPr algn="ctr" indent="0" marL="0">
+              <a:buNone/>
+            </a:pPr>
+            <a:r>
+              <a:rPr lang="en-US" sz="3600" b="1" dirty="0">
+                <a:solidFill>
+                  <a:srgbClr val="990011"/>
+                </a:solidFill>
+                <a:latin typeface="Times New Roman" pitchFamily="34" charset="0"/>
+                <a:ea typeface="Times New Roman" pitchFamily="34" charset="-122"/>
+                <a:cs typeface="Times New Roman" pitchFamily="34" charset="-120"/>
+              </a:rPr>
+              <a:t>4. Oxidation</a:t>
+            </a:r>
+            <a:endParaRPr lang="en-US" sz="3600" dirty="0"/>
+          </a:p>
+        </p:txBody>
+      </p:sp>
+      <p:sp>
+        <p:nvSpPr>
+          <p:cNvPr id="4" name="Text 2"/>
+          <p:cNvSpPr/>
+          <p:nvPr/>
+        </p:nvSpPr>
+        <p:spPr>
+          <a:xfrm>
+            <a:off x="365760" y="1783080"/>
+            <a:ext cx="4846320" cy="4617720"/>
+          </a:xfrm>
+          <a:prstGeom prst="rect">
+            <a:avLst/>
+          </a:prstGeom>
+          <a:noFill/>
+          <a:ln/>
+        </p:spPr>
+        <p:txBody>
+          <a:bodyPr wrap="square" lIns="0" tIns="0" rIns="0" bIns="0" rtlCol="0" anchor="t"/>
+          <a:lstStyle/>
+          <a:p>
+            <a:pPr algn="l" indent="0" marL="0">
+              <a:spcAft>
+                <a:spcPts val="800"/>
+              </a:spcAft>
+              <a:buNone/>
+            </a:pPr>
+            <a:r>
+              <a:rPr lang="en-US" sz="3600" b="1" dirty="0">
+                <a:solidFill>
+                  <a:srgbClr val="111111"/>
+                </a:solidFill>
+                <a:latin typeface="Times New Roman" pitchFamily="34" charset="0"/>
+                <a:ea typeface="Times New Roman" pitchFamily="34" charset="-122"/>
+                <a:cs typeface="Times New Roman" pitchFamily="34" charset="-120"/>
+              </a:rPr>
+              <a:t>Products: </a:t>
+            </a:r>
+            <a:pPr algn="l" indent="0" marL="0">
+              <a:spcAft>
+                <a:spcPts val="800"/>
+              </a:spcAft>
+              <a:buNone/>
+            </a:pPr>
+            <a:r>
+              <a:rPr lang="en-US" sz="3600" dirty="0">
+                <a:solidFill>
+                  <a:srgbClr val="111111"/>
+                </a:solidFill>
+                <a:latin typeface="Times New Roman" pitchFamily="34" charset="0"/>
+                <a:ea typeface="Times New Roman" pitchFamily="34" charset="-122"/>
+                <a:cs typeface="Times New Roman" pitchFamily="34" charset="-120"/>
+              </a:rPr>
+              <a:t>Red, yellow or brown crumbly rock and red soils, such as the lateritic soils of Cameroon.</a:t>
+            </a:r>
+            <a:endParaRPr lang="en-US" sz="3600" dirty="0"/>
           </a:p>
         </p:txBody>
       </p:sp>
       <p:pic>
         <p:nvPicPr>
-          <p:cNvPr id="3" name="Image 0" descr="/home/claude/f4/img/minesec_sheet.png">    </p:cNvPr>
+          <p:cNvPr id="5" name="Image 0" descr="/home/claude/f4/img/v2/f4_redsoil.jpg">    </p:cNvPr>
           <p:cNvPicPr>
             <a:picLocks noChangeAspect="1"/>
           </p:cNvPicPr>
@@ -12942,8 +13819,8 @@
         </p:blipFill>
         <p:spPr>
           <a:xfrm>
-            <a:off x="0" y="658368"/>
-            <a:ext cx="5120640" cy="5833872"/>
+            <a:off x="5349240" y="2071212"/>
+            <a:ext cx="6659575" cy="3693983"/>
           </a:xfrm>
           <a:prstGeom prst="rect">
             <a:avLst/>
@@ -12952,14 +13829,14 @@
       </p:pic>
       <p:sp>
         <p:nvSpPr>
-          <p:cNvPr id="4" name="Text 1"/>
+          <p:cNvPr id="6" name="Text 3"/>
           <p:cNvSpPr/>
           <p:nvPr/>
         </p:nvSpPr>
         <p:spPr>
           <a:xfrm>
-            <a:off x="5349240" y="1005840"/>
-            <a:ext cx="6522415" cy="731520"/>
+            <a:off x="5349240" y="6089904"/>
+            <a:ext cx="6659575" cy="347472"/>
           </a:xfrm>
           <a:prstGeom prst="rect">
             <a:avLst/>
@@ -12968,68 +13845,24 @@
           <a:ln/>
         </p:spPr>
         <p:txBody>
-          <a:bodyPr wrap="square" lIns="0" tIns="0" rIns="0" bIns="0" rtlCol="0" anchor="ctr">
-            <a:normAutofit/>
-          </a:bodyPr>
+          <a:bodyPr wrap="square" lIns="0" tIns="0" rIns="0" bIns="0" rtlCol="0" anchor="ctr"/>
           <a:lstStyle/>
           <a:p>
             <a:pPr algn="ctr" indent="0" marL="0">
               <a:buNone/>
             </a:pPr>
             <a:r>
-              <a:rPr lang="en-US" sz="3600" b="1" dirty="0">
-                <a:solidFill>
-                  <a:srgbClr val="990011"/>
+              <a:rPr lang="en-US" sz="1600" i="1" dirty="0">
+                <a:solidFill>
+                  <a:srgbClr val="555555"/>
                 </a:solidFill>
                 <a:latin typeface="Times New Roman" pitchFamily="34" charset="0"/>
                 <a:ea typeface="Times New Roman" pitchFamily="34" charset="-122"/>
                 <a:cs typeface="Times New Roman" pitchFamily="34" charset="-120"/>
               </a:rPr>
-              <a:t>Expected Answer</a:t>
-            </a:r>
-            <a:endParaRPr lang="en-US" sz="3600" dirty="0"/>
-          </a:p>
-        </p:txBody>
-      </p:sp>
-      <p:sp>
-        <p:nvSpPr>
-          <p:cNvPr id="5" name="Text 2"/>
-          <p:cNvSpPr/>
-          <p:nvPr/>
-        </p:nvSpPr>
-        <p:spPr>
-          <a:xfrm>
-            <a:off x="5349240" y="1783080"/>
-            <a:ext cx="6522415" cy="4663440"/>
-          </a:xfrm>
-          <a:prstGeom prst="rect">
-            <a:avLst/>
-          </a:prstGeom>
-          <a:noFill/>
-          <a:ln/>
-        </p:spPr>
-        <p:txBody>
-          <a:bodyPr wrap="square" lIns="0" tIns="0" rIns="0" bIns="0" rtlCol="0" anchor="t"/>
-          <a:lstStyle/>
-          <a:p>
-            <a:pPr algn="l" indent="0" marL="0">
-              <a:spcAft>
-                <a:spcPts val="800"/>
-              </a:spcAft>
-              <a:buNone/>
-            </a:pPr>
-            <a:r>
-              <a:rPr lang="en-US" sz="4000" dirty="0">
-                <a:solidFill>
-                  <a:srgbClr val="111111"/>
-                </a:solidFill>
-                <a:latin typeface="Times New Roman" pitchFamily="34" charset="0"/>
-                <a:ea typeface="Times New Roman" pitchFamily="34" charset="-122"/>
-                <a:cs typeface="Times New Roman" pitchFamily="34" charset="-120"/>
-              </a:rPr>
-              <a:t>Caves.</a:t>
-            </a:r>
-            <a:endParaRPr lang="en-US" sz="4000" dirty="0"/>
+              <a:t>Illustration: a red soil</a:t>
+            </a:r>
+            <a:endParaRPr lang="en-US" sz="1600" dirty="0"/>
           </a:p>
         </p:txBody>
       </p:sp>
@@ -13139,7 +13972,7 @@
                 <a:ea typeface="Calibri" pitchFamily="34" charset="-122"/>
                 <a:cs typeface="Calibri" pitchFamily="34" charset="-120"/>
               </a:rPr>
-              <a:t>REMEDIATION</a:t>
+              <a:t>BOARD SUMMARY</a:t>
             </a:r>
             <a:endParaRPr lang="en-US" sz="1400" dirty="0"/>
           </a:p>
@@ -13162,7 +13995,7 @@
         <p:spPr>
           <a:xfrm>
             <a:off x="0" y="658368"/>
-            <a:ext cx="2468880" cy="5833872"/>
+            <a:ext cx="5120640" cy="5833872"/>
           </a:xfrm>
           <a:prstGeom prst="rect">
             <a:avLst/>
@@ -13177,8 +14010,8 @@
         </p:nvSpPr>
         <p:spPr>
           <a:xfrm>
-            <a:off x="2697480" y="1005840"/>
-            <a:ext cx="9174175" cy="731520"/>
+            <a:off x="5349240" y="1005840"/>
+            <a:ext cx="6522415" cy="731520"/>
           </a:xfrm>
           <a:prstGeom prst="rect">
             <a:avLst/>
@@ -13204,7 +14037,7 @@
                 <a:ea typeface="Times New Roman" pitchFamily="34" charset="-122"/>
                 <a:cs typeface="Times New Roman" pitchFamily="34" charset="-120"/>
               </a:rPr>
-              <a:t>Remediation</a:t>
+              <a:t>5. Hydration</a:t>
             </a:r>
             <a:endParaRPr lang="en-US" sz="3600" dirty="0"/>
           </a:p>
@@ -13218,8 +14051,8 @@
         </p:nvSpPr>
         <p:spPr>
           <a:xfrm>
-            <a:off x="2697480" y="1783080"/>
-            <a:ext cx="9174175" cy="4663440"/>
+            <a:off x="5349240" y="1783080"/>
+            <a:ext cx="6522415" cy="4663440"/>
           </a:xfrm>
           <a:prstGeom prst="rect">
             <a:avLst/>
@@ -13238,7 +14071,7 @@
               <a:buNone/>
             </a:pPr>
             <a:r>
-              <a:rPr lang="en-US" sz="4000" b="1" dirty="0">
+              <a:rPr lang="en-US" sz="4000" i="1" dirty="0">
                 <a:solidFill>
                   <a:srgbClr val="111111"/>
                 </a:solidFill>
@@ -13246,21 +14079,19 @@
                 <a:ea typeface="Times New Roman" pitchFamily="34" charset="-122"/>
                 <a:cs typeface="Times New Roman" pitchFamily="34" charset="-120"/>
               </a:rPr>
-              <a:t>Fill in the blanks:</a:t>
+              <a:t>Hydration works as follows:</a:t>
             </a:r>
             <a:endParaRPr lang="en-US" sz="4000" dirty="0"/>
           </a:p>
           <a:p>
-            <a:pPr algn="l" marL="342900" indent="-342900">
+            <a:pPr algn="l" indent="0" marL="0">
               <a:spcAft>
                 <a:spcPts val="800"/>
               </a:spcAft>
-              <a:buSzPct val="100000"/>
-              <a:buFont typeface="+mj-lt"/>
-              <a:buAutoNum type="arabicPeriod" startAt="1"/>
+              <a:buNone/>
             </a:pPr>
             <a:r>
-              <a:rPr lang="en-US" sz="4000" dirty="0">
+              <a:rPr lang="en-US" sz="4000" b="1" dirty="0">
                 <a:solidFill>
                   <a:srgbClr val="111111"/>
                 </a:solidFill>
@@ -13268,18 +14099,13 @@
                 <a:ea typeface="Times New Roman" pitchFamily="34" charset="-122"/>
                 <a:cs typeface="Times New Roman" pitchFamily="34" charset="-120"/>
               </a:rPr>
-              <a:t>The rusting of iron in rocks is ______.</a:t>
-            </a:r>
-            <a:endParaRPr lang="en-US" sz="4000" dirty="0"/>
-          </a:p>
-          <a:p>
-            <a:pPr algn="l" marL="342900" indent="-342900">
+              <a:t>Process: </a:t>
+            </a:r>
+            <a:pPr algn="l" indent="0" marL="0">
               <a:spcAft>
                 <a:spcPts val="800"/>
               </a:spcAft>
-              <a:buSzPct val="100000"/>
-              <a:buFont typeface="+mj-lt"/>
-              <a:buAutoNum type="arabicPeriod" startAt="1"/>
+              <a:buNone/>
             </a:pPr>
             <a:r>
               <a:rPr lang="en-US" sz="4000" dirty="0">
@@ -13290,21 +14116,19 @@
                 <a:ea typeface="Times New Roman" pitchFamily="34" charset="-122"/>
                 <a:cs typeface="Times New Roman" pitchFamily="34" charset="-120"/>
               </a:rPr>
-              <a:t>Rain water dissolves limestone by ______.</a:t>
+              <a:t>Some minerals take in water, swell and put pressure on the rock.</a:t>
             </a:r>
             <a:endParaRPr lang="en-US" sz="4000" dirty="0"/>
           </a:p>
           <a:p>
-            <a:pPr algn="l" marL="342900" indent="-342900">
+            <a:pPr algn="l" indent="0" marL="0">
               <a:spcAft>
                 <a:spcPts val="800"/>
               </a:spcAft>
-              <a:buSzPct val="100000"/>
-              <a:buFont typeface="+mj-lt"/>
-              <a:buAutoNum type="arabicPeriod" startAt="1"/>
+              <a:buNone/>
             </a:pPr>
             <a:r>
-              <a:rPr lang="en-US" sz="4000" dirty="0">
+              <a:rPr lang="en-US" sz="4000" b="1" dirty="0">
                 <a:solidFill>
                   <a:srgbClr val="111111"/>
                 </a:solidFill>
@@ -13312,7 +14136,24 @@
                 <a:ea typeface="Times New Roman" pitchFamily="34" charset="-122"/>
                 <a:cs typeface="Times New Roman" pitchFamily="34" charset="-120"/>
               </a:rPr>
-              <a:t>Granite changes into clay by ______.</a:t>
+              <a:t>Products: </a:t>
+            </a:r>
+            <a:pPr algn="l" indent="0" marL="0">
+              <a:spcAft>
+                <a:spcPts val="800"/>
+              </a:spcAft>
+              <a:buNone/>
+            </a:pPr>
+            <a:r>
+              <a:rPr lang="en-US" sz="4000" dirty="0">
+                <a:solidFill>
+                  <a:srgbClr val="111111"/>
+                </a:solidFill>
+                <a:latin typeface="Times New Roman" pitchFamily="34" charset="0"/>
+                <a:ea typeface="Times New Roman" pitchFamily="34" charset="-122"/>
+                <a:cs typeface="Times New Roman" pitchFamily="34" charset="-120"/>
+              </a:rPr>
+              <a:t>The rock becomes softer, cracks and breaks into pieces.</a:t>
             </a:r>
             <a:endParaRPr lang="en-US" sz="4000" dirty="0"/>
           </a:p>
@@ -13424,15 +14265,135 @@
                 <a:ea typeface="Calibri" pitchFamily="34" charset="-122"/>
                 <a:cs typeface="Calibri" pitchFamily="34" charset="-120"/>
               </a:rPr>
-              <a:t>HOMEWORK</a:t>
+              <a:t>BOARD SUMMARY</a:t>
             </a:r>
             <a:endParaRPr lang="en-US" sz="1400" dirty="0"/>
+          </a:p>
+        </p:txBody>
+      </p:sp>
+      <p:sp>
+        <p:nvSpPr>
+          <p:cNvPr id="3" name="Text 1"/>
+          <p:cNvSpPr/>
+          <p:nvPr/>
+        </p:nvSpPr>
+        <p:spPr>
+          <a:xfrm>
+            <a:off x="365760" y="1005840"/>
+            <a:ext cx="11460175" cy="731520"/>
+          </a:xfrm>
+          <a:prstGeom prst="rect">
+            <a:avLst/>
+          </a:prstGeom>
+          <a:noFill/>
+          <a:ln/>
+        </p:spPr>
+        <p:txBody>
+          <a:bodyPr wrap="square" lIns="0" tIns="0" rIns="0" bIns="0" rtlCol="0" anchor="ctr">
+            <a:normAutofit/>
+          </a:bodyPr>
+          <a:lstStyle/>
+          <a:p>
+            <a:pPr algn="ctr" indent="0" marL="0">
+              <a:buNone/>
+            </a:pPr>
+            <a:r>
+              <a:rPr lang="en-US" sz="3600" b="1" dirty="0">
+                <a:solidFill>
+                  <a:srgbClr val="990011"/>
+                </a:solidFill>
+                <a:latin typeface="Times New Roman" pitchFamily="34" charset="0"/>
+                <a:ea typeface="Times New Roman" pitchFamily="34" charset="-122"/>
+                <a:cs typeface="Times New Roman" pitchFamily="34" charset="-120"/>
+              </a:rPr>
+              <a:t>6. Chemically Induced Biological Weathering</a:t>
+            </a:r>
+            <a:endParaRPr lang="en-US" sz="3600" dirty="0"/>
+          </a:p>
+        </p:txBody>
+      </p:sp>
+      <p:sp>
+        <p:nvSpPr>
+          <p:cNvPr id="4" name="Text 2"/>
+          <p:cNvSpPr/>
+          <p:nvPr/>
+        </p:nvSpPr>
+        <p:spPr>
+          <a:xfrm>
+            <a:off x="365760" y="1783080"/>
+            <a:ext cx="4846320" cy="4617720"/>
+          </a:xfrm>
+          <a:prstGeom prst="rect">
+            <a:avLst/>
+          </a:prstGeom>
+          <a:noFill/>
+          <a:ln/>
+        </p:spPr>
+        <p:txBody>
+          <a:bodyPr wrap="square" lIns="0" tIns="0" rIns="0" bIns="0" rtlCol="0" anchor="t"/>
+          <a:lstStyle/>
+          <a:p>
+            <a:pPr algn="l" indent="0" marL="0">
+              <a:spcAft>
+                <a:spcPts val="800"/>
+              </a:spcAft>
+              <a:buNone/>
+            </a:pPr>
+            <a:r>
+              <a:rPr lang="en-US" sz="3600" i="1" dirty="0">
+                <a:solidFill>
+                  <a:srgbClr val="111111"/>
+                </a:solidFill>
+                <a:latin typeface="Times New Roman" pitchFamily="34" charset="0"/>
+                <a:ea typeface="Times New Roman" pitchFamily="34" charset="-122"/>
+                <a:cs typeface="Times New Roman" pitchFamily="34" charset="-120"/>
+              </a:rPr>
+              <a:t>Living things weather rocks chemically as follows:</a:t>
+            </a:r>
+            <a:endParaRPr lang="en-US" sz="3600" dirty="0"/>
+          </a:p>
+          <a:p>
+            <a:pPr algn="l" indent="0" marL="0">
+              <a:spcAft>
+                <a:spcPts val="800"/>
+              </a:spcAft>
+              <a:buNone/>
+            </a:pPr>
+            <a:r>
+              <a:rPr lang="en-US" sz="3600" b="1" dirty="0">
+                <a:solidFill>
+                  <a:srgbClr val="111111"/>
+                </a:solidFill>
+                <a:latin typeface="Times New Roman" pitchFamily="34" charset="0"/>
+                <a:ea typeface="Times New Roman" pitchFamily="34" charset="-122"/>
+                <a:cs typeface="Times New Roman" pitchFamily="34" charset="-120"/>
+              </a:rPr>
+              <a:t>Process: </a:t>
+            </a:r>
+            <a:pPr algn="l" indent="0" marL="0">
+              <a:spcAft>
+                <a:spcPts val="800"/>
+              </a:spcAft>
+              <a:buNone/>
+            </a:pPr>
+            <a:r>
+              <a:rPr lang="en-US" sz="3600" dirty="0">
+                <a:solidFill>
+                  <a:srgbClr val="111111"/>
+                </a:solidFill>
+                <a:latin typeface="Times New Roman" pitchFamily="34" charset="0"/>
+                <a:ea typeface="Times New Roman" pitchFamily="34" charset="-122"/>
+                <a:cs typeface="Times New Roman" pitchFamily="34" charset="-120"/>
+              </a:rPr>
+              <a:t>Rotting plants, lichens, mosses and bacteria produce acids that attack the minerals of rocks.</a:t>
+            </a:r>
+            <a:endParaRPr lang="en-US" sz="3600" dirty="0"/>
           </a:p>
         </p:txBody>
       </p:sp>
       <p:pic>
         <p:nvPicPr>
-          <p:cNvPr id="3" name="Image 0" descr="/home/claude/f4/img/minesec_sheet.png">    </p:cNvPr>
+          <p:cNvPr id="5" name="Image 0" descr="/home/claude/f4/img/v2/lsa_lichen.jpg">    </p:cNvPr>
           <p:cNvPicPr>
             <a:picLocks noChangeAspect="1"/>
           </p:cNvPicPr>
@@ -13446,8 +14407,8 @@
         </p:blipFill>
         <p:spPr>
           <a:xfrm>
-            <a:off x="0" y="658368"/>
-            <a:ext cx="5120640" cy="5833872"/>
+            <a:off x="5349240" y="2071212"/>
+            <a:ext cx="6659575" cy="3693983"/>
           </a:xfrm>
           <a:prstGeom prst="rect">
             <a:avLst/>
@@ -13456,14 +14417,14 @@
       </p:pic>
       <p:sp>
         <p:nvSpPr>
-          <p:cNvPr id="4" name="Text 1"/>
+          <p:cNvPr id="6" name="Text 3"/>
           <p:cNvSpPr/>
           <p:nvPr/>
         </p:nvSpPr>
         <p:spPr>
           <a:xfrm>
-            <a:off x="5349240" y="1005840"/>
-            <a:ext cx="6522415" cy="731520"/>
+            <a:off x="5349240" y="6089904"/>
+            <a:ext cx="6659575" cy="347472"/>
           </a:xfrm>
           <a:prstGeom prst="rect">
             <a:avLst/>
@@ -13472,68 +14433,24 @@
           <a:ln/>
         </p:spPr>
         <p:txBody>
-          <a:bodyPr wrap="square" lIns="0" tIns="0" rIns="0" bIns="0" rtlCol="0" anchor="ctr">
-            <a:normAutofit/>
-          </a:bodyPr>
+          <a:bodyPr wrap="square" lIns="0" tIns="0" rIns="0" bIns="0" rtlCol="0" anchor="ctr"/>
           <a:lstStyle/>
           <a:p>
             <a:pPr algn="ctr" indent="0" marL="0">
               <a:buNone/>
             </a:pPr>
             <a:r>
-              <a:rPr lang="en-US" sz="3600" b="1" dirty="0">
-                <a:solidFill>
-                  <a:srgbClr val="990011"/>
+              <a:rPr lang="en-US" sz="1600" i="1" dirty="0">
+                <a:solidFill>
+                  <a:srgbClr val="555555"/>
                 </a:solidFill>
                 <a:latin typeface="Times New Roman" pitchFamily="34" charset="0"/>
                 <a:ea typeface="Times New Roman" pitchFamily="34" charset="-122"/>
                 <a:cs typeface="Times New Roman" pitchFamily="34" charset="-120"/>
               </a:rPr>
-              <a:t>Homework</a:t>
-            </a:r>
-            <a:endParaRPr lang="en-US" sz="3600" dirty="0"/>
-          </a:p>
-        </p:txBody>
-      </p:sp>
-      <p:sp>
-        <p:nvSpPr>
-          <p:cNvPr id="5" name="Text 2"/>
-          <p:cNvSpPr/>
-          <p:nvPr/>
-        </p:nvSpPr>
-        <p:spPr>
-          <a:xfrm>
-            <a:off x="5349240" y="1783080"/>
-            <a:ext cx="6522415" cy="4663440"/>
-          </a:xfrm>
-          <a:prstGeom prst="rect">
-            <a:avLst/>
-          </a:prstGeom>
-          <a:noFill/>
-          <a:ln/>
-        </p:spPr>
-        <p:txBody>
-          <a:bodyPr wrap="square" lIns="0" tIns="0" rIns="0" bIns="0" rtlCol="0" anchor="t"/>
-          <a:lstStyle/>
-          <a:p>
-            <a:pPr algn="l" indent="0" marL="0">
-              <a:spcAft>
-                <a:spcPts val="800"/>
-              </a:spcAft>
-              <a:buNone/>
-            </a:pPr>
-            <a:r>
-              <a:rPr lang="en-US" sz="4000" dirty="0">
-                <a:solidFill>
-                  <a:srgbClr val="111111"/>
-                </a:solidFill>
-                <a:latin typeface="Times New Roman" pitchFamily="34" charset="0"/>
-                <a:ea typeface="Times New Roman" pitchFamily="34" charset="-122"/>
-                <a:cs typeface="Times New Roman" pitchFamily="34" charset="-120"/>
-              </a:rPr>
-              <a:t>Ask a farmer in your family where the soil of his farm comes from, and ask if he has seen rocks fall or roads blocked after heavy rain. Write his answers.</a:t>
-            </a:r>
-            <a:endParaRPr lang="en-US" sz="4000" dirty="0"/>
+              <a:t>Illustration: lichens on a rock</a:t>
+            </a:r>
+            <a:endParaRPr lang="en-US" sz="1600" dirty="0"/>
           </a:p>
         </p:txBody>
       </p:sp>
@@ -13643,7 +14560,7 @@
                 <a:ea typeface="Calibri" pitchFamily="34" charset="-122"/>
                 <a:cs typeface="Calibri" pitchFamily="34" charset="-120"/>
               </a:rPr>
-              <a:t>NEXT LESSON</a:t>
+              <a:t>BOARD SUMMARY</a:t>
             </a:r>
             <a:endParaRPr lang="en-US" sz="1400" dirty="0"/>
           </a:p>
@@ -13708,7 +14625,7 @@
                 <a:ea typeface="Times New Roman" pitchFamily="34" charset="-122"/>
                 <a:cs typeface="Times New Roman" pitchFamily="34" charset="-120"/>
               </a:rPr>
-              <a:t>Next Lesson</a:t>
+              <a:t>6. Chemically Induced Biological Weathering</a:t>
             </a:r>
             <a:endParaRPr lang="en-US" sz="3600" dirty="0"/>
           </a:p>
@@ -13732,10 +14649,10 @@
           <a:ln/>
         </p:spPr>
         <p:txBody>
-          <a:bodyPr wrap="square" lIns="0" tIns="0" rIns="0" bIns="0" rtlCol="0" anchor="ctr"/>
-          <a:lstStyle/>
-          <a:p>
-            <a:pPr algn="ctr" indent="0" marL="0">
+          <a:bodyPr wrap="square" lIns="0" tIns="0" rIns="0" bIns="0" rtlCol="0" anchor="t"/>
+          <a:lstStyle/>
+          <a:p>
+            <a:pPr algn="l" indent="0" marL="0">
               <a:spcAft>
                 <a:spcPts val="800"/>
               </a:spcAft>
@@ -13750,27 +14667,24 @@
                 <a:ea typeface="Times New Roman" pitchFamily="34" charset="-122"/>
                 <a:cs typeface="Times New Roman" pitchFamily="34" charset="-120"/>
               </a:rPr>
-              <a:t>Our next lesson will be on:</a:t>
-            </a:r>
-            <a:endParaRPr lang="en-US" sz="4000" dirty="0"/>
-          </a:p>
-          <a:p>
-            <a:pPr algn="ctr" indent="0" marL="0">
+              <a:t>Products: </a:t>
+            </a:r>
+            <a:pPr algn="l" indent="0" marL="0">
               <a:spcAft>
                 <a:spcPts val="800"/>
               </a:spcAft>
               <a:buNone/>
             </a:pPr>
             <a:r>
-              <a:rPr lang="en-US" sz="4000" b="1" dirty="0">
-                <a:solidFill>
-                  <a:srgbClr val="990011"/>
+              <a:rPr lang="en-US" sz="4000" dirty="0">
+                <a:solidFill>
+                  <a:srgbClr val="111111"/>
                 </a:solidFill>
                 <a:latin typeface="Times New Roman" pitchFamily="34" charset="0"/>
                 <a:ea typeface="Times New Roman" pitchFamily="34" charset="-122"/>
                 <a:cs typeface="Times New Roman" pitchFamily="34" charset="-120"/>
               </a:rPr>
-              <a:t>Further Study 2: The Impact of Weathering on the Environment</a:t>
+              <a:t>Rotten, crumbly rock and humus that forms soil.</a:t>
             </a:r>
             <a:endParaRPr lang="en-US" sz="4000" dirty="0"/>
           </a:p>
@@ -13882,6 +14796,1864 @@
                 <a:ea typeface="Calibri" pitchFamily="34" charset="-122"/>
                 <a:cs typeface="Calibri" pitchFamily="34" charset="-120"/>
               </a:rPr>
+              <a:t>FORMATIVE EVALUATION</a:t>
+            </a:r>
+            <a:endParaRPr lang="en-US" sz="1400" dirty="0"/>
+          </a:p>
+        </p:txBody>
+      </p:sp>
+      <p:pic>
+        <p:nvPicPr>
+          <p:cNvPr id="3" name="Image 0" descr="/home/claude/f4/img/minesec_sheet.png">    </p:cNvPr>
+          <p:cNvPicPr>
+            <a:picLocks noChangeAspect="1"/>
+          </p:cNvPicPr>
+          <p:nvPr/>
+        </p:nvPicPr>
+        <p:blipFill>
+          <a:blip r:embed="rId1"/>
+          <a:stretch>
+            <a:fillRect/>
+          </a:stretch>
+        </p:blipFill>
+        <p:spPr>
+          <a:xfrm>
+            <a:off x="0" y="658368"/>
+            <a:ext cx="5120640" cy="5833872"/>
+          </a:xfrm>
+          <a:prstGeom prst="rect">
+            <a:avLst/>
+          </a:prstGeom>
+        </p:spPr>
+      </p:pic>
+      <p:sp>
+        <p:nvSpPr>
+          <p:cNvPr id="4" name="Text 1"/>
+          <p:cNvSpPr/>
+          <p:nvPr/>
+        </p:nvSpPr>
+        <p:spPr>
+          <a:xfrm>
+            <a:off x="5349240" y="1005840"/>
+            <a:ext cx="6522415" cy="731520"/>
+          </a:xfrm>
+          <a:prstGeom prst="rect">
+            <a:avLst/>
+          </a:prstGeom>
+          <a:noFill/>
+          <a:ln/>
+        </p:spPr>
+        <p:txBody>
+          <a:bodyPr wrap="square" lIns="0" tIns="0" rIns="0" bIns="0" rtlCol="0" anchor="ctr">
+            <a:normAutofit/>
+          </a:bodyPr>
+          <a:lstStyle/>
+          <a:p>
+            <a:pPr algn="ctr" indent="0" marL="0">
+              <a:buNone/>
+            </a:pPr>
+            <a:r>
+              <a:rPr lang="en-US" sz="3600" b="1" dirty="0">
+                <a:solidFill>
+                  <a:srgbClr val="990011"/>
+                </a:solidFill>
+                <a:latin typeface="Times New Roman" pitchFamily="34" charset="0"/>
+                <a:ea typeface="Times New Roman" pitchFamily="34" charset="-122"/>
+                <a:cs typeface="Times New Roman" pitchFamily="34" charset="-120"/>
+              </a:rPr>
+              <a:t>Evaluation 1</a:t>
+            </a:r>
+            <a:endParaRPr lang="en-US" sz="3600" dirty="0"/>
+          </a:p>
+        </p:txBody>
+      </p:sp>
+      <p:sp>
+        <p:nvSpPr>
+          <p:cNvPr id="5" name="Text 2"/>
+          <p:cNvSpPr/>
+          <p:nvPr/>
+        </p:nvSpPr>
+        <p:spPr>
+          <a:xfrm>
+            <a:off x="5349240" y="1783080"/>
+            <a:ext cx="6522415" cy="4663440"/>
+          </a:xfrm>
+          <a:prstGeom prst="rect">
+            <a:avLst/>
+          </a:prstGeom>
+          <a:noFill/>
+          <a:ln/>
+        </p:spPr>
+        <p:txBody>
+          <a:bodyPr wrap="square" lIns="0" tIns="0" rIns="0" bIns="0" rtlCol="0" anchor="t"/>
+          <a:lstStyle/>
+          <a:p>
+            <a:pPr algn="l" indent="0" marL="0">
+              <a:spcAft>
+                <a:spcPts val="800"/>
+              </a:spcAft>
+              <a:buNone/>
+            </a:pPr>
+            <a:r>
+              <a:rPr lang="en-US" sz="4000" dirty="0">
+                <a:solidFill>
+                  <a:srgbClr val="111111"/>
+                </a:solidFill>
+                <a:latin typeface="Times New Roman" pitchFamily="34" charset="0"/>
+                <a:ea typeface="Times New Roman" pitchFamily="34" charset="-122"/>
+                <a:cs typeface="Times New Roman" pitchFamily="34" charset="-120"/>
+              </a:rPr>
+              <a:t>Why are the soils of Garoua red?</a:t>
+            </a:r>
+            <a:endParaRPr lang="en-US" sz="4000" dirty="0"/>
+          </a:p>
+        </p:txBody>
+      </p:sp>
+      <p:sp>
+        <p:nvSpPr>
+          <p:cNvPr id="25" name="Slide Number Placeholder 0"/>
+          <p:cNvSpPr>
+            <a:spLocks noGrp="1"/>
+          </p:cNvSpPr>
+          <p:nvPr>
+            <p:ph type="sldNum" sz="quarter" idx="4294967295"/>
+          </p:nvPr>
+        </p:nvSpPr>
+        <p:spPr>
+          <a:xfrm>
+            <a:off x="27432" y="91440"/>
+            <a:ext cx="585216" cy="475488"/>
+          </a:xfrm>
+          <a:prstGeom prst="rect">
+            <a:avLst/>
+          </a:prstGeom>
+          <a:extLst>
+            <a:ext uri="{C572A759-6A51-4108-AA02-DFA0A04FC94B}">
+              <ma14:wrappingTextBoxFlag xmlns:ma14="http://schemas.microsoft.com/office/mac/drawingml/2011/main" val="0"/>
+            </a:ext>
+          </a:extLst>
+        </p:spPr>
+        <p:txBody>
+          <a:bodyPr/>
+          <a:lstStyle>
+            <a:lvl1pPr>
+              <a:defRPr sz="2000">
+                <a:solidFill>
+                  <a:srgbClr val="FFFFFF"/>
+                </a:solidFill>
+                <a:latin typeface="Calibri"/>
+                <a:ea typeface="Calibri"/>
+                <a:cs typeface="Calibri"/>
+              </a:defRPr>
+            </a:lvl1pPr>
+          </a:lstStyle>
+          <a:p>
+            <a:pPr algn="ctr"/>
+            <a:fld id="{F7021451-1387-4CA6-816F-3879F97B5CBC}" type="slidenum">
+              <a:rPr b="1" lang="en-US"/>
+              <a:t>39</a:t>
+            </a:fld>
+            <a:endParaRPr lang="en-US"/>
+          </a:p>
+        </p:txBody>
+      </p:sp>
+    </p:spTree>
+  </p:cSld>
+  <p:clrMapOvr>
+    <a:masterClrMapping/>
+  </p:clrMapOvr>
+</p:sld>
+</file>
+
+<file path=ppt/slides/slide4.xml><?xml version="1.0" encoding="utf-8"?>
+<p:sld xmlns:a="http://schemas.openxmlformats.org/drawingml/2006/main" xmlns:r="http://schemas.openxmlformats.org/officeDocument/2006/relationships" xmlns:p="http://schemas.openxmlformats.org/presentationml/2006/main">
+  <p:cSld name="Slide 4">
+    <p:spTree>
+      <p:nvGrpSpPr>
+        <p:cNvPr id="1" name=""/>
+        <p:cNvGrpSpPr/>
+        <p:nvPr/>
+      </p:nvGrpSpPr>
+      <p:grpSpPr>
+        <a:xfrm>
+          <a:off x="0" y="0"/>
+          <a:ext cx="0" cy="0"/>
+          <a:chOff x="0" y="0"/>
+          <a:chExt cx="0" cy="0"/>
+        </a:xfrm>
+      </p:grpSpPr>
+      <p:sp>
+        <p:nvSpPr>
+          <p:cNvPr id="2" name="Text 0"/>
+          <p:cNvSpPr/>
+          <p:nvPr/>
+        </p:nvSpPr>
+        <p:spPr>
+          <a:xfrm>
+            <a:off x="457200" y="713232"/>
+            <a:ext cx="11368735" cy="274320"/>
+          </a:xfrm>
+          <a:prstGeom prst="rect">
+            <a:avLst/>
+          </a:prstGeom>
+          <a:noFill/>
+          <a:ln/>
+        </p:spPr>
+        <p:txBody>
+          <a:bodyPr wrap="square" lIns="0" tIns="0" rIns="0" bIns="0" rtlCol="0" anchor="ctr"/>
+          <a:lstStyle/>
+          <a:p>
+            <a:pPr algn="r" indent="0" marL="0">
+              <a:buNone/>
+            </a:pPr>
+            <a:r>
+              <a:rPr lang="en-US" sz="1400" b="1" dirty="0">
+                <a:solidFill>
+                  <a:srgbClr val="1C3F6E"/>
+                </a:solidFill>
+                <a:latin typeface="Calibri" pitchFamily="34" charset="0"/>
+                <a:ea typeface="Calibri" pitchFamily="34" charset="-122"/>
+                <a:cs typeface="Calibri" pitchFamily="34" charset="-120"/>
+              </a:rPr>
+              <a:t>HOMEWORK CORRECTION</a:t>
+            </a:r>
+            <a:endParaRPr lang="en-US" sz="1400" dirty="0"/>
+          </a:p>
+        </p:txBody>
+      </p:sp>
+      <p:pic>
+        <p:nvPicPr>
+          <p:cNvPr id="3" name="Image 0" descr="/home/claude/f4/img/minesec_sheet.png">    </p:cNvPr>
+          <p:cNvPicPr>
+            <a:picLocks noChangeAspect="1"/>
+          </p:cNvPicPr>
+          <p:nvPr/>
+        </p:nvPicPr>
+        <p:blipFill>
+          <a:blip r:embed="rId1"/>
+          <a:stretch>
+            <a:fillRect/>
+          </a:stretch>
+        </p:blipFill>
+        <p:spPr>
+          <a:xfrm>
+            <a:off x="0" y="658368"/>
+            <a:ext cx="3840480" cy="5833872"/>
+          </a:xfrm>
+          <a:prstGeom prst="rect">
+            <a:avLst/>
+          </a:prstGeom>
+        </p:spPr>
+      </p:pic>
+      <p:sp>
+        <p:nvSpPr>
+          <p:cNvPr id="4" name="Text 1"/>
+          <p:cNvSpPr/>
+          <p:nvPr/>
+        </p:nvSpPr>
+        <p:spPr>
+          <a:xfrm>
+            <a:off x="4069080" y="1005840"/>
+            <a:ext cx="7802575" cy="731520"/>
+          </a:xfrm>
+          <a:prstGeom prst="rect">
+            <a:avLst/>
+          </a:prstGeom>
+          <a:noFill/>
+          <a:ln/>
+        </p:spPr>
+        <p:txBody>
+          <a:bodyPr wrap="square" lIns="0" tIns="0" rIns="0" bIns="0" rtlCol="0" anchor="ctr">
+            <a:normAutofit/>
+          </a:bodyPr>
+          <a:lstStyle/>
+          <a:p>
+            <a:pPr algn="ctr" indent="0" marL="0">
+              <a:buNone/>
+            </a:pPr>
+            <a:r>
+              <a:rPr lang="en-US" sz="3600" b="1" dirty="0">
+                <a:solidFill>
+                  <a:srgbClr val="990011"/>
+                </a:solidFill>
+                <a:latin typeface="Times New Roman" pitchFamily="34" charset="0"/>
+                <a:ea typeface="Times New Roman" pitchFamily="34" charset="-122"/>
+                <a:cs typeface="Times New Roman" pitchFamily="34" charset="-120"/>
+              </a:rPr>
+              <a:t>Correction of the Homework</a:t>
+            </a:r>
+            <a:endParaRPr lang="en-US" sz="3600" dirty="0"/>
+          </a:p>
+        </p:txBody>
+      </p:sp>
+      <p:sp>
+        <p:nvSpPr>
+          <p:cNvPr id="5" name="Text 2"/>
+          <p:cNvSpPr/>
+          <p:nvPr/>
+        </p:nvSpPr>
+        <p:spPr>
+          <a:xfrm>
+            <a:off x="4069080" y="1783080"/>
+            <a:ext cx="7802575" cy="4663440"/>
+          </a:xfrm>
+          <a:prstGeom prst="rect">
+            <a:avLst/>
+          </a:prstGeom>
+          <a:noFill/>
+          <a:ln/>
+        </p:spPr>
+        <p:txBody>
+          <a:bodyPr wrap="square" lIns="0" tIns="0" rIns="0" bIns="0" rtlCol="0" anchor="t"/>
+          <a:lstStyle/>
+          <a:p>
+            <a:pPr algn="l" indent="0" marL="0">
+              <a:spcAft>
+                <a:spcPts val="800"/>
+              </a:spcAft>
+              <a:buNone/>
+            </a:pPr>
+            <a:r>
+              <a:rPr lang="en-US" sz="4000" b="1" dirty="0">
+                <a:solidFill>
+                  <a:srgbClr val="1C3F6E"/>
+                </a:solidFill>
+                <a:latin typeface="Times New Roman" pitchFamily="34" charset="0"/>
+                <a:ea typeface="Times New Roman" pitchFamily="34" charset="-122"/>
+                <a:cs typeface="Times New Roman" pitchFamily="34" charset="-120"/>
+              </a:rPr>
+              <a:t>Question (Lesson 16: Physical Weathering Processes and Products):</a:t>
+            </a:r>
+            <a:endParaRPr lang="en-US" sz="4000" dirty="0"/>
+          </a:p>
+          <a:p>
+            <a:pPr algn="l" indent="0" marL="0">
+              <a:spcAft>
+                <a:spcPts val="800"/>
+              </a:spcAft>
+              <a:buNone/>
+            </a:pPr>
+            <a:r>
+              <a:rPr lang="en-US" sz="4000" dirty="0">
+                <a:solidFill>
+                  <a:srgbClr val="111111"/>
+                </a:solidFill>
+                <a:latin typeface="Times New Roman" pitchFamily="34" charset="0"/>
+                <a:ea typeface="Times New Roman" pitchFamily="34" charset="-122"/>
+                <a:cs typeface="Times New Roman" pitchFamily="34" charset="-120"/>
+              </a:rPr>
+              <a:t>Look at an old iron gate, a roofing sheet or a nail left in the rain. Write what happened to it and what colour it became.</a:t>
+            </a:r>
+            <a:endParaRPr lang="en-US" sz="4000" dirty="0"/>
+          </a:p>
+        </p:txBody>
+      </p:sp>
+      <p:sp>
+        <p:nvSpPr>
+          <p:cNvPr id="25" name="Slide Number Placeholder 0"/>
+          <p:cNvSpPr>
+            <a:spLocks noGrp="1"/>
+          </p:cNvSpPr>
+          <p:nvPr>
+            <p:ph type="sldNum" sz="quarter" idx="4294967295"/>
+          </p:nvPr>
+        </p:nvSpPr>
+        <p:spPr>
+          <a:xfrm>
+            <a:off x="27432" y="91440"/>
+            <a:ext cx="585216" cy="475488"/>
+          </a:xfrm>
+          <a:prstGeom prst="rect">
+            <a:avLst/>
+          </a:prstGeom>
+          <a:extLst>
+            <a:ext uri="{C572A759-6A51-4108-AA02-DFA0A04FC94B}">
+              <ma14:wrappingTextBoxFlag xmlns:ma14="http://schemas.microsoft.com/office/mac/drawingml/2011/main" val="0"/>
+            </a:ext>
+          </a:extLst>
+        </p:spPr>
+        <p:txBody>
+          <a:bodyPr/>
+          <a:lstStyle>
+            <a:lvl1pPr>
+              <a:defRPr sz="2000">
+                <a:solidFill>
+                  <a:srgbClr val="FFFFFF"/>
+                </a:solidFill>
+                <a:latin typeface="Calibri"/>
+                <a:ea typeface="Calibri"/>
+                <a:cs typeface="Calibri"/>
+              </a:defRPr>
+            </a:lvl1pPr>
+          </a:lstStyle>
+          <a:p>
+            <a:pPr algn="ctr"/>
+            <a:fld id="{F7021451-1387-4CA6-816F-3879F97B5CBC}" type="slidenum">
+              <a:rPr b="1" lang="en-US"/>
+              <a:t>4</a:t>
+            </a:fld>
+            <a:endParaRPr lang="en-US"/>
+          </a:p>
+        </p:txBody>
+      </p:sp>
+    </p:spTree>
+  </p:cSld>
+  <p:clrMapOvr>
+    <a:masterClrMapping/>
+  </p:clrMapOvr>
+</p:sld>
+</file>
+
+<file path=ppt/slides/slide40.xml><?xml version="1.0" encoding="utf-8"?>
+<p:sld xmlns:a="http://schemas.openxmlformats.org/drawingml/2006/main" xmlns:r="http://schemas.openxmlformats.org/officeDocument/2006/relationships" xmlns:p="http://schemas.openxmlformats.org/presentationml/2006/main">
+  <p:cSld name="Slide 40">
+    <p:spTree>
+      <p:nvGrpSpPr>
+        <p:cNvPr id="1" name=""/>
+        <p:cNvGrpSpPr/>
+        <p:nvPr/>
+      </p:nvGrpSpPr>
+      <p:grpSpPr>
+        <a:xfrm>
+          <a:off x="0" y="0"/>
+          <a:ext cx="0" cy="0"/>
+          <a:chOff x="0" y="0"/>
+          <a:chExt cx="0" cy="0"/>
+        </a:xfrm>
+      </p:grpSpPr>
+      <p:sp>
+        <p:nvSpPr>
+          <p:cNvPr id="2" name="Text 0"/>
+          <p:cNvSpPr/>
+          <p:nvPr/>
+        </p:nvSpPr>
+        <p:spPr>
+          <a:xfrm>
+            <a:off x="457200" y="713232"/>
+            <a:ext cx="11368735" cy="274320"/>
+          </a:xfrm>
+          <a:prstGeom prst="rect">
+            <a:avLst/>
+          </a:prstGeom>
+          <a:noFill/>
+          <a:ln/>
+        </p:spPr>
+        <p:txBody>
+          <a:bodyPr wrap="square" lIns="0" tIns="0" rIns="0" bIns="0" rtlCol="0" anchor="ctr"/>
+          <a:lstStyle/>
+          <a:p>
+            <a:pPr algn="r" indent="0" marL="0">
+              <a:buNone/>
+            </a:pPr>
+            <a:r>
+              <a:rPr lang="en-US" sz="1400" b="1" dirty="0">
+                <a:solidFill>
+                  <a:srgbClr val="1C3F6E"/>
+                </a:solidFill>
+                <a:latin typeface="Calibri" pitchFamily="34" charset="0"/>
+                <a:ea typeface="Calibri" pitchFamily="34" charset="-122"/>
+                <a:cs typeface="Calibri" pitchFamily="34" charset="-120"/>
+              </a:rPr>
+              <a:t>FORMATIVE EVALUATION</a:t>
+            </a:r>
+            <a:endParaRPr lang="en-US" sz="1400" dirty="0"/>
+          </a:p>
+        </p:txBody>
+      </p:sp>
+      <p:pic>
+        <p:nvPicPr>
+          <p:cNvPr id="3" name="Image 0" descr="/home/claude/f4/img/minesec_sheet.png">    </p:cNvPr>
+          <p:cNvPicPr>
+            <a:picLocks noChangeAspect="1"/>
+          </p:cNvPicPr>
+          <p:nvPr/>
+        </p:nvPicPr>
+        <p:blipFill>
+          <a:blip r:embed="rId1"/>
+          <a:stretch>
+            <a:fillRect/>
+          </a:stretch>
+        </p:blipFill>
+        <p:spPr>
+          <a:xfrm>
+            <a:off x="0" y="658368"/>
+            <a:ext cx="5120640" cy="5833872"/>
+          </a:xfrm>
+          <a:prstGeom prst="rect">
+            <a:avLst/>
+          </a:prstGeom>
+        </p:spPr>
+      </p:pic>
+      <p:sp>
+        <p:nvSpPr>
+          <p:cNvPr id="4" name="Text 1"/>
+          <p:cNvSpPr/>
+          <p:nvPr/>
+        </p:nvSpPr>
+        <p:spPr>
+          <a:xfrm>
+            <a:off x="5349240" y="1005840"/>
+            <a:ext cx="6522415" cy="731520"/>
+          </a:xfrm>
+          <a:prstGeom prst="rect">
+            <a:avLst/>
+          </a:prstGeom>
+          <a:noFill/>
+          <a:ln/>
+        </p:spPr>
+        <p:txBody>
+          <a:bodyPr wrap="square" lIns="0" tIns="0" rIns="0" bIns="0" rtlCol="0" anchor="ctr">
+            <a:normAutofit/>
+          </a:bodyPr>
+          <a:lstStyle/>
+          <a:p>
+            <a:pPr algn="ctr" indent="0" marL="0">
+              <a:buNone/>
+            </a:pPr>
+            <a:r>
+              <a:rPr lang="en-US" sz="3600" b="1" dirty="0">
+                <a:solidFill>
+                  <a:srgbClr val="990011"/>
+                </a:solidFill>
+                <a:latin typeface="Times New Roman" pitchFamily="34" charset="0"/>
+                <a:ea typeface="Times New Roman" pitchFamily="34" charset="-122"/>
+                <a:cs typeface="Times New Roman" pitchFamily="34" charset="-120"/>
+              </a:rPr>
+              <a:t>Expected Answer</a:t>
+            </a:r>
+            <a:endParaRPr lang="en-US" sz="3600" dirty="0"/>
+          </a:p>
+        </p:txBody>
+      </p:sp>
+      <p:sp>
+        <p:nvSpPr>
+          <p:cNvPr id="5" name="Text 2"/>
+          <p:cNvSpPr/>
+          <p:nvPr/>
+        </p:nvSpPr>
+        <p:spPr>
+          <a:xfrm>
+            <a:off x="5349240" y="1783080"/>
+            <a:ext cx="6522415" cy="4663440"/>
+          </a:xfrm>
+          <a:prstGeom prst="rect">
+            <a:avLst/>
+          </a:prstGeom>
+          <a:noFill/>
+          <a:ln/>
+        </p:spPr>
+        <p:txBody>
+          <a:bodyPr wrap="square" lIns="0" tIns="0" rIns="0" bIns="0" rtlCol="0" anchor="t"/>
+          <a:lstStyle/>
+          <a:p>
+            <a:pPr algn="l" indent="0" marL="0">
+              <a:spcAft>
+                <a:spcPts val="800"/>
+              </a:spcAft>
+              <a:buNone/>
+            </a:pPr>
+            <a:r>
+              <a:rPr lang="en-US" sz="4000" dirty="0">
+                <a:solidFill>
+                  <a:srgbClr val="111111"/>
+                </a:solidFill>
+                <a:latin typeface="Times New Roman" pitchFamily="34" charset="0"/>
+                <a:ea typeface="Times New Roman" pitchFamily="34" charset="-122"/>
+                <a:cs typeface="Times New Roman" pitchFamily="34" charset="-120"/>
+              </a:rPr>
+              <a:t>The iron in them is oxidised.</a:t>
+            </a:r>
+            <a:endParaRPr lang="en-US" sz="4000" dirty="0"/>
+          </a:p>
+        </p:txBody>
+      </p:sp>
+      <p:sp>
+        <p:nvSpPr>
+          <p:cNvPr id="25" name="Slide Number Placeholder 0"/>
+          <p:cNvSpPr>
+            <a:spLocks noGrp="1"/>
+          </p:cNvSpPr>
+          <p:nvPr>
+            <p:ph type="sldNum" sz="quarter" idx="4294967295"/>
+          </p:nvPr>
+        </p:nvSpPr>
+        <p:spPr>
+          <a:xfrm>
+            <a:off x="27432" y="91440"/>
+            <a:ext cx="585216" cy="475488"/>
+          </a:xfrm>
+          <a:prstGeom prst="rect">
+            <a:avLst/>
+          </a:prstGeom>
+          <a:extLst>
+            <a:ext uri="{C572A759-6A51-4108-AA02-DFA0A04FC94B}">
+              <ma14:wrappingTextBoxFlag xmlns:ma14="http://schemas.microsoft.com/office/mac/drawingml/2011/main" val="0"/>
+            </a:ext>
+          </a:extLst>
+        </p:spPr>
+        <p:txBody>
+          <a:bodyPr/>
+          <a:lstStyle>
+            <a:lvl1pPr>
+              <a:defRPr sz="2000">
+                <a:solidFill>
+                  <a:srgbClr val="FFFFFF"/>
+                </a:solidFill>
+                <a:latin typeface="Calibri"/>
+                <a:ea typeface="Calibri"/>
+                <a:cs typeface="Calibri"/>
+              </a:defRPr>
+            </a:lvl1pPr>
+          </a:lstStyle>
+          <a:p>
+            <a:pPr algn="ctr"/>
+            <a:fld id="{F7021451-1387-4CA6-816F-3879F97B5CBC}" type="slidenum">
+              <a:rPr b="1" lang="en-US"/>
+              <a:t>40</a:t>
+            </a:fld>
+            <a:endParaRPr lang="en-US"/>
+          </a:p>
+        </p:txBody>
+      </p:sp>
+    </p:spTree>
+  </p:cSld>
+  <p:clrMapOvr>
+    <a:masterClrMapping/>
+  </p:clrMapOvr>
+</p:sld>
+</file>
+
+<file path=ppt/slides/slide41.xml><?xml version="1.0" encoding="utf-8"?>
+<p:sld xmlns:a="http://schemas.openxmlformats.org/drawingml/2006/main" xmlns:r="http://schemas.openxmlformats.org/officeDocument/2006/relationships" xmlns:p="http://schemas.openxmlformats.org/presentationml/2006/main">
+  <p:cSld name="Slide 41">
+    <p:spTree>
+      <p:nvGrpSpPr>
+        <p:cNvPr id="1" name=""/>
+        <p:cNvGrpSpPr/>
+        <p:nvPr/>
+      </p:nvGrpSpPr>
+      <p:grpSpPr>
+        <a:xfrm>
+          <a:off x="0" y="0"/>
+          <a:ext cx="0" cy="0"/>
+          <a:chOff x="0" y="0"/>
+          <a:chExt cx="0" cy="0"/>
+        </a:xfrm>
+      </p:grpSpPr>
+      <p:sp>
+        <p:nvSpPr>
+          <p:cNvPr id="2" name="Text 0"/>
+          <p:cNvSpPr/>
+          <p:nvPr/>
+        </p:nvSpPr>
+        <p:spPr>
+          <a:xfrm>
+            <a:off x="457200" y="713232"/>
+            <a:ext cx="11368735" cy="274320"/>
+          </a:xfrm>
+          <a:prstGeom prst="rect">
+            <a:avLst/>
+          </a:prstGeom>
+          <a:noFill/>
+          <a:ln/>
+        </p:spPr>
+        <p:txBody>
+          <a:bodyPr wrap="square" lIns="0" tIns="0" rIns="0" bIns="0" rtlCol="0" anchor="ctr"/>
+          <a:lstStyle/>
+          <a:p>
+            <a:pPr algn="r" indent="0" marL="0">
+              <a:buNone/>
+            </a:pPr>
+            <a:r>
+              <a:rPr lang="en-US" sz="1400" b="1" dirty="0">
+                <a:solidFill>
+                  <a:srgbClr val="1C3F6E"/>
+                </a:solidFill>
+                <a:latin typeface="Calibri" pitchFamily="34" charset="0"/>
+                <a:ea typeface="Calibri" pitchFamily="34" charset="-122"/>
+                <a:cs typeface="Calibri" pitchFamily="34" charset="-120"/>
+              </a:rPr>
+              <a:t>FORMATIVE EVALUATION</a:t>
+            </a:r>
+            <a:endParaRPr lang="en-US" sz="1400" dirty="0"/>
+          </a:p>
+        </p:txBody>
+      </p:sp>
+      <p:pic>
+        <p:nvPicPr>
+          <p:cNvPr id="3" name="Image 0" descr="/home/claude/f4/img/minesec_sheet.png">    </p:cNvPr>
+          <p:cNvPicPr>
+            <a:picLocks noChangeAspect="1"/>
+          </p:cNvPicPr>
+          <p:nvPr/>
+        </p:nvPicPr>
+        <p:blipFill>
+          <a:blip r:embed="rId1"/>
+          <a:stretch>
+            <a:fillRect/>
+          </a:stretch>
+        </p:blipFill>
+        <p:spPr>
+          <a:xfrm>
+            <a:off x="0" y="658368"/>
+            <a:ext cx="5120640" cy="5833872"/>
+          </a:xfrm>
+          <a:prstGeom prst="rect">
+            <a:avLst/>
+          </a:prstGeom>
+        </p:spPr>
+      </p:pic>
+      <p:sp>
+        <p:nvSpPr>
+          <p:cNvPr id="4" name="Text 1"/>
+          <p:cNvSpPr/>
+          <p:nvPr/>
+        </p:nvSpPr>
+        <p:spPr>
+          <a:xfrm>
+            <a:off x="5349240" y="1005840"/>
+            <a:ext cx="6522415" cy="731520"/>
+          </a:xfrm>
+          <a:prstGeom prst="rect">
+            <a:avLst/>
+          </a:prstGeom>
+          <a:noFill/>
+          <a:ln/>
+        </p:spPr>
+        <p:txBody>
+          <a:bodyPr wrap="square" lIns="0" tIns="0" rIns="0" bIns="0" rtlCol="0" anchor="ctr">
+            <a:normAutofit/>
+          </a:bodyPr>
+          <a:lstStyle/>
+          <a:p>
+            <a:pPr algn="ctr" indent="0" marL="0">
+              <a:buNone/>
+            </a:pPr>
+            <a:r>
+              <a:rPr lang="en-US" sz="3600" b="1" dirty="0">
+                <a:solidFill>
+                  <a:srgbClr val="990011"/>
+                </a:solidFill>
+                <a:latin typeface="Times New Roman" pitchFamily="34" charset="0"/>
+                <a:ea typeface="Times New Roman" pitchFamily="34" charset="-122"/>
+                <a:cs typeface="Times New Roman" pitchFamily="34" charset="-120"/>
+              </a:rPr>
+              <a:t>Evaluation 2</a:t>
+            </a:r>
+            <a:endParaRPr lang="en-US" sz="3600" dirty="0"/>
+          </a:p>
+        </p:txBody>
+      </p:sp>
+      <p:sp>
+        <p:nvSpPr>
+          <p:cNvPr id="5" name="Text 2"/>
+          <p:cNvSpPr/>
+          <p:nvPr/>
+        </p:nvSpPr>
+        <p:spPr>
+          <a:xfrm>
+            <a:off x="5349240" y="1783080"/>
+            <a:ext cx="6522415" cy="4663440"/>
+          </a:xfrm>
+          <a:prstGeom prst="rect">
+            <a:avLst/>
+          </a:prstGeom>
+          <a:noFill/>
+          <a:ln/>
+        </p:spPr>
+        <p:txBody>
+          <a:bodyPr wrap="square" lIns="0" tIns="0" rIns="0" bIns="0" rtlCol="0" anchor="t"/>
+          <a:lstStyle/>
+          <a:p>
+            <a:pPr algn="l" indent="0" marL="0">
+              <a:spcAft>
+                <a:spcPts val="800"/>
+              </a:spcAft>
+              <a:buNone/>
+            </a:pPr>
+            <a:r>
+              <a:rPr lang="en-US" sz="4000" dirty="0">
+                <a:solidFill>
+                  <a:srgbClr val="111111"/>
+                </a:solidFill>
+                <a:latin typeface="Times New Roman" pitchFamily="34" charset="0"/>
+                <a:ea typeface="Times New Roman" pitchFamily="34" charset="-122"/>
+                <a:cs typeface="Times New Roman" pitchFamily="34" charset="-120"/>
+              </a:rPr>
+              <a:t>What does carbonation produce in limestone?</a:t>
+            </a:r>
+            <a:endParaRPr lang="en-US" sz="4000" dirty="0"/>
+          </a:p>
+        </p:txBody>
+      </p:sp>
+      <p:sp>
+        <p:nvSpPr>
+          <p:cNvPr id="25" name="Slide Number Placeholder 0"/>
+          <p:cNvSpPr>
+            <a:spLocks noGrp="1"/>
+          </p:cNvSpPr>
+          <p:nvPr>
+            <p:ph type="sldNum" sz="quarter" idx="4294967295"/>
+          </p:nvPr>
+        </p:nvSpPr>
+        <p:spPr>
+          <a:xfrm>
+            <a:off x="27432" y="91440"/>
+            <a:ext cx="585216" cy="475488"/>
+          </a:xfrm>
+          <a:prstGeom prst="rect">
+            <a:avLst/>
+          </a:prstGeom>
+          <a:extLst>
+            <a:ext uri="{C572A759-6A51-4108-AA02-DFA0A04FC94B}">
+              <ma14:wrappingTextBoxFlag xmlns:ma14="http://schemas.microsoft.com/office/mac/drawingml/2011/main" val="0"/>
+            </a:ext>
+          </a:extLst>
+        </p:spPr>
+        <p:txBody>
+          <a:bodyPr/>
+          <a:lstStyle>
+            <a:lvl1pPr>
+              <a:defRPr sz="2000">
+                <a:solidFill>
+                  <a:srgbClr val="FFFFFF"/>
+                </a:solidFill>
+                <a:latin typeface="Calibri"/>
+                <a:ea typeface="Calibri"/>
+                <a:cs typeface="Calibri"/>
+              </a:defRPr>
+            </a:lvl1pPr>
+          </a:lstStyle>
+          <a:p>
+            <a:pPr algn="ctr"/>
+            <a:fld id="{F7021451-1387-4CA6-816F-3879F97B5CBC}" type="slidenum">
+              <a:rPr b="1" lang="en-US"/>
+              <a:t>41</a:t>
+            </a:fld>
+            <a:endParaRPr lang="en-US"/>
+          </a:p>
+        </p:txBody>
+      </p:sp>
+    </p:spTree>
+  </p:cSld>
+  <p:clrMapOvr>
+    <a:masterClrMapping/>
+  </p:clrMapOvr>
+</p:sld>
+</file>
+
+<file path=ppt/slides/slide42.xml><?xml version="1.0" encoding="utf-8"?>
+<p:sld xmlns:a="http://schemas.openxmlformats.org/drawingml/2006/main" xmlns:r="http://schemas.openxmlformats.org/officeDocument/2006/relationships" xmlns:p="http://schemas.openxmlformats.org/presentationml/2006/main">
+  <p:cSld name="Slide 42">
+    <p:spTree>
+      <p:nvGrpSpPr>
+        <p:cNvPr id="1" name=""/>
+        <p:cNvGrpSpPr/>
+        <p:nvPr/>
+      </p:nvGrpSpPr>
+      <p:grpSpPr>
+        <a:xfrm>
+          <a:off x="0" y="0"/>
+          <a:ext cx="0" cy="0"/>
+          <a:chOff x="0" y="0"/>
+          <a:chExt cx="0" cy="0"/>
+        </a:xfrm>
+      </p:grpSpPr>
+      <p:sp>
+        <p:nvSpPr>
+          <p:cNvPr id="2" name="Text 0"/>
+          <p:cNvSpPr/>
+          <p:nvPr/>
+        </p:nvSpPr>
+        <p:spPr>
+          <a:xfrm>
+            <a:off x="457200" y="713232"/>
+            <a:ext cx="11368735" cy="274320"/>
+          </a:xfrm>
+          <a:prstGeom prst="rect">
+            <a:avLst/>
+          </a:prstGeom>
+          <a:noFill/>
+          <a:ln/>
+        </p:spPr>
+        <p:txBody>
+          <a:bodyPr wrap="square" lIns="0" tIns="0" rIns="0" bIns="0" rtlCol="0" anchor="ctr"/>
+          <a:lstStyle/>
+          <a:p>
+            <a:pPr algn="r" indent="0" marL="0">
+              <a:buNone/>
+            </a:pPr>
+            <a:r>
+              <a:rPr lang="en-US" sz="1400" b="1" dirty="0">
+                <a:solidFill>
+                  <a:srgbClr val="1C3F6E"/>
+                </a:solidFill>
+                <a:latin typeface="Calibri" pitchFamily="34" charset="0"/>
+                <a:ea typeface="Calibri" pitchFamily="34" charset="-122"/>
+                <a:cs typeface="Calibri" pitchFamily="34" charset="-120"/>
+              </a:rPr>
+              <a:t>FORMATIVE EVALUATION</a:t>
+            </a:r>
+            <a:endParaRPr lang="en-US" sz="1400" dirty="0"/>
+          </a:p>
+        </p:txBody>
+      </p:sp>
+      <p:pic>
+        <p:nvPicPr>
+          <p:cNvPr id="3" name="Image 0" descr="/home/claude/f4/img/minesec_sheet.png">    </p:cNvPr>
+          <p:cNvPicPr>
+            <a:picLocks noChangeAspect="1"/>
+          </p:cNvPicPr>
+          <p:nvPr/>
+        </p:nvPicPr>
+        <p:blipFill>
+          <a:blip r:embed="rId1"/>
+          <a:stretch>
+            <a:fillRect/>
+          </a:stretch>
+        </p:blipFill>
+        <p:spPr>
+          <a:xfrm>
+            <a:off x="0" y="658368"/>
+            <a:ext cx="5120640" cy="5833872"/>
+          </a:xfrm>
+          <a:prstGeom prst="rect">
+            <a:avLst/>
+          </a:prstGeom>
+        </p:spPr>
+      </p:pic>
+      <p:sp>
+        <p:nvSpPr>
+          <p:cNvPr id="4" name="Text 1"/>
+          <p:cNvSpPr/>
+          <p:nvPr/>
+        </p:nvSpPr>
+        <p:spPr>
+          <a:xfrm>
+            <a:off x="5349240" y="1005840"/>
+            <a:ext cx="6522415" cy="731520"/>
+          </a:xfrm>
+          <a:prstGeom prst="rect">
+            <a:avLst/>
+          </a:prstGeom>
+          <a:noFill/>
+          <a:ln/>
+        </p:spPr>
+        <p:txBody>
+          <a:bodyPr wrap="square" lIns="0" tIns="0" rIns="0" bIns="0" rtlCol="0" anchor="ctr">
+            <a:normAutofit/>
+          </a:bodyPr>
+          <a:lstStyle/>
+          <a:p>
+            <a:pPr algn="ctr" indent="0" marL="0">
+              <a:buNone/>
+            </a:pPr>
+            <a:r>
+              <a:rPr lang="en-US" sz="3600" b="1" dirty="0">
+                <a:solidFill>
+                  <a:srgbClr val="990011"/>
+                </a:solidFill>
+                <a:latin typeface="Times New Roman" pitchFamily="34" charset="0"/>
+                <a:ea typeface="Times New Roman" pitchFamily="34" charset="-122"/>
+                <a:cs typeface="Times New Roman" pitchFamily="34" charset="-120"/>
+              </a:rPr>
+              <a:t>Expected Answer</a:t>
+            </a:r>
+            <a:endParaRPr lang="en-US" sz="3600" dirty="0"/>
+          </a:p>
+        </p:txBody>
+      </p:sp>
+      <p:sp>
+        <p:nvSpPr>
+          <p:cNvPr id="5" name="Text 2"/>
+          <p:cNvSpPr/>
+          <p:nvPr/>
+        </p:nvSpPr>
+        <p:spPr>
+          <a:xfrm>
+            <a:off x="5349240" y="1783080"/>
+            <a:ext cx="6522415" cy="4663440"/>
+          </a:xfrm>
+          <a:prstGeom prst="rect">
+            <a:avLst/>
+          </a:prstGeom>
+          <a:noFill/>
+          <a:ln/>
+        </p:spPr>
+        <p:txBody>
+          <a:bodyPr wrap="square" lIns="0" tIns="0" rIns="0" bIns="0" rtlCol="0" anchor="t"/>
+          <a:lstStyle/>
+          <a:p>
+            <a:pPr algn="l" indent="0" marL="0">
+              <a:spcAft>
+                <a:spcPts val="800"/>
+              </a:spcAft>
+              <a:buNone/>
+            </a:pPr>
+            <a:r>
+              <a:rPr lang="en-US" sz="4000" dirty="0">
+                <a:solidFill>
+                  <a:srgbClr val="111111"/>
+                </a:solidFill>
+                <a:latin typeface="Times New Roman" pitchFamily="34" charset="0"/>
+                <a:ea typeface="Times New Roman" pitchFamily="34" charset="-122"/>
+                <a:cs typeface="Times New Roman" pitchFamily="34" charset="-120"/>
+              </a:rPr>
+              <a:t>Caves.</a:t>
+            </a:r>
+            <a:endParaRPr lang="en-US" sz="4000" dirty="0"/>
+          </a:p>
+        </p:txBody>
+      </p:sp>
+      <p:sp>
+        <p:nvSpPr>
+          <p:cNvPr id="25" name="Slide Number Placeholder 0"/>
+          <p:cNvSpPr>
+            <a:spLocks noGrp="1"/>
+          </p:cNvSpPr>
+          <p:nvPr>
+            <p:ph type="sldNum" sz="quarter" idx="4294967295"/>
+          </p:nvPr>
+        </p:nvSpPr>
+        <p:spPr>
+          <a:xfrm>
+            <a:off x="27432" y="91440"/>
+            <a:ext cx="585216" cy="475488"/>
+          </a:xfrm>
+          <a:prstGeom prst="rect">
+            <a:avLst/>
+          </a:prstGeom>
+          <a:extLst>
+            <a:ext uri="{C572A759-6A51-4108-AA02-DFA0A04FC94B}">
+              <ma14:wrappingTextBoxFlag xmlns:ma14="http://schemas.microsoft.com/office/mac/drawingml/2011/main" val="0"/>
+            </a:ext>
+          </a:extLst>
+        </p:spPr>
+        <p:txBody>
+          <a:bodyPr/>
+          <a:lstStyle>
+            <a:lvl1pPr>
+              <a:defRPr sz="2000">
+                <a:solidFill>
+                  <a:srgbClr val="FFFFFF"/>
+                </a:solidFill>
+                <a:latin typeface="Calibri"/>
+                <a:ea typeface="Calibri"/>
+                <a:cs typeface="Calibri"/>
+              </a:defRPr>
+            </a:lvl1pPr>
+          </a:lstStyle>
+          <a:p>
+            <a:pPr algn="ctr"/>
+            <a:fld id="{F7021451-1387-4CA6-816F-3879F97B5CBC}" type="slidenum">
+              <a:rPr b="1" lang="en-US"/>
+              <a:t>42</a:t>
+            </a:fld>
+            <a:endParaRPr lang="en-US"/>
+          </a:p>
+        </p:txBody>
+      </p:sp>
+    </p:spTree>
+  </p:cSld>
+  <p:clrMapOvr>
+    <a:masterClrMapping/>
+  </p:clrMapOvr>
+</p:sld>
+</file>
+
+<file path=ppt/slides/slide43.xml><?xml version="1.0" encoding="utf-8"?>
+<p:sld xmlns:a="http://schemas.openxmlformats.org/drawingml/2006/main" xmlns:r="http://schemas.openxmlformats.org/officeDocument/2006/relationships" xmlns:p="http://schemas.openxmlformats.org/presentationml/2006/main">
+  <p:cSld name="Slide 43">
+    <p:spTree>
+      <p:nvGrpSpPr>
+        <p:cNvPr id="1" name=""/>
+        <p:cNvGrpSpPr/>
+        <p:nvPr/>
+      </p:nvGrpSpPr>
+      <p:grpSpPr>
+        <a:xfrm>
+          <a:off x="0" y="0"/>
+          <a:ext cx="0" cy="0"/>
+          <a:chOff x="0" y="0"/>
+          <a:chExt cx="0" cy="0"/>
+        </a:xfrm>
+      </p:grpSpPr>
+      <p:sp>
+        <p:nvSpPr>
+          <p:cNvPr id="2" name="Text 0"/>
+          <p:cNvSpPr/>
+          <p:nvPr/>
+        </p:nvSpPr>
+        <p:spPr>
+          <a:xfrm>
+            <a:off x="457200" y="713232"/>
+            <a:ext cx="11368735" cy="274320"/>
+          </a:xfrm>
+          <a:prstGeom prst="rect">
+            <a:avLst/>
+          </a:prstGeom>
+          <a:noFill/>
+          <a:ln/>
+        </p:spPr>
+        <p:txBody>
+          <a:bodyPr wrap="square" lIns="0" tIns="0" rIns="0" bIns="0" rtlCol="0" anchor="ctr"/>
+          <a:lstStyle/>
+          <a:p>
+            <a:pPr algn="r" indent="0" marL="0">
+              <a:buNone/>
+            </a:pPr>
+            <a:r>
+              <a:rPr lang="en-US" sz="1400" b="1" dirty="0">
+                <a:solidFill>
+                  <a:srgbClr val="1C3F6E"/>
+                </a:solidFill>
+                <a:latin typeface="Calibri" pitchFamily="34" charset="0"/>
+                <a:ea typeface="Calibri" pitchFamily="34" charset="-122"/>
+                <a:cs typeface="Calibri" pitchFamily="34" charset="-120"/>
+              </a:rPr>
+              <a:t>REMEDIATION</a:t>
+            </a:r>
+            <a:endParaRPr lang="en-US" sz="1400" dirty="0"/>
+          </a:p>
+        </p:txBody>
+      </p:sp>
+      <p:pic>
+        <p:nvPicPr>
+          <p:cNvPr id="3" name="Image 0" descr="/home/claude/f4/img/minesec_sheet.png">    </p:cNvPr>
+          <p:cNvPicPr>
+            <a:picLocks noChangeAspect="1"/>
+          </p:cNvPicPr>
+          <p:nvPr/>
+        </p:nvPicPr>
+        <p:blipFill>
+          <a:blip r:embed="rId1"/>
+          <a:stretch>
+            <a:fillRect/>
+          </a:stretch>
+        </p:blipFill>
+        <p:spPr>
+          <a:xfrm>
+            <a:off x="0" y="658368"/>
+            <a:ext cx="2468880" cy="5833872"/>
+          </a:xfrm>
+          <a:prstGeom prst="rect">
+            <a:avLst/>
+          </a:prstGeom>
+        </p:spPr>
+      </p:pic>
+      <p:sp>
+        <p:nvSpPr>
+          <p:cNvPr id="4" name="Text 1"/>
+          <p:cNvSpPr/>
+          <p:nvPr/>
+        </p:nvSpPr>
+        <p:spPr>
+          <a:xfrm>
+            <a:off x="2697480" y="1005840"/>
+            <a:ext cx="9174175" cy="731520"/>
+          </a:xfrm>
+          <a:prstGeom prst="rect">
+            <a:avLst/>
+          </a:prstGeom>
+          <a:noFill/>
+          <a:ln/>
+        </p:spPr>
+        <p:txBody>
+          <a:bodyPr wrap="square" lIns="0" tIns="0" rIns="0" bIns="0" rtlCol="0" anchor="ctr">
+            <a:normAutofit/>
+          </a:bodyPr>
+          <a:lstStyle/>
+          <a:p>
+            <a:pPr algn="ctr" indent="0" marL="0">
+              <a:buNone/>
+            </a:pPr>
+            <a:r>
+              <a:rPr lang="en-US" sz="3600" b="1" dirty="0">
+                <a:solidFill>
+                  <a:srgbClr val="990011"/>
+                </a:solidFill>
+                <a:latin typeface="Times New Roman" pitchFamily="34" charset="0"/>
+                <a:ea typeface="Times New Roman" pitchFamily="34" charset="-122"/>
+                <a:cs typeface="Times New Roman" pitchFamily="34" charset="-120"/>
+              </a:rPr>
+              <a:t>Remediation</a:t>
+            </a:r>
+            <a:endParaRPr lang="en-US" sz="3600" dirty="0"/>
+          </a:p>
+        </p:txBody>
+      </p:sp>
+      <p:sp>
+        <p:nvSpPr>
+          <p:cNvPr id="5" name="Text 2"/>
+          <p:cNvSpPr/>
+          <p:nvPr/>
+        </p:nvSpPr>
+        <p:spPr>
+          <a:xfrm>
+            <a:off x="2697480" y="1783080"/>
+            <a:ext cx="9174175" cy="4663440"/>
+          </a:xfrm>
+          <a:prstGeom prst="rect">
+            <a:avLst/>
+          </a:prstGeom>
+          <a:noFill/>
+          <a:ln/>
+        </p:spPr>
+        <p:txBody>
+          <a:bodyPr wrap="square" lIns="0" tIns="0" rIns="0" bIns="0" rtlCol="0" anchor="t"/>
+          <a:lstStyle/>
+          <a:p>
+            <a:pPr algn="l" indent="0" marL="0">
+              <a:spcAft>
+                <a:spcPts val="800"/>
+              </a:spcAft>
+              <a:buNone/>
+            </a:pPr>
+            <a:r>
+              <a:rPr lang="en-US" sz="4000" b="1" dirty="0">
+                <a:solidFill>
+                  <a:srgbClr val="111111"/>
+                </a:solidFill>
+                <a:latin typeface="Times New Roman" pitchFamily="34" charset="0"/>
+                <a:ea typeface="Times New Roman" pitchFamily="34" charset="-122"/>
+                <a:cs typeface="Times New Roman" pitchFamily="34" charset="-120"/>
+              </a:rPr>
+              <a:t>Fill in the blanks:</a:t>
+            </a:r>
+            <a:endParaRPr lang="en-US" sz="4000" dirty="0"/>
+          </a:p>
+          <a:p>
+            <a:pPr algn="l" marL="342900" indent="-342900">
+              <a:spcAft>
+                <a:spcPts val="800"/>
+              </a:spcAft>
+              <a:buSzPct val="100000"/>
+              <a:buFont typeface="+mj-lt"/>
+              <a:buAutoNum type="arabicPeriod" startAt="1"/>
+            </a:pPr>
+            <a:r>
+              <a:rPr lang="en-US" sz="4000" dirty="0">
+                <a:solidFill>
+                  <a:srgbClr val="111111"/>
+                </a:solidFill>
+                <a:latin typeface="Times New Roman" pitchFamily="34" charset="0"/>
+                <a:ea typeface="Times New Roman" pitchFamily="34" charset="-122"/>
+                <a:cs typeface="Times New Roman" pitchFamily="34" charset="-120"/>
+              </a:rPr>
+              <a:t>The rusting of iron in rocks is ______.</a:t>
+            </a:r>
+            <a:endParaRPr lang="en-US" sz="4000" dirty="0"/>
+          </a:p>
+          <a:p>
+            <a:pPr algn="l" marL="342900" indent="-342900">
+              <a:spcAft>
+                <a:spcPts val="800"/>
+              </a:spcAft>
+              <a:buSzPct val="100000"/>
+              <a:buFont typeface="+mj-lt"/>
+              <a:buAutoNum type="arabicPeriod" startAt="1"/>
+            </a:pPr>
+            <a:r>
+              <a:rPr lang="en-US" sz="4000" dirty="0">
+                <a:solidFill>
+                  <a:srgbClr val="111111"/>
+                </a:solidFill>
+                <a:latin typeface="Times New Roman" pitchFamily="34" charset="0"/>
+                <a:ea typeface="Times New Roman" pitchFamily="34" charset="-122"/>
+                <a:cs typeface="Times New Roman" pitchFamily="34" charset="-120"/>
+              </a:rPr>
+              <a:t>Rain water dissolves limestone by ______.</a:t>
+            </a:r>
+            <a:endParaRPr lang="en-US" sz="4000" dirty="0"/>
+          </a:p>
+          <a:p>
+            <a:pPr algn="l" marL="342900" indent="-342900">
+              <a:spcAft>
+                <a:spcPts val="800"/>
+              </a:spcAft>
+              <a:buSzPct val="100000"/>
+              <a:buFont typeface="+mj-lt"/>
+              <a:buAutoNum type="arabicPeriod" startAt="1"/>
+            </a:pPr>
+            <a:r>
+              <a:rPr lang="en-US" sz="4000" dirty="0">
+                <a:solidFill>
+                  <a:srgbClr val="111111"/>
+                </a:solidFill>
+                <a:latin typeface="Times New Roman" pitchFamily="34" charset="0"/>
+                <a:ea typeface="Times New Roman" pitchFamily="34" charset="-122"/>
+                <a:cs typeface="Times New Roman" pitchFamily="34" charset="-120"/>
+              </a:rPr>
+              <a:t>Granite changes into clay by ______.</a:t>
+            </a:r>
+            <a:endParaRPr lang="en-US" sz="4000" dirty="0"/>
+          </a:p>
+        </p:txBody>
+      </p:sp>
+      <p:sp>
+        <p:nvSpPr>
+          <p:cNvPr id="25" name="Slide Number Placeholder 0"/>
+          <p:cNvSpPr>
+            <a:spLocks noGrp="1"/>
+          </p:cNvSpPr>
+          <p:nvPr>
+            <p:ph type="sldNum" sz="quarter" idx="4294967295"/>
+          </p:nvPr>
+        </p:nvSpPr>
+        <p:spPr>
+          <a:xfrm>
+            <a:off x="27432" y="91440"/>
+            <a:ext cx="585216" cy="475488"/>
+          </a:xfrm>
+          <a:prstGeom prst="rect">
+            <a:avLst/>
+          </a:prstGeom>
+          <a:extLst>
+            <a:ext uri="{C572A759-6A51-4108-AA02-DFA0A04FC94B}">
+              <ma14:wrappingTextBoxFlag xmlns:ma14="http://schemas.microsoft.com/office/mac/drawingml/2011/main" val="0"/>
+            </a:ext>
+          </a:extLst>
+        </p:spPr>
+        <p:txBody>
+          <a:bodyPr/>
+          <a:lstStyle>
+            <a:lvl1pPr>
+              <a:defRPr sz="2000">
+                <a:solidFill>
+                  <a:srgbClr val="FFFFFF"/>
+                </a:solidFill>
+                <a:latin typeface="Calibri"/>
+                <a:ea typeface="Calibri"/>
+                <a:cs typeface="Calibri"/>
+              </a:defRPr>
+            </a:lvl1pPr>
+          </a:lstStyle>
+          <a:p>
+            <a:pPr algn="ctr"/>
+            <a:fld id="{F7021451-1387-4CA6-816F-3879F97B5CBC}" type="slidenum">
+              <a:rPr b="1" lang="en-US"/>
+              <a:t>43</a:t>
+            </a:fld>
+            <a:endParaRPr lang="en-US"/>
+          </a:p>
+        </p:txBody>
+      </p:sp>
+    </p:spTree>
+  </p:cSld>
+  <p:clrMapOvr>
+    <a:masterClrMapping/>
+  </p:clrMapOvr>
+</p:sld>
+</file>
+
+<file path=ppt/slides/slide44.xml><?xml version="1.0" encoding="utf-8"?>
+<p:sld xmlns:a="http://schemas.openxmlformats.org/drawingml/2006/main" xmlns:r="http://schemas.openxmlformats.org/officeDocument/2006/relationships" xmlns:p="http://schemas.openxmlformats.org/presentationml/2006/main">
+  <p:cSld name="Slide 44">
+    <p:spTree>
+      <p:nvGrpSpPr>
+        <p:cNvPr id="1" name=""/>
+        <p:cNvGrpSpPr/>
+        <p:nvPr/>
+      </p:nvGrpSpPr>
+      <p:grpSpPr>
+        <a:xfrm>
+          <a:off x="0" y="0"/>
+          <a:ext cx="0" cy="0"/>
+          <a:chOff x="0" y="0"/>
+          <a:chExt cx="0" cy="0"/>
+        </a:xfrm>
+      </p:grpSpPr>
+      <p:sp>
+        <p:nvSpPr>
+          <p:cNvPr id="2" name="Text 0"/>
+          <p:cNvSpPr/>
+          <p:nvPr/>
+        </p:nvSpPr>
+        <p:spPr>
+          <a:xfrm>
+            <a:off x="457200" y="713232"/>
+            <a:ext cx="11368735" cy="274320"/>
+          </a:xfrm>
+          <a:prstGeom prst="rect">
+            <a:avLst/>
+          </a:prstGeom>
+          <a:noFill/>
+          <a:ln/>
+        </p:spPr>
+        <p:txBody>
+          <a:bodyPr wrap="square" lIns="0" tIns="0" rIns="0" bIns="0" rtlCol="0" anchor="ctr"/>
+          <a:lstStyle/>
+          <a:p>
+            <a:pPr algn="r" indent="0" marL="0">
+              <a:buNone/>
+            </a:pPr>
+            <a:r>
+              <a:rPr lang="en-US" sz="1400" b="1" dirty="0">
+                <a:solidFill>
+                  <a:srgbClr val="1C3F6E"/>
+                </a:solidFill>
+                <a:latin typeface="Calibri" pitchFamily="34" charset="0"/>
+                <a:ea typeface="Calibri" pitchFamily="34" charset="-122"/>
+                <a:cs typeface="Calibri" pitchFamily="34" charset="-120"/>
+              </a:rPr>
+              <a:t>HOMEWORK</a:t>
+            </a:r>
+            <a:endParaRPr lang="en-US" sz="1400" dirty="0"/>
+          </a:p>
+        </p:txBody>
+      </p:sp>
+      <p:pic>
+        <p:nvPicPr>
+          <p:cNvPr id="3" name="Image 0" descr="/home/claude/f4/img/minesec_sheet.png">    </p:cNvPr>
+          <p:cNvPicPr>
+            <a:picLocks noChangeAspect="1"/>
+          </p:cNvPicPr>
+          <p:nvPr/>
+        </p:nvPicPr>
+        <p:blipFill>
+          <a:blip r:embed="rId1"/>
+          <a:stretch>
+            <a:fillRect/>
+          </a:stretch>
+        </p:blipFill>
+        <p:spPr>
+          <a:xfrm>
+            <a:off x="0" y="658368"/>
+            <a:ext cx="5120640" cy="5833872"/>
+          </a:xfrm>
+          <a:prstGeom prst="rect">
+            <a:avLst/>
+          </a:prstGeom>
+        </p:spPr>
+      </p:pic>
+      <p:sp>
+        <p:nvSpPr>
+          <p:cNvPr id="4" name="Text 1"/>
+          <p:cNvSpPr/>
+          <p:nvPr/>
+        </p:nvSpPr>
+        <p:spPr>
+          <a:xfrm>
+            <a:off x="5349240" y="1005840"/>
+            <a:ext cx="6522415" cy="731520"/>
+          </a:xfrm>
+          <a:prstGeom prst="rect">
+            <a:avLst/>
+          </a:prstGeom>
+          <a:noFill/>
+          <a:ln/>
+        </p:spPr>
+        <p:txBody>
+          <a:bodyPr wrap="square" lIns="0" tIns="0" rIns="0" bIns="0" rtlCol="0" anchor="ctr">
+            <a:normAutofit/>
+          </a:bodyPr>
+          <a:lstStyle/>
+          <a:p>
+            <a:pPr algn="ctr" indent="0" marL="0">
+              <a:buNone/>
+            </a:pPr>
+            <a:r>
+              <a:rPr lang="en-US" sz="3600" b="1" dirty="0">
+                <a:solidFill>
+                  <a:srgbClr val="990011"/>
+                </a:solidFill>
+                <a:latin typeface="Times New Roman" pitchFamily="34" charset="0"/>
+                <a:ea typeface="Times New Roman" pitchFamily="34" charset="-122"/>
+                <a:cs typeface="Times New Roman" pitchFamily="34" charset="-120"/>
+              </a:rPr>
+              <a:t>Homework</a:t>
+            </a:r>
+            <a:endParaRPr lang="en-US" sz="3600" dirty="0"/>
+          </a:p>
+        </p:txBody>
+      </p:sp>
+      <p:sp>
+        <p:nvSpPr>
+          <p:cNvPr id="5" name="Text 2"/>
+          <p:cNvSpPr/>
+          <p:nvPr/>
+        </p:nvSpPr>
+        <p:spPr>
+          <a:xfrm>
+            <a:off x="5349240" y="1783080"/>
+            <a:ext cx="6522415" cy="4663440"/>
+          </a:xfrm>
+          <a:prstGeom prst="rect">
+            <a:avLst/>
+          </a:prstGeom>
+          <a:noFill/>
+          <a:ln/>
+        </p:spPr>
+        <p:txBody>
+          <a:bodyPr wrap="square" lIns="0" tIns="0" rIns="0" bIns="0" rtlCol="0" anchor="t"/>
+          <a:lstStyle/>
+          <a:p>
+            <a:pPr algn="l" indent="0" marL="0">
+              <a:spcAft>
+                <a:spcPts val="800"/>
+              </a:spcAft>
+              <a:buNone/>
+            </a:pPr>
+            <a:r>
+              <a:rPr lang="en-US" sz="4000" dirty="0">
+                <a:solidFill>
+                  <a:srgbClr val="111111"/>
+                </a:solidFill>
+                <a:latin typeface="Times New Roman" pitchFamily="34" charset="0"/>
+                <a:ea typeface="Times New Roman" pitchFamily="34" charset="-122"/>
+                <a:cs typeface="Times New Roman" pitchFamily="34" charset="-120"/>
+              </a:rPr>
+              <a:t>Ask a farmer in your family where the soil of his farm comes from, and ask if he has seen rocks fall or roads blocked after heavy rain. Write his answers.</a:t>
+            </a:r>
+            <a:endParaRPr lang="en-US" sz="4000" dirty="0"/>
+          </a:p>
+        </p:txBody>
+      </p:sp>
+      <p:sp>
+        <p:nvSpPr>
+          <p:cNvPr id="25" name="Slide Number Placeholder 0"/>
+          <p:cNvSpPr>
+            <a:spLocks noGrp="1"/>
+          </p:cNvSpPr>
+          <p:nvPr>
+            <p:ph type="sldNum" sz="quarter" idx="4294967295"/>
+          </p:nvPr>
+        </p:nvSpPr>
+        <p:spPr>
+          <a:xfrm>
+            <a:off x="27432" y="91440"/>
+            <a:ext cx="585216" cy="475488"/>
+          </a:xfrm>
+          <a:prstGeom prst="rect">
+            <a:avLst/>
+          </a:prstGeom>
+          <a:extLst>
+            <a:ext uri="{C572A759-6A51-4108-AA02-DFA0A04FC94B}">
+              <ma14:wrappingTextBoxFlag xmlns:ma14="http://schemas.microsoft.com/office/mac/drawingml/2011/main" val="0"/>
+            </a:ext>
+          </a:extLst>
+        </p:spPr>
+        <p:txBody>
+          <a:bodyPr/>
+          <a:lstStyle>
+            <a:lvl1pPr>
+              <a:defRPr sz="2000">
+                <a:solidFill>
+                  <a:srgbClr val="FFFFFF"/>
+                </a:solidFill>
+                <a:latin typeface="Calibri"/>
+                <a:ea typeface="Calibri"/>
+                <a:cs typeface="Calibri"/>
+              </a:defRPr>
+            </a:lvl1pPr>
+          </a:lstStyle>
+          <a:p>
+            <a:pPr algn="ctr"/>
+            <a:fld id="{F7021451-1387-4CA6-816F-3879F97B5CBC}" type="slidenum">
+              <a:rPr b="1" lang="en-US"/>
+              <a:t>44</a:t>
+            </a:fld>
+            <a:endParaRPr lang="en-US"/>
+          </a:p>
+        </p:txBody>
+      </p:sp>
+    </p:spTree>
+  </p:cSld>
+  <p:clrMapOvr>
+    <a:masterClrMapping/>
+  </p:clrMapOvr>
+</p:sld>
+</file>
+
+<file path=ppt/slides/slide45.xml><?xml version="1.0" encoding="utf-8"?>
+<p:sld xmlns:a="http://schemas.openxmlformats.org/drawingml/2006/main" xmlns:r="http://schemas.openxmlformats.org/officeDocument/2006/relationships" xmlns:p="http://schemas.openxmlformats.org/presentationml/2006/main">
+  <p:cSld name="Slide 45">
+    <p:spTree>
+      <p:nvGrpSpPr>
+        <p:cNvPr id="1" name=""/>
+        <p:cNvGrpSpPr/>
+        <p:nvPr/>
+      </p:nvGrpSpPr>
+      <p:grpSpPr>
+        <a:xfrm>
+          <a:off x="0" y="0"/>
+          <a:ext cx="0" cy="0"/>
+          <a:chOff x="0" y="0"/>
+          <a:chExt cx="0" cy="0"/>
+        </a:xfrm>
+      </p:grpSpPr>
+      <p:sp>
+        <p:nvSpPr>
+          <p:cNvPr id="2" name="Text 0"/>
+          <p:cNvSpPr/>
+          <p:nvPr/>
+        </p:nvSpPr>
+        <p:spPr>
+          <a:xfrm>
+            <a:off x="457200" y="713232"/>
+            <a:ext cx="11368735" cy="274320"/>
+          </a:xfrm>
+          <a:prstGeom prst="rect">
+            <a:avLst/>
+          </a:prstGeom>
+          <a:noFill/>
+          <a:ln/>
+        </p:spPr>
+        <p:txBody>
+          <a:bodyPr wrap="square" lIns="0" tIns="0" rIns="0" bIns="0" rtlCol="0" anchor="ctr"/>
+          <a:lstStyle/>
+          <a:p>
+            <a:pPr algn="r" indent="0" marL="0">
+              <a:buNone/>
+            </a:pPr>
+            <a:r>
+              <a:rPr lang="en-US" sz="1400" b="1" dirty="0">
+                <a:solidFill>
+                  <a:srgbClr val="1C3F6E"/>
+                </a:solidFill>
+                <a:latin typeface="Calibri" pitchFamily="34" charset="0"/>
+                <a:ea typeface="Calibri" pitchFamily="34" charset="-122"/>
+                <a:cs typeface="Calibri" pitchFamily="34" charset="-120"/>
+              </a:rPr>
+              <a:t>NEXT LESSON</a:t>
+            </a:r>
+            <a:endParaRPr lang="en-US" sz="1400" dirty="0"/>
+          </a:p>
+        </p:txBody>
+      </p:sp>
+      <p:pic>
+        <p:nvPicPr>
+          <p:cNvPr id="3" name="Image 0" descr="/home/claude/f4/img/minesec_sheet.png">    </p:cNvPr>
+          <p:cNvPicPr>
+            <a:picLocks noChangeAspect="1"/>
+          </p:cNvPicPr>
+          <p:nvPr/>
+        </p:nvPicPr>
+        <p:blipFill>
+          <a:blip r:embed="rId1"/>
+          <a:stretch>
+            <a:fillRect/>
+          </a:stretch>
+        </p:blipFill>
+        <p:spPr>
+          <a:xfrm>
+            <a:off x="0" y="658368"/>
+            <a:ext cx="5120640" cy="5833872"/>
+          </a:xfrm>
+          <a:prstGeom prst="rect">
+            <a:avLst/>
+          </a:prstGeom>
+        </p:spPr>
+      </p:pic>
+      <p:sp>
+        <p:nvSpPr>
+          <p:cNvPr id="4" name="Text 1"/>
+          <p:cNvSpPr/>
+          <p:nvPr/>
+        </p:nvSpPr>
+        <p:spPr>
+          <a:xfrm>
+            <a:off x="5349240" y="1005840"/>
+            <a:ext cx="6522415" cy="731520"/>
+          </a:xfrm>
+          <a:prstGeom prst="rect">
+            <a:avLst/>
+          </a:prstGeom>
+          <a:noFill/>
+          <a:ln/>
+        </p:spPr>
+        <p:txBody>
+          <a:bodyPr wrap="square" lIns="0" tIns="0" rIns="0" bIns="0" rtlCol="0" anchor="ctr">
+            <a:normAutofit/>
+          </a:bodyPr>
+          <a:lstStyle/>
+          <a:p>
+            <a:pPr algn="ctr" indent="0" marL="0">
+              <a:buNone/>
+            </a:pPr>
+            <a:r>
+              <a:rPr lang="en-US" sz="3600" b="1" dirty="0">
+                <a:solidFill>
+                  <a:srgbClr val="990011"/>
+                </a:solidFill>
+                <a:latin typeface="Times New Roman" pitchFamily="34" charset="0"/>
+                <a:ea typeface="Times New Roman" pitchFamily="34" charset="-122"/>
+                <a:cs typeface="Times New Roman" pitchFamily="34" charset="-120"/>
+              </a:rPr>
+              <a:t>Next Lesson</a:t>
+            </a:r>
+            <a:endParaRPr lang="en-US" sz="3600" dirty="0"/>
+          </a:p>
+        </p:txBody>
+      </p:sp>
+      <p:sp>
+        <p:nvSpPr>
+          <p:cNvPr id="5" name="Text 2"/>
+          <p:cNvSpPr/>
+          <p:nvPr/>
+        </p:nvSpPr>
+        <p:spPr>
+          <a:xfrm>
+            <a:off x="5349240" y="1783080"/>
+            <a:ext cx="6522415" cy="4663440"/>
+          </a:xfrm>
+          <a:prstGeom prst="rect">
+            <a:avLst/>
+          </a:prstGeom>
+          <a:noFill/>
+          <a:ln/>
+        </p:spPr>
+        <p:txBody>
+          <a:bodyPr wrap="square" lIns="0" tIns="0" rIns="0" bIns="0" rtlCol="0" anchor="ctr"/>
+          <a:lstStyle/>
+          <a:p>
+            <a:pPr algn="ctr" indent="0" marL="0">
+              <a:spcAft>
+                <a:spcPts val="800"/>
+              </a:spcAft>
+              <a:buNone/>
+            </a:pPr>
+            <a:r>
+              <a:rPr lang="en-US" sz="4000" b="1" dirty="0">
+                <a:solidFill>
+                  <a:srgbClr val="111111"/>
+                </a:solidFill>
+                <a:latin typeface="Times New Roman" pitchFamily="34" charset="0"/>
+                <a:ea typeface="Times New Roman" pitchFamily="34" charset="-122"/>
+                <a:cs typeface="Times New Roman" pitchFamily="34" charset="-120"/>
+              </a:rPr>
+              <a:t>Our next lesson will be on:</a:t>
+            </a:r>
+            <a:endParaRPr lang="en-US" sz="4000" dirty="0"/>
+          </a:p>
+          <a:p>
+            <a:pPr algn="ctr" indent="0" marL="0">
+              <a:spcAft>
+                <a:spcPts val="800"/>
+              </a:spcAft>
+              <a:buNone/>
+            </a:pPr>
+            <a:r>
+              <a:rPr lang="en-US" sz="4000" b="1" dirty="0">
+                <a:solidFill>
+                  <a:srgbClr val="990011"/>
+                </a:solidFill>
+                <a:latin typeface="Times New Roman" pitchFamily="34" charset="0"/>
+                <a:ea typeface="Times New Roman" pitchFamily="34" charset="-122"/>
+                <a:cs typeface="Times New Roman" pitchFamily="34" charset="-120"/>
+              </a:rPr>
+              <a:t>Further Study 2: The Impact of Weathering on the Environment</a:t>
+            </a:r>
+            <a:endParaRPr lang="en-US" sz="4000" dirty="0"/>
+          </a:p>
+        </p:txBody>
+      </p:sp>
+      <p:sp>
+        <p:nvSpPr>
+          <p:cNvPr id="25" name="Slide Number Placeholder 0"/>
+          <p:cNvSpPr>
+            <a:spLocks noGrp="1"/>
+          </p:cNvSpPr>
+          <p:nvPr>
+            <p:ph type="sldNum" sz="quarter" idx="4294967295"/>
+          </p:nvPr>
+        </p:nvSpPr>
+        <p:spPr>
+          <a:xfrm>
+            <a:off x="27432" y="91440"/>
+            <a:ext cx="585216" cy="475488"/>
+          </a:xfrm>
+          <a:prstGeom prst="rect">
+            <a:avLst/>
+          </a:prstGeom>
+          <a:extLst>
+            <a:ext uri="{C572A759-6A51-4108-AA02-DFA0A04FC94B}">
+              <ma14:wrappingTextBoxFlag xmlns:ma14="http://schemas.microsoft.com/office/mac/drawingml/2011/main" val="0"/>
+            </a:ext>
+          </a:extLst>
+        </p:spPr>
+        <p:txBody>
+          <a:bodyPr/>
+          <a:lstStyle>
+            <a:lvl1pPr>
+              <a:defRPr sz="2000">
+                <a:solidFill>
+                  <a:srgbClr val="FFFFFF"/>
+                </a:solidFill>
+                <a:latin typeface="Calibri"/>
+                <a:ea typeface="Calibri"/>
+                <a:cs typeface="Calibri"/>
+              </a:defRPr>
+            </a:lvl1pPr>
+          </a:lstStyle>
+          <a:p>
+            <a:pPr algn="ctr"/>
+            <a:fld id="{F7021451-1387-4CA6-816F-3879F97B5CBC}" type="slidenum">
+              <a:rPr b="1" lang="en-US"/>
+              <a:t>45</a:t>
+            </a:fld>
+            <a:endParaRPr lang="en-US"/>
+          </a:p>
+        </p:txBody>
+      </p:sp>
+    </p:spTree>
+  </p:cSld>
+  <p:clrMapOvr>
+    <a:masterClrMapping/>
+  </p:clrMapOvr>
+</p:sld>
+</file>
+
+<file path=ppt/slides/slide46.xml><?xml version="1.0" encoding="utf-8"?>
+<p:sld xmlns:a="http://schemas.openxmlformats.org/drawingml/2006/main" xmlns:r="http://schemas.openxmlformats.org/officeDocument/2006/relationships" xmlns:p="http://schemas.openxmlformats.org/presentationml/2006/main">
+  <p:cSld name="Slide 46">
+    <p:spTree>
+      <p:nvGrpSpPr>
+        <p:cNvPr id="1" name=""/>
+        <p:cNvGrpSpPr/>
+        <p:nvPr/>
+      </p:nvGrpSpPr>
+      <p:grpSpPr>
+        <a:xfrm>
+          <a:off x="0" y="0"/>
+          <a:ext cx="0" cy="0"/>
+          <a:chOff x="0" y="0"/>
+          <a:chExt cx="0" cy="0"/>
+        </a:xfrm>
+      </p:grpSpPr>
+      <p:sp>
+        <p:nvSpPr>
+          <p:cNvPr id="2" name="Text 0"/>
+          <p:cNvSpPr/>
+          <p:nvPr/>
+        </p:nvSpPr>
+        <p:spPr>
+          <a:xfrm>
+            <a:off x="457200" y="713232"/>
+            <a:ext cx="11368735" cy="274320"/>
+          </a:xfrm>
+          <a:prstGeom prst="rect">
+            <a:avLst/>
+          </a:prstGeom>
+          <a:noFill/>
+          <a:ln/>
+        </p:spPr>
+        <p:txBody>
+          <a:bodyPr wrap="square" lIns="0" tIns="0" rIns="0" bIns="0" rtlCol="0" anchor="ctr"/>
+          <a:lstStyle/>
+          <a:p>
+            <a:pPr algn="r" indent="0" marL="0">
+              <a:buNone/>
+            </a:pPr>
+            <a:r>
+              <a:rPr lang="en-US" sz="1400" b="1" dirty="0">
+                <a:solidFill>
+                  <a:srgbClr val="1C3F6E"/>
+                </a:solidFill>
+                <a:latin typeface="Calibri" pitchFamily="34" charset="0"/>
+                <a:ea typeface="Calibri" pitchFamily="34" charset="-122"/>
+                <a:cs typeface="Calibri" pitchFamily="34" charset="-120"/>
+              </a:rPr>
               <a:t>BILINGUAL GAME</a:t>
             </a:r>
             <a:endParaRPr lang="en-US" sz="1400" dirty="0"/>
@@ -13929,7 +16701,7 @@
       </p:sp>
       <p:graphicFrame>
         <p:nvGraphicFramePr>
-          <p:cNvPr id="40" name="Table 0"/>
+          <p:cNvPr id="47" name="Table 0"/>
           <p:cNvGraphicFramePr>
             <a:graphicFrameLocks noGrp="1"/>
           </p:cNvGraphicFramePr>
@@ -15241,7 +18013,7 @@
             <a:pPr algn="ctr"/>
             <a:fld id="{F7021451-1387-4CA6-816F-3879F97B5CBC}" type="slidenum">
               <a:rPr b="1" lang="en-US"/>
-              <a:t>39</a:t>
+              <a:t>46</a:t>
             </a:fld>
             <a:endParaRPr lang="en-US"/>
           </a:p>
@@ -15255,9 +18027,9 @@
 </p:sld>
 </file>
 
-<file path=ppt/slides/slide4.xml><?xml version="1.0" encoding="utf-8"?>
+<file path=ppt/slides/slide47.xml><?xml version="1.0" encoding="utf-8"?>
 <p:sld xmlns:a="http://schemas.openxmlformats.org/drawingml/2006/main" xmlns:r="http://schemas.openxmlformats.org/officeDocument/2006/relationships" xmlns:p="http://schemas.openxmlformats.org/presentationml/2006/main">
-  <p:cSld name="Slide 4">
+  <p:cSld name="Slide 47">
     <p:spTree>
       <p:nvGrpSpPr>
         <p:cNvPr id="1" name=""/>
@@ -15305,245 +18077,6 @@
                 <a:ea typeface="Calibri" pitchFamily="34" charset="-122"/>
                 <a:cs typeface="Calibri" pitchFamily="34" charset="-120"/>
               </a:rPr>
-              <a:t>HOMEWORK CORRECTION</a:t>
-            </a:r>
-            <a:endParaRPr lang="en-US" sz="1400" dirty="0"/>
-          </a:p>
-        </p:txBody>
-      </p:sp>
-      <p:pic>
-        <p:nvPicPr>
-          <p:cNvPr id="3" name="Image 0" descr="/home/claude/f4/img/minesec_sheet.png">    </p:cNvPr>
-          <p:cNvPicPr>
-            <a:picLocks noChangeAspect="1"/>
-          </p:cNvPicPr>
-          <p:nvPr/>
-        </p:nvPicPr>
-        <p:blipFill>
-          <a:blip r:embed="rId1"/>
-          <a:stretch>
-            <a:fillRect/>
-          </a:stretch>
-        </p:blipFill>
-        <p:spPr>
-          <a:xfrm>
-            <a:off x="0" y="658368"/>
-            <a:ext cx="3840480" cy="5833872"/>
-          </a:xfrm>
-          <a:prstGeom prst="rect">
-            <a:avLst/>
-          </a:prstGeom>
-        </p:spPr>
-      </p:pic>
-      <p:sp>
-        <p:nvSpPr>
-          <p:cNvPr id="4" name="Text 1"/>
-          <p:cNvSpPr/>
-          <p:nvPr/>
-        </p:nvSpPr>
-        <p:spPr>
-          <a:xfrm>
-            <a:off x="4069080" y="1005840"/>
-            <a:ext cx="7802575" cy="731520"/>
-          </a:xfrm>
-          <a:prstGeom prst="rect">
-            <a:avLst/>
-          </a:prstGeom>
-          <a:noFill/>
-          <a:ln/>
-        </p:spPr>
-        <p:txBody>
-          <a:bodyPr wrap="square" lIns="0" tIns="0" rIns="0" bIns="0" rtlCol="0" anchor="ctr">
-            <a:normAutofit/>
-          </a:bodyPr>
-          <a:lstStyle/>
-          <a:p>
-            <a:pPr algn="ctr" indent="0" marL="0">
-              <a:buNone/>
-            </a:pPr>
-            <a:r>
-              <a:rPr lang="en-US" sz="3600" b="1" dirty="0">
-                <a:solidFill>
-                  <a:srgbClr val="990011"/>
-                </a:solidFill>
-                <a:latin typeface="Times New Roman" pitchFamily="34" charset="0"/>
-                <a:ea typeface="Times New Roman" pitchFamily="34" charset="-122"/>
-                <a:cs typeface="Times New Roman" pitchFamily="34" charset="-120"/>
-              </a:rPr>
-              <a:t>Correction of the Homework</a:t>
-            </a:r>
-            <a:endParaRPr lang="en-US" sz="3600" dirty="0"/>
-          </a:p>
-        </p:txBody>
-      </p:sp>
-      <p:sp>
-        <p:nvSpPr>
-          <p:cNvPr id="5" name="Text 2"/>
-          <p:cNvSpPr/>
-          <p:nvPr/>
-        </p:nvSpPr>
-        <p:spPr>
-          <a:xfrm>
-            <a:off x="4069080" y="1783080"/>
-            <a:ext cx="7802575" cy="4663440"/>
-          </a:xfrm>
-          <a:prstGeom prst="rect">
-            <a:avLst/>
-          </a:prstGeom>
-          <a:noFill/>
-          <a:ln/>
-        </p:spPr>
-        <p:txBody>
-          <a:bodyPr wrap="square" lIns="0" tIns="0" rIns="0" bIns="0" rtlCol="0" anchor="t"/>
-          <a:lstStyle/>
-          <a:p>
-            <a:pPr algn="l" indent="0" marL="0">
-              <a:spcAft>
-                <a:spcPts val="800"/>
-              </a:spcAft>
-              <a:buNone/>
-            </a:pPr>
-            <a:r>
-              <a:rPr lang="en-US" sz="4000" b="1" dirty="0">
-                <a:solidFill>
-                  <a:srgbClr val="1C3F6E"/>
-                </a:solidFill>
-                <a:latin typeface="Times New Roman" pitchFamily="34" charset="0"/>
-                <a:ea typeface="Times New Roman" pitchFamily="34" charset="-122"/>
-                <a:cs typeface="Times New Roman" pitchFamily="34" charset="-120"/>
-              </a:rPr>
-              <a:t>Question (Lesson 16: Physical Weathering Processes and Products):</a:t>
-            </a:r>
-            <a:endParaRPr lang="en-US" sz="4000" dirty="0"/>
-          </a:p>
-          <a:p>
-            <a:pPr algn="l" indent="0" marL="0">
-              <a:spcAft>
-                <a:spcPts val="800"/>
-              </a:spcAft>
-              <a:buNone/>
-            </a:pPr>
-            <a:r>
-              <a:rPr lang="en-US" sz="4000" dirty="0">
-                <a:solidFill>
-                  <a:srgbClr val="111111"/>
-                </a:solidFill>
-                <a:latin typeface="Times New Roman" pitchFamily="34" charset="0"/>
-                <a:ea typeface="Times New Roman" pitchFamily="34" charset="-122"/>
-                <a:cs typeface="Times New Roman" pitchFamily="34" charset="-120"/>
-              </a:rPr>
-              <a:t>Look at an old iron gate, a roofing sheet or a nail left in the rain. Write what happened to it and what colour it became.</a:t>
-            </a:r>
-            <a:endParaRPr lang="en-US" sz="4000" dirty="0"/>
-          </a:p>
-        </p:txBody>
-      </p:sp>
-      <p:sp>
-        <p:nvSpPr>
-          <p:cNvPr id="25" name="Slide Number Placeholder 0"/>
-          <p:cNvSpPr>
-            <a:spLocks noGrp="1"/>
-          </p:cNvSpPr>
-          <p:nvPr>
-            <p:ph type="sldNum" sz="quarter" idx="4294967295"/>
-          </p:nvPr>
-        </p:nvSpPr>
-        <p:spPr>
-          <a:xfrm>
-            <a:off x="27432" y="91440"/>
-            <a:ext cx="585216" cy="475488"/>
-          </a:xfrm>
-          <a:prstGeom prst="rect">
-            <a:avLst/>
-          </a:prstGeom>
-          <a:extLst>
-            <a:ext uri="{C572A759-6A51-4108-AA02-DFA0A04FC94B}">
-              <ma14:wrappingTextBoxFlag xmlns:ma14="http://schemas.microsoft.com/office/mac/drawingml/2011/main" val="0"/>
-            </a:ext>
-          </a:extLst>
-        </p:spPr>
-        <p:txBody>
-          <a:bodyPr/>
-          <a:lstStyle>
-            <a:lvl1pPr>
-              <a:defRPr sz="2000">
-                <a:solidFill>
-                  <a:srgbClr val="FFFFFF"/>
-                </a:solidFill>
-                <a:latin typeface="Calibri"/>
-                <a:ea typeface="Calibri"/>
-                <a:cs typeface="Calibri"/>
-              </a:defRPr>
-            </a:lvl1pPr>
-          </a:lstStyle>
-          <a:p>
-            <a:pPr algn="ctr"/>
-            <a:fld id="{F7021451-1387-4CA6-816F-3879F97B5CBC}" type="slidenum">
-              <a:rPr b="1" lang="en-US"/>
-              <a:t>4</a:t>
-            </a:fld>
-            <a:endParaRPr lang="en-US"/>
-          </a:p>
-        </p:txBody>
-      </p:sp>
-    </p:spTree>
-  </p:cSld>
-  <p:clrMapOvr>
-    <a:masterClrMapping/>
-  </p:clrMapOvr>
-</p:sld>
-</file>
-
-<file path=ppt/slides/slide40.xml><?xml version="1.0" encoding="utf-8"?>
-<p:sld xmlns:a="http://schemas.openxmlformats.org/drawingml/2006/main" xmlns:r="http://schemas.openxmlformats.org/officeDocument/2006/relationships" xmlns:p="http://schemas.openxmlformats.org/presentationml/2006/main">
-  <p:cSld name="Slide 40">
-    <p:spTree>
-      <p:nvGrpSpPr>
-        <p:cNvPr id="1" name=""/>
-        <p:cNvGrpSpPr/>
-        <p:nvPr/>
-      </p:nvGrpSpPr>
-      <p:grpSpPr>
-        <a:xfrm>
-          <a:off x="0" y="0"/>
-          <a:ext cx="0" cy="0"/>
-          <a:chOff x="0" y="0"/>
-          <a:chExt cx="0" cy="0"/>
-        </a:xfrm>
-      </p:grpSpPr>
-      <p:sp>
-        <p:nvSpPr>
-          <p:cNvPr id="2" name="Text 0"/>
-          <p:cNvSpPr/>
-          <p:nvPr/>
-        </p:nvSpPr>
-        <p:spPr>
-          <a:xfrm>
-            <a:off x="457200" y="713232"/>
-            <a:ext cx="11368735" cy="274320"/>
-          </a:xfrm>
-          <a:prstGeom prst="rect">
-            <a:avLst/>
-          </a:prstGeom>
-          <a:noFill/>
-          <a:ln/>
-        </p:spPr>
-        <p:txBody>
-          <a:bodyPr wrap="square" lIns="0" tIns="0" rIns="0" bIns="0" rtlCol="0" anchor="ctr"/>
-          <a:lstStyle/>
-          <a:p>
-            <a:pPr algn="r" indent="0" marL="0">
-              <a:buNone/>
-            </a:pPr>
-            <a:r>
-              <a:rPr lang="en-US" sz="1400" b="1" dirty="0">
-                <a:solidFill>
-                  <a:srgbClr val="1C3F6E"/>
-                </a:solidFill>
-                <a:latin typeface="Calibri" pitchFamily="34" charset="0"/>
-                <a:ea typeface="Calibri" pitchFamily="34" charset="-122"/>
-                <a:cs typeface="Calibri" pitchFamily="34" charset="-120"/>
-              </a:rPr>
               <a:t>LOGBOOK</a:t>
             </a:r>
             <a:endParaRPr lang="en-US" sz="1400" dirty="0"/>
@@ -15591,7 +18124,7 @@
       </p:sp>
       <p:graphicFrame>
         <p:nvGraphicFramePr>
-          <p:cNvPr id="41" name="Table 0"/>
+          <p:cNvPr id="48" name="Table 0"/>
           <p:cNvGraphicFramePr>
             <a:graphicFrameLocks noGrp="1"/>
           </p:cNvGraphicFramePr>
@@ -16213,7 +18746,7 @@
             <a:pPr algn="ctr"/>
             <a:fld id="{F7021451-1387-4CA6-816F-3879F97B5CBC}" type="slidenum">
               <a:rPr b="1" lang="en-US"/>
-              <a:t>40</a:t>
+              <a:t>47</a:t>
             </a:fld>
             <a:endParaRPr lang="en-US"/>
           </a:p>
@@ -16227,9 +18760,9 @@
 </p:sld>
 </file>
 
-<file path=ppt/slides/slide41.xml><?xml version="1.0" encoding="utf-8"?>
+<file path=ppt/slides/slide48.xml><?xml version="1.0" encoding="utf-8"?>
 <p:sld xmlns:a="http://schemas.openxmlformats.org/drawingml/2006/main" xmlns:r="http://schemas.openxmlformats.org/officeDocument/2006/relationships" xmlns:p="http://schemas.openxmlformats.org/presentationml/2006/main">
-  <p:cSld name="Slide 41">
+  <p:cSld name="Slide 48">
     <p:spTree>
       <p:nvGrpSpPr>
         <p:cNvPr id="1" name=""/>
@@ -16324,7 +18857,7 @@
       </p:sp>
       <p:graphicFrame>
         <p:nvGraphicFramePr>
-          <p:cNvPr id="42" name="Table 0"/>
+          <p:cNvPr id="49" name="Table 0"/>
           <p:cNvGraphicFramePr>
             <a:graphicFrameLocks noGrp="1"/>
           </p:cNvGraphicFramePr>
@@ -16434,7 +18967,7 @@
                           <a:ea typeface="Calibri" pitchFamily="34" charset="-122"/>
                           <a:cs typeface="Calibri" pitchFamily="34" charset="-120"/>
                         </a:rPr>
-                        <a:t>DEFINITIONS; Processes and Products of Chemical Weathering.</a:t>
+                        <a:t>DEFINITIONS; Solution; Carbonation; Hydrolysis; Oxidation; Hydration; Chemically Induced Biological Weathering.</a:t>
                       </a:r>
                       <a:endParaRPr lang="en-US" sz="1600" dirty="0">
                         <a:latin typeface="Calibri" charset="0"/>
@@ -17084,7 +19617,7 @@
             <a:pPr algn="ctr"/>
             <a:fld id="{F7021451-1387-4CA6-816F-3879F97B5CBC}" type="slidenum">
               <a:rPr b="1" lang="en-US"/>
-              <a:t>41</a:t>
+              <a:t>48</a:t>
             </a:fld>
             <a:endParaRPr lang="en-US"/>
           </a:p>
@@ -17098,9 +19631,9 @@
 </p:sld>
 </file>
 
-<file path=ppt/slides/slide42.xml><?xml version="1.0" encoding="utf-8"?>
+<file path=ppt/slides/slide49.xml><?xml version="1.0" encoding="utf-8"?>
 <p:sld xmlns:a="http://schemas.openxmlformats.org/drawingml/2006/main" xmlns:r="http://schemas.openxmlformats.org/officeDocument/2006/relationships" xmlns:p="http://schemas.openxmlformats.org/presentationml/2006/main">
-  <p:cSld name="Slide 42">
+  <p:cSld name="Slide 49">
     <p:spTree>
       <p:nvGrpSpPr>
         <p:cNvPr id="1" name=""/>
@@ -17277,7 +19810,7 @@
                 <a:ea typeface="Calibri" pitchFamily="34" charset="-122"/>
                 <a:cs typeface="Calibri" pitchFamily="34" charset="-120"/>
               </a:rPr>
-              <a:t>Without the projector (Activity 1): show a rusty nail and a new nail.</a:t>
+              <a:t>Without the projector (Activity 1): show a rusty nail.</a:t>
             </a:r>
             <a:endParaRPr lang="en-US" sz="2000" dirty="0"/>
           </a:p>
@@ -17319,7 +19852,7 @@
                 <a:ea typeface="Calibri" pitchFamily="34" charset="-122"/>
                 <a:cs typeface="Calibri" pitchFamily="34" charset="-120"/>
               </a:rPr>
-              <a:t>Without the projector (Activity 3): drop a piece of chalk in vinegar: it slowly dissolves.</a:t>
+              <a:t>Without the projector (Activity 3): drop vinegar on chalk: it fizzes and dissolves.</a:t>
             </a:r>
             <a:endParaRPr lang="en-US" sz="2000" dirty="0"/>
           </a:p>
@@ -17367,332 +19900,7 @@
             <a:pPr algn="ctr"/>
             <a:fld id="{F7021451-1387-4CA6-816F-3879F97B5CBC}" type="slidenum">
               <a:rPr b="1" lang="en-US"/>
-              <a:t>42</a:t>
-            </a:fld>
-            <a:endParaRPr lang="en-US"/>
-          </a:p>
-        </p:txBody>
-      </p:sp>
-    </p:spTree>
-  </p:cSld>
-  <p:clrMapOvr>
-    <a:masterClrMapping/>
-  </p:clrMapOvr>
-</p:sld>
-</file>
-
-<file path=ppt/slides/slide43.xml><?xml version="1.0" encoding="utf-8"?>
-<p:sld xmlns:a="http://schemas.openxmlformats.org/drawingml/2006/main" xmlns:r="http://schemas.openxmlformats.org/officeDocument/2006/relationships" xmlns:p="http://schemas.openxmlformats.org/presentationml/2006/main">
-  <p:cSld name="Slide 43">
-    <p:spTree>
-      <p:nvGrpSpPr>
-        <p:cNvPr id="1" name=""/>
-        <p:cNvGrpSpPr/>
-        <p:nvPr/>
-      </p:nvGrpSpPr>
-      <p:grpSpPr>
-        <a:xfrm>
-          <a:off x="0" y="0"/>
-          <a:ext cx="0" cy="0"/>
-          <a:chOff x="0" y="0"/>
-          <a:chExt cx="0" cy="0"/>
-        </a:xfrm>
-      </p:grpSpPr>
-      <p:sp>
-        <p:nvSpPr>
-          <p:cNvPr id="2" name="Text 0"/>
-          <p:cNvSpPr/>
-          <p:nvPr/>
-        </p:nvSpPr>
-        <p:spPr>
-          <a:xfrm>
-            <a:off x="457200" y="713232"/>
-            <a:ext cx="11368735" cy="274320"/>
-          </a:xfrm>
-          <a:prstGeom prst="rect">
-            <a:avLst/>
-          </a:prstGeom>
-          <a:noFill/>
-          <a:ln/>
-        </p:spPr>
-        <p:txBody>
-          <a:bodyPr wrap="square" lIns="0" tIns="0" rIns="0" bIns="0" rtlCol="0" anchor="ctr"/>
-          <a:lstStyle/>
-          <a:p>
-            <a:pPr algn="r" indent="0" marL="0">
-              <a:buNone/>
-            </a:pPr>
-            <a:r>
-              <a:rPr lang="en-US" sz="1400" b="1" dirty="0">
-                <a:solidFill>
-                  <a:srgbClr val="1C3F6E"/>
-                </a:solidFill>
-                <a:latin typeface="Calibri" pitchFamily="34" charset="0"/>
-                <a:ea typeface="Calibri" pitchFamily="34" charset="-122"/>
-                <a:cs typeface="Calibri" pitchFamily="34" charset="-120"/>
-              </a:rPr>
-              <a:t>REFERENCES</a:t>
-            </a:r>
-            <a:endParaRPr lang="en-US" sz="1400" dirty="0"/>
-          </a:p>
-        </p:txBody>
-      </p:sp>
-      <p:pic>
-        <p:nvPicPr>
-          <p:cNvPr id="3" name="Image 0" descr="/home/claude/f4/img/minesec_sheet.png">    </p:cNvPr>
-          <p:cNvPicPr>
-            <a:picLocks noChangeAspect="1"/>
-          </p:cNvPicPr>
-          <p:nvPr/>
-        </p:nvPicPr>
-        <p:blipFill>
-          <a:blip r:embed="rId1"/>
-          <a:stretch>
-            <a:fillRect/>
-          </a:stretch>
-        </p:blipFill>
-        <p:spPr>
-          <a:xfrm>
-            <a:off x="0" y="658368"/>
-            <a:ext cx="3840480" cy="5833872"/>
-          </a:xfrm>
-          <a:prstGeom prst="rect">
-            <a:avLst/>
-          </a:prstGeom>
-        </p:spPr>
-      </p:pic>
-      <p:sp>
-        <p:nvSpPr>
-          <p:cNvPr id="4" name="Text 1"/>
-          <p:cNvSpPr/>
-          <p:nvPr/>
-        </p:nvSpPr>
-        <p:spPr>
-          <a:xfrm>
-            <a:off x="4069080" y="1005840"/>
-            <a:ext cx="7802575" cy="731520"/>
-          </a:xfrm>
-          <a:prstGeom prst="rect">
-            <a:avLst/>
-          </a:prstGeom>
-          <a:noFill/>
-          <a:ln/>
-        </p:spPr>
-        <p:txBody>
-          <a:bodyPr wrap="square" lIns="0" tIns="0" rIns="0" bIns="0" rtlCol="0" anchor="ctr">
-            <a:normAutofit/>
-          </a:bodyPr>
-          <a:lstStyle/>
-          <a:p>
-            <a:pPr algn="ctr" indent="0" marL="0">
-              <a:buNone/>
-            </a:pPr>
-            <a:r>
-              <a:rPr lang="en-US" sz="3600" b="1" dirty="0">
-                <a:solidFill>
-                  <a:srgbClr val="990011"/>
-                </a:solidFill>
-                <a:latin typeface="Times New Roman" pitchFamily="34" charset="0"/>
-                <a:ea typeface="Times New Roman" pitchFamily="34" charset="-122"/>
-                <a:cs typeface="Times New Roman" pitchFamily="34" charset="-120"/>
-              </a:rPr>
-              <a:t>References</a:t>
-            </a:r>
-            <a:endParaRPr lang="en-US" sz="3600" dirty="0"/>
-          </a:p>
-        </p:txBody>
-      </p:sp>
-      <p:sp>
-        <p:nvSpPr>
-          <p:cNvPr id="5" name="Text 2"/>
-          <p:cNvSpPr/>
-          <p:nvPr/>
-        </p:nvSpPr>
-        <p:spPr>
-          <a:xfrm>
-            <a:off x="4069080" y="1783080"/>
-            <a:ext cx="7802575" cy="4663440"/>
-          </a:xfrm>
-          <a:prstGeom prst="rect">
-            <a:avLst/>
-          </a:prstGeom>
-          <a:noFill/>
-          <a:ln/>
-        </p:spPr>
-        <p:txBody>
-          <a:bodyPr wrap="square" lIns="0" tIns="0" rIns="0" bIns="0" rtlCol="0" anchor="t"/>
-          <a:lstStyle/>
-          <a:p>
-            <a:pPr algn="l" marL="342900" indent="-342900">
-              <a:spcAft>
-                <a:spcPts val="800"/>
-              </a:spcAft>
-              <a:buSzPct val="100000"/>
-              <a:buChar char="•"/>
-            </a:pPr>
-            <a:r>
-              <a:rPr lang="en-US" sz="1800" dirty="0">
-                <a:solidFill>
-                  <a:srgbClr val="111111"/>
-                </a:solidFill>
-                <a:latin typeface="Calibri" pitchFamily="34" charset="0"/>
-                <a:ea typeface="Calibri" pitchFamily="34" charset="-122"/>
-                <a:cs typeface="Calibri" pitchFamily="34" charset="-120"/>
-              </a:rPr>
-              <a:t>National Geography Syllabus (MINESEC), Form 4 — Denudation Processes, Landforms and Impacts on Man.</a:t>
-            </a:r>
-            <a:endParaRPr lang="en-US" sz="1800" dirty="0"/>
-          </a:p>
-          <a:p>
-            <a:pPr algn="l" marL="342900" indent="-342900">
-              <a:spcAft>
-                <a:spcPts val="800"/>
-              </a:spcAft>
-              <a:buSzPct val="100000"/>
-              <a:buChar char="•"/>
-            </a:pPr>
-            <a:r>
-              <a:rPr lang="en-US" sz="1800" dirty="0">
-                <a:solidFill>
-                  <a:srgbClr val="111111"/>
-                </a:solidFill>
-                <a:latin typeface="Calibri" pitchFamily="34" charset="0"/>
-                <a:ea typeface="Calibri" pitchFamily="34" charset="-122"/>
-                <a:cs typeface="Calibri" pitchFamily="34" charset="-120"/>
-              </a:rPr>
-              <a:t>Teacher's lesson notes (Form 4), checked and corrected where necessary.</a:t>
-            </a:r>
-            <a:endParaRPr lang="en-US" sz="1800" dirty="0"/>
-          </a:p>
-          <a:p>
-            <a:pPr algn="l" marL="342900" indent="-342900">
-              <a:spcAft>
-                <a:spcPts val="800"/>
-              </a:spcAft>
-              <a:buSzPct val="100000"/>
-              <a:buChar char="•"/>
-            </a:pPr>
-            <a:r>
-              <a:rPr lang="en-US" sz="1800" dirty="0">
-                <a:solidFill>
-                  <a:srgbClr val="111111"/>
-                </a:solidFill>
-                <a:latin typeface="Calibri" pitchFamily="34" charset="0"/>
-                <a:ea typeface="Calibri" pitchFamily="34" charset="-122"/>
-                <a:cs typeface="Calibri" pitchFamily="34" charset="-120"/>
-              </a:rPr>
-              <a:t>Photo, Activity 1: “Lock down!” by ViNo Gv, CC BY 2.0, via Flickr (https://www.flickr.com/photos/38217093@N03/20143584561)</a:t>
-            </a:r>
-            <a:endParaRPr lang="en-US" sz="1800" dirty="0"/>
-          </a:p>
-          <a:p>
-            <a:pPr algn="l" marL="342900" indent="-342900">
-              <a:spcAft>
-                <a:spcPts val="800"/>
-              </a:spcAft>
-              <a:buSzPct val="100000"/>
-              <a:buChar char="•"/>
-            </a:pPr>
-            <a:r>
-              <a:rPr lang="en-US" sz="1800" dirty="0">
-                <a:solidFill>
-                  <a:srgbClr val="111111"/>
-                </a:solidFill>
-                <a:latin typeface="Calibri" pitchFamily="34" charset="0"/>
-                <a:ea typeface="Calibri" pitchFamily="34" charset="-122"/>
-                <a:cs typeface="Calibri" pitchFamily="34" charset="-120"/>
-              </a:rPr>
-              <a:t>Photo, Activity 2: “in the middle of nowhere, morocco” by mariusz kluzniak, CC BY-NC-ND 2.0, via Flickr (https://www.flickr.com/photos/39997856@N03/8398997251)</a:t>
-            </a:r>
-            <a:endParaRPr lang="en-US" sz="1800" dirty="0"/>
-          </a:p>
-          <a:p>
-            <a:pPr algn="l" marL="342900" indent="-342900">
-              <a:spcAft>
-                <a:spcPts val="800"/>
-              </a:spcAft>
-              <a:buSzPct val="100000"/>
-              <a:buChar char="•"/>
-            </a:pPr>
-            <a:r>
-              <a:rPr lang="en-US" sz="1800" dirty="0">
-                <a:solidFill>
-                  <a:srgbClr val="111111"/>
-                </a:solidFill>
-                <a:latin typeface="Calibri" pitchFamily="34" charset="0"/>
-                <a:ea typeface="Calibri" pitchFamily="34" charset="-122"/>
-                <a:cs typeface="Calibri" pitchFamily="34" charset="-120"/>
-              </a:rPr>
-              <a:t>Photo, Activity 3: “Songam Cave” by D-Stanley, CC BY 2.0, via Flickr (https://www.flickr.com/photos/79721788@N00/5063216873)</a:t>
-            </a:r>
-            <a:endParaRPr lang="en-US" sz="1800" dirty="0"/>
-          </a:p>
-          <a:p>
-            <a:pPr algn="l" marL="342900" indent="-342900">
-              <a:spcAft>
-                <a:spcPts val="800"/>
-              </a:spcAft>
-              <a:buSzPct val="100000"/>
-              <a:buChar char="•"/>
-            </a:pPr>
-            <a:r>
-              <a:rPr lang="en-US" sz="1800" dirty="0">
-                <a:solidFill>
-                  <a:srgbClr val="111111"/>
-                </a:solidFill>
-                <a:latin typeface="Calibri" pitchFamily="34" charset="0"/>
-                <a:ea typeface="Calibri" pitchFamily="34" charset="-122"/>
-                <a:cs typeface="Calibri" pitchFamily="34" charset="-120"/>
-              </a:rPr>
-              <a:t>Diagrams and animations: drawn for this lesson (Geography Department).</a:t>
-            </a:r>
-            <a:endParaRPr lang="en-US" sz="1800" dirty="0"/>
-          </a:p>
-        </p:txBody>
-      </p:sp>
-      <p:sp>
-        <p:nvSpPr>
-          <p:cNvPr id="25" name="Slide Number Placeholder 0"/>
-          <p:cNvSpPr>
-            <a:spLocks noGrp="1"/>
-          </p:cNvSpPr>
-          <p:nvPr>
-            <p:ph type="sldNum" sz="quarter" idx="4294967295"/>
-          </p:nvPr>
-        </p:nvSpPr>
-        <p:spPr>
-          <a:xfrm>
-            <a:off x="27432" y="91440"/>
-            <a:ext cx="585216" cy="475488"/>
-          </a:xfrm>
-          <a:prstGeom prst="rect">
-            <a:avLst/>
-          </a:prstGeom>
-          <a:extLst>
-            <a:ext uri="{C572A759-6A51-4108-AA02-DFA0A04FC94B}">
-              <ma14:wrappingTextBoxFlag xmlns:ma14="http://schemas.microsoft.com/office/mac/drawingml/2011/main" val="0"/>
-            </a:ext>
-          </a:extLst>
-        </p:spPr>
-        <p:txBody>
-          <a:bodyPr/>
-          <a:lstStyle>
-            <a:lvl1pPr>
-              <a:defRPr sz="2000">
-                <a:solidFill>
-                  <a:srgbClr val="FFFFFF"/>
-                </a:solidFill>
-                <a:latin typeface="Calibri"/>
-                <a:ea typeface="Calibri"/>
-                <a:cs typeface="Calibri"/>
-              </a:defRPr>
-            </a:lvl1pPr>
-          </a:lstStyle>
-          <a:p>
-            <a:pPr algn="ctr"/>
-            <a:fld id="{F7021451-1387-4CA6-816F-3879F97B5CBC}" type="slidenum">
-              <a:rPr b="1" lang="en-US"/>
-              <a:t>43</a:t>
+              <a:t>49</a:t>
             </a:fld>
             <a:endParaRPr lang="en-US"/>
           </a:p>
@@ -17925,6 +20133,352 @@
 </p:sld>
 </file>
 
+<file path=ppt/slides/slide50.xml><?xml version="1.0" encoding="utf-8"?>
+<p:sld xmlns:a="http://schemas.openxmlformats.org/drawingml/2006/main" xmlns:r="http://schemas.openxmlformats.org/officeDocument/2006/relationships" xmlns:p="http://schemas.openxmlformats.org/presentationml/2006/main">
+  <p:cSld name="Slide 50">
+    <p:spTree>
+      <p:nvGrpSpPr>
+        <p:cNvPr id="1" name=""/>
+        <p:cNvGrpSpPr/>
+        <p:nvPr/>
+      </p:nvGrpSpPr>
+      <p:grpSpPr>
+        <a:xfrm>
+          <a:off x="0" y="0"/>
+          <a:ext cx="0" cy="0"/>
+          <a:chOff x="0" y="0"/>
+          <a:chExt cx="0" cy="0"/>
+        </a:xfrm>
+      </p:grpSpPr>
+      <p:sp>
+        <p:nvSpPr>
+          <p:cNvPr id="2" name="Text 0"/>
+          <p:cNvSpPr/>
+          <p:nvPr/>
+        </p:nvSpPr>
+        <p:spPr>
+          <a:xfrm>
+            <a:off x="457200" y="713232"/>
+            <a:ext cx="11368735" cy="274320"/>
+          </a:xfrm>
+          <a:prstGeom prst="rect">
+            <a:avLst/>
+          </a:prstGeom>
+          <a:noFill/>
+          <a:ln/>
+        </p:spPr>
+        <p:txBody>
+          <a:bodyPr wrap="square" lIns="0" tIns="0" rIns="0" bIns="0" rtlCol="0" anchor="ctr"/>
+          <a:lstStyle/>
+          <a:p>
+            <a:pPr algn="r" indent="0" marL="0">
+              <a:buNone/>
+            </a:pPr>
+            <a:r>
+              <a:rPr lang="en-US" sz="1400" b="1" dirty="0">
+                <a:solidFill>
+                  <a:srgbClr val="1C3F6E"/>
+                </a:solidFill>
+                <a:latin typeface="Calibri" pitchFamily="34" charset="0"/>
+                <a:ea typeface="Calibri" pitchFamily="34" charset="-122"/>
+                <a:cs typeface="Calibri" pitchFamily="34" charset="-120"/>
+              </a:rPr>
+              <a:t>REFERENCES</a:t>
+            </a:r>
+            <a:endParaRPr lang="en-US" sz="1400" dirty="0"/>
+          </a:p>
+        </p:txBody>
+      </p:sp>
+      <p:pic>
+        <p:nvPicPr>
+          <p:cNvPr id="3" name="Image 0" descr="/home/claude/f4/img/minesec_sheet.png">    </p:cNvPr>
+          <p:cNvPicPr>
+            <a:picLocks noChangeAspect="1"/>
+          </p:cNvPicPr>
+          <p:nvPr/>
+        </p:nvPicPr>
+        <p:blipFill>
+          <a:blip r:embed="rId1"/>
+          <a:stretch>
+            <a:fillRect/>
+          </a:stretch>
+        </p:blipFill>
+        <p:spPr>
+          <a:xfrm>
+            <a:off x="0" y="658368"/>
+            <a:ext cx="3840480" cy="5833872"/>
+          </a:xfrm>
+          <a:prstGeom prst="rect">
+            <a:avLst/>
+          </a:prstGeom>
+        </p:spPr>
+      </p:pic>
+      <p:sp>
+        <p:nvSpPr>
+          <p:cNvPr id="4" name="Text 1"/>
+          <p:cNvSpPr/>
+          <p:nvPr/>
+        </p:nvSpPr>
+        <p:spPr>
+          <a:xfrm>
+            <a:off x="4069080" y="1005840"/>
+            <a:ext cx="7802575" cy="731520"/>
+          </a:xfrm>
+          <a:prstGeom prst="rect">
+            <a:avLst/>
+          </a:prstGeom>
+          <a:noFill/>
+          <a:ln/>
+        </p:spPr>
+        <p:txBody>
+          <a:bodyPr wrap="square" lIns="0" tIns="0" rIns="0" bIns="0" rtlCol="0" anchor="ctr">
+            <a:normAutofit/>
+          </a:bodyPr>
+          <a:lstStyle/>
+          <a:p>
+            <a:pPr algn="ctr" indent="0" marL="0">
+              <a:buNone/>
+            </a:pPr>
+            <a:r>
+              <a:rPr lang="en-US" sz="3600" b="1" dirty="0">
+                <a:solidFill>
+                  <a:srgbClr val="990011"/>
+                </a:solidFill>
+                <a:latin typeface="Times New Roman" pitchFamily="34" charset="0"/>
+                <a:ea typeface="Times New Roman" pitchFamily="34" charset="-122"/>
+                <a:cs typeface="Times New Roman" pitchFamily="34" charset="-120"/>
+              </a:rPr>
+              <a:t>References</a:t>
+            </a:r>
+            <a:endParaRPr lang="en-US" sz="3600" dirty="0"/>
+          </a:p>
+        </p:txBody>
+      </p:sp>
+      <p:sp>
+        <p:nvSpPr>
+          <p:cNvPr id="5" name="Text 2"/>
+          <p:cNvSpPr/>
+          <p:nvPr/>
+        </p:nvSpPr>
+        <p:spPr>
+          <a:xfrm>
+            <a:off x="4069080" y="1783080"/>
+            <a:ext cx="7802575" cy="4663440"/>
+          </a:xfrm>
+          <a:prstGeom prst="rect">
+            <a:avLst/>
+          </a:prstGeom>
+          <a:noFill/>
+          <a:ln/>
+        </p:spPr>
+        <p:txBody>
+          <a:bodyPr wrap="square" lIns="0" tIns="0" rIns="0" bIns="0" rtlCol="0" anchor="t"/>
+          <a:lstStyle/>
+          <a:p>
+            <a:pPr algn="l" marL="342900" indent="-342900">
+              <a:spcAft>
+                <a:spcPts val="800"/>
+              </a:spcAft>
+              <a:buSzPct val="100000"/>
+              <a:buChar char="•"/>
+            </a:pPr>
+            <a:r>
+              <a:rPr lang="en-US" sz="1800" dirty="0">
+                <a:solidFill>
+                  <a:srgbClr val="111111"/>
+                </a:solidFill>
+                <a:latin typeface="Calibri" pitchFamily="34" charset="0"/>
+                <a:ea typeface="Calibri" pitchFamily="34" charset="-122"/>
+                <a:cs typeface="Calibri" pitchFamily="34" charset="-120"/>
+              </a:rPr>
+              <a:t>National Geography Syllabus (MINESEC), Form 4 — Denudation Processes, Landforms and Impacts on Man.</a:t>
+            </a:r>
+            <a:endParaRPr lang="en-US" sz="1800" dirty="0"/>
+          </a:p>
+          <a:p>
+            <a:pPr algn="l" marL="342900" indent="-342900">
+              <a:spcAft>
+                <a:spcPts val="800"/>
+              </a:spcAft>
+              <a:buSzPct val="100000"/>
+              <a:buChar char="•"/>
+            </a:pPr>
+            <a:r>
+              <a:rPr lang="en-US" sz="1800" dirty="0">
+                <a:solidFill>
+                  <a:srgbClr val="111111"/>
+                </a:solidFill>
+                <a:latin typeface="Calibri" pitchFamily="34" charset="0"/>
+                <a:ea typeface="Calibri" pitchFamily="34" charset="-122"/>
+                <a:cs typeface="Calibri" pitchFamily="34" charset="-120"/>
+              </a:rPr>
+              <a:t>Teacher's lesson notes (Form 4), checked and corrected where necessary.</a:t>
+            </a:r>
+            <a:endParaRPr lang="en-US" sz="1800" dirty="0"/>
+          </a:p>
+          <a:p>
+            <a:pPr algn="l" marL="342900" indent="-342900">
+              <a:spcAft>
+                <a:spcPts val="800"/>
+              </a:spcAft>
+              <a:buSzPct val="100000"/>
+              <a:buChar char="•"/>
+            </a:pPr>
+            <a:r>
+              <a:rPr lang="en-US" sz="1800" dirty="0">
+                <a:solidFill>
+                  <a:srgbClr val="111111"/>
+                </a:solidFill>
+                <a:latin typeface="Calibri" pitchFamily="34" charset="0"/>
+                <a:ea typeface="Calibri" pitchFamily="34" charset="-122"/>
+                <a:cs typeface="Calibri" pitchFamily="34" charset="-120"/>
+              </a:rPr>
+              <a:t>Photo, Activity 1: “Lock down!” by ViNo Gv, CC BY 2.0, via Flickr (https://www.flickr.com/photos/38217093@N03/20143584561)</a:t>
+            </a:r>
+            <a:endParaRPr lang="en-US" sz="1800" dirty="0"/>
+          </a:p>
+          <a:p>
+            <a:pPr algn="l" marL="342900" indent="-342900">
+              <a:spcAft>
+                <a:spcPts val="800"/>
+              </a:spcAft>
+              <a:buSzPct val="100000"/>
+              <a:buChar char="•"/>
+            </a:pPr>
+            <a:r>
+              <a:rPr lang="en-US" sz="1800" dirty="0">
+                <a:solidFill>
+                  <a:srgbClr val="111111"/>
+                </a:solidFill>
+                <a:latin typeface="Calibri" pitchFamily="34" charset="0"/>
+                <a:ea typeface="Calibri" pitchFamily="34" charset="-122"/>
+                <a:cs typeface="Calibri" pitchFamily="34" charset="-120"/>
+              </a:rPr>
+              <a:t>Photo, Activity 2: “in the middle of nowhere, morocco” by mariusz kluzniak, CC BY-NC-ND 2.0, via Flickr (https://www.flickr.com/photos/39997856@N03/8398997251)</a:t>
+            </a:r>
+            <a:endParaRPr lang="en-US" sz="1800" dirty="0"/>
+          </a:p>
+          <a:p>
+            <a:pPr algn="l" marL="342900" indent="-342900">
+              <a:spcAft>
+                <a:spcPts val="800"/>
+              </a:spcAft>
+              <a:buSzPct val="100000"/>
+              <a:buChar char="•"/>
+            </a:pPr>
+            <a:r>
+              <a:rPr lang="en-US" sz="1800" dirty="0">
+                <a:solidFill>
+                  <a:srgbClr val="111111"/>
+                </a:solidFill>
+                <a:latin typeface="Calibri" pitchFamily="34" charset="0"/>
+                <a:ea typeface="Calibri" pitchFamily="34" charset="-122"/>
+                <a:cs typeface="Calibri" pitchFamily="34" charset="-120"/>
+              </a:rPr>
+              <a:t>Photo, Activity 3: “Songam Cave” by D-Stanley, CC BY 2.0, via Flickr (https://www.flickr.com/photos/79721788@N00/5063216873)</a:t>
+            </a:r>
+            <a:endParaRPr lang="en-US" sz="1800" dirty="0"/>
+          </a:p>
+          <a:p>
+            <a:pPr algn="l" marL="342900" indent="-342900">
+              <a:spcAft>
+                <a:spcPts val="800"/>
+              </a:spcAft>
+              <a:buSzPct val="100000"/>
+              <a:buChar char="•"/>
+            </a:pPr>
+            <a:r>
+              <a:rPr lang="en-US" sz="1800" dirty="0">
+                <a:solidFill>
+                  <a:srgbClr val="111111"/>
+                </a:solidFill>
+                <a:latin typeface="Calibri" pitchFamily="34" charset="0"/>
+                <a:ea typeface="Calibri" pitchFamily="34" charset="-122"/>
+                <a:cs typeface="Calibri" pitchFamily="34" charset="-120"/>
+              </a:rPr>
+              <a:t>Photo, board summary (Process): “Lichens on rock - Mason Lake” by brewbooks, CC BY-SA 2.0, via Flickr (https://www.flickr.com/photos/93452909@N00/2924427336)</a:t>
+            </a:r>
+            <a:endParaRPr lang="en-US" sz="1800" dirty="0"/>
+          </a:p>
+          <a:p>
+            <a:pPr algn="l" marL="342900" indent="-342900">
+              <a:spcAft>
+                <a:spcPts val="800"/>
+              </a:spcAft>
+              <a:buSzPct val="100000"/>
+              <a:buChar char="•"/>
+            </a:pPr>
+            <a:r>
+              <a:rPr lang="en-US" sz="1800" dirty="0">
+                <a:solidFill>
+                  <a:srgbClr val="111111"/>
+                </a:solidFill>
+                <a:latin typeface="Calibri" pitchFamily="34" charset="0"/>
+                <a:ea typeface="Calibri" pitchFamily="34" charset="-122"/>
+                <a:cs typeface="Calibri" pitchFamily="34" charset="-120"/>
+              </a:rPr>
+              <a:t>Diagrams and animations: drawn for this lesson (Geography Department).</a:t>
+            </a:r>
+            <a:endParaRPr lang="en-US" sz="1800" dirty="0"/>
+          </a:p>
+        </p:txBody>
+      </p:sp>
+      <p:sp>
+        <p:nvSpPr>
+          <p:cNvPr id="25" name="Slide Number Placeholder 0"/>
+          <p:cNvSpPr>
+            <a:spLocks noGrp="1"/>
+          </p:cNvSpPr>
+          <p:nvPr>
+            <p:ph type="sldNum" sz="quarter" idx="4294967295"/>
+          </p:nvPr>
+        </p:nvSpPr>
+        <p:spPr>
+          <a:xfrm>
+            <a:off x="27432" y="91440"/>
+            <a:ext cx="585216" cy="475488"/>
+          </a:xfrm>
+          <a:prstGeom prst="rect">
+            <a:avLst/>
+          </a:prstGeom>
+          <a:extLst>
+            <a:ext uri="{C572A759-6A51-4108-AA02-DFA0A04FC94B}">
+              <ma14:wrappingTextBoxFlag xmlns:ma14="http://schemas.microsoft.com/office/mac/drawingml/2011/main" val="0"/>
+            </a:ext>
+          </a:extLst>
+        </p:spPr>
+        <p:txBody>
+          <a:bodyPr/>
+          <a:lstStyle>
+            <a:lvl1pPr>
+              <a:defRPr sz="2000">
+                <a:solidFill>
+                  <a:srgbClr val="FFFFFF"/>
+                </a:solidFill>
+                <a:latin typeface="Calibri"/>
+                <a:ea typeface="Calibri"/>
+                <a:cs typeface="Calibri"/>
+              </a:defRPr>
+            </a:lvl1pPr>
+          </a:lstStyle>
+          <a:p>
+            <a:pPr algn="ctr"/>
+            <a:fld id="{F7021451-1387-4CA6-816F-3879F97B5CBC}" type="slidenum">
+              <a:rPr b="1" lang="en-US"/>
+              <a:t>50</a:t>
+            </a:fld>
+            <a:endParaRPr lang="en-US"/>
+          </a:p>
+        </p:txBody>
+      </p:sp>
+    </p:spTree>
+  </p:cSld>
+  <p:clrMapOvr>
+    <a:masterClrMapping/>
+  </p:clrMapOvr>
+</p:sld>
+</file>
+
 <file path=ppt/slides/slide6.xml><?xml version="1.0" encoding="utf-8"?>
 <p:sld xmlns:a="http://schemas.openxmlformats.org/drawingml/2006/main" xmlns:r="http://schemas.openxmlformats.org/officeDocument/2006/relationships" xmlns:p="http://schemas.openxmlformats.org/presentationml/2006/main">
   <p:cSld name="Slide 6">
@@ -18876,7 +21430,7 @@
         <p:spPr>
           <a:xfrm>
             <a:off x="0" y="658368"/>
-            <a:ext cx="5120640" cy="5833872"/>
+            <a:ext cx="2468880" cy="5833872"/>
           </a:xfrm>
           <a:prstGeom prst="rect">
             <a:avLst/>
@@ -18891,8 +21445,8 @@
         </p:nvSpPr>
         <p:spPr>
           <a:xfrm>
-            <a:off x="5349240" y="1005840"/>
-            <a:ext cx="6522415" cy="731520"/>
+            <a:off x="2697480" y="1005840"/>
+            <a:ext cx="9174175" cy="731520"/>
           </a:xfrm>
           <a:prstGeom prst="rect">
             <a:avLst/>
@@ -18932,8 +21486,8 @@
         </p:nvSpPr>
         <p:spPr>
           <a:xfrm>
-            <a:off x="5349240" y="1783080"/>
-            <a:ext cx="6522415" cy="4663440"/>
+            <a:off x="2697480" y="1783080"/>
+            <a:ext cx="9174175" cy="4663440"/>
           </a:xfrm>
           <a:prstGeom prst="rect">
             <a:avLst/>
@@ -18960,7 +21514,7 @@
                 <a:ea typeface="Times New Roman" pitchFamily="34" charset="-122"/>
                 <a:cs typeface="Times New Roman" pitchFamily="34" charset="-120"/>
               </a:rPr>
-              <a:t>In the rainy season, Kaltouma sees that the old metal gate of her compound is reddish-brown. It flakes and crumbles. A new gate still shines.</a:t>
+              <a:t>In the rainy season, Kaltouma sees that the old metal gate of her compound is reddish-brown and crumbles, while a new gate still shines. Around Garoua, many soils are also red. She asks: "How do rain and air change the gate and the rocks, and why are our soils red?"</a:t>
             </a:r>
             <a:endParaRPr lang="en-US" sz="4000" dirty="0"/>
           </a:p>

--- a/lecons/F3/20_FORM4_LESSON17_Chemical_Weathering.pptx
+++ b/lecons/F3/20_FORM4_LESSON17_Chemical_Weathering.pptx
@@ -10546,7 +10546,7 @@
         <p:spPr>
           <a:xfrm>
             <a:off x="0" y="658368"/>
-            <a:ext cx="3840480" cy="5833872"/>
+            <a:ext cx="5120640" cy="5833872"/>
           </a:xfrm>
           <a:prstGeom prst="rect">
             <a:avLst/>
@@ -10561,8 +10561,8 @@
         </p:nvSpPr>
         <p:spPr>
           <a:xfrm>
-            <a:off x="4069080" y="1005840"/>
-            <a:ext cx="7802575" cy="731520"/>
+            <a:off x="5349240" y="1005840"/>
+            <a:ext cx="6522415" cy="731520"/>
           </a:xfrm>
           <a:prstGeom prst="rect">
             <a:avLst/>
@@ -10602,8 +10602,8 @@
         </p:nvSpPr>
         <p:spPr>
           <a:xfrm>
-            <a:off x="4069080" y="1783080"/>
-            <a:ext cx="7802575" cy="4663440"/>
+            <a:off x="5349240" y="1783080"/>
+            <a:ext cx="6522415" cy="4663440"/>
           </a:xfrm>
           <a:prstGeom prst="rect">
             <a:avLst/>
@@ -10622,7 +10622,7 @@
               <a:buNone/>
             </a:pPr>
             <a:r>
-              <a:rPr lang="en-US" sz="4000" b="1" dirty="0">
+              <a:rPr lang="en-US" sz="3200" b="1" dirty="0">
                 <a:solidFill>
                   <a:srgbClr val="111111"/>
                 </a:solidFill>
@@ -10632,7 +10632,7 @@
               </a:rPr>
               <a:t>Topic: Denudation Processes, Landforms and Impacts on Man</a:t>
             </a:r>
-            <a:endParaRPr lang="en-US" sz="4000" dirty="0"/>
+            <a:endParaRPr lang="en-US" sz="3200" dirty="0"/>
           </a:p>
           <a:p>
             <a:pPr algn="l" indent="0" marL="0">
@@ -10642,7 +10642,7 @@
               <a:buNone/>
             </a:pPr>
             <a:r>
-              <a:rPr lang="en-US" sz="4000" b="1" dirty="0">
+              <a:rPr lang="en-US" sz="3200" b="1" dirty="0">
                 <a:solidFill>
                   <a:srgbClr val="111111"/>
                 </a:solidFill>
@@ -10652,7 +10652,7 @@
               </a:rPr>
               <a:t>Sub-topic: Weathering Processes: The Products and Impacts on Man</a:t>
             </a:r>
-            <a:endParaRPr lang="en-US" sz="4000" dirty="0"/>
+            <a:endParaRPr lang="en-US" sz="3200" dirty="0"/>
           </a:p>
           <a:p>
             <a:pPr algn="l" indent="0" marL="0">
@@ -10662,7 +10662,7 @@
               <a:buNone/>
             </a:pPr>
             <a:r>
-              <a:rPr lang="en-US" sz="4000" b="1" dirty="0">
+              <a:rPr lang="en-US" sz="3200" b="1" dirty="0">
                 <a:solidFill>
                   <a:srgbClr val="990011"/>
                 </a:solidFill>
@@ -10672,7 +10672,7 @@
               </a:rPr>
               <a:t>Lesson 17: Chemical Weathering Processes and Products</a:t>
             </a:r>
-            <a:endParaRPr lang="en-US" sz="4000" dirty="0"/>
+            <a:endParaRPr lang="en-US" sz="3200" dirty="0"/>
           </a:p>
         </p:txBody>
       </p:sp>

--- a/lecons/F3/20_FORM4_LESSON17_Chemical_Weathering.pptx
+++ b/lecons/F3/20_FORM4_LESSON17_Chemical_Weathering.pptx
@@ -3455,7 +3455,7 @@
           <a:p>
             <a:r>
               <a:rPr lang="en-US" dirty="0"/>
-              <a:t>Before we start the new lesson, let us correct the homework I gave you at the end of Lesson 16: Physical Weathering Processes and Products. The question was: Look at an old iron gate, a roofing sheet or a nail left in the rain. Write what happened to it and what colour it became. Take out your exercise books.</a:t>
+              <a:t>Before we start the new lesson, let us correct the homework I gave you at the end of Lesson 16: Physical Weathering Processes and Products. The question was: Name two processes of chemical weathering. Take out your exercise books.</a:t>
             </a:r>
             <a:endParaRPr lang="en-US" dirty="0"/>
           </a:p>
@@ -3895,7 +3895,7 @@
           <a:p>
             <a:r>
               <a:rPr lang="en-US" dirty="0"/>
-              <a:t>For your homework: Ask a farmer in your family where the soil of his farm comes from, and ask if he has seen rocks fall or roads blocked after heavy rain. Write his answers. We shall correct it at the beginning of our next lesson.</a:t>
+              <a:t>For your homework: Give one positive impact of weathering. We shall correct it at the beginning of our next lesson.</a:t>
             </a:r>
             <a:endParaRPr lang="en-US" dirty="0"/>
           </a:p>
@@ -4423,7 +4423,7 @@
           <a:p>
             <a:r>
               <a:rPr lang="en-US" dirty="0"/>
-              <a:t>Here is a good answer. The iron became rusty: it turned reddish-brown and weak, and pieces flake off. This is oxidation, a form of chemical weathering. Compare it with your own answer and correct your work in red.</a:t>
+              <a:t>Here is a good answer. Oxidation and carbonation (also solution, hydrolysis and hydration). Compare it with your own answer and correct your work in red.</a:t>
             </a:r>
             <a:endParaRPr lang="en-US" dirty="0"/>
           </a:p>
@@ -15038,7 +15038,7 @@
         <p:spPr>
           <a:xfrm>
             <a:off x="0" y="658368"/>
-            <a:ext cx="3840480" cy="5833872"/>
+            <a:ext cx="5120640" cy="5833872"/>
           </a:xfrm>
           <a:prstGeom prst="rect">
             <a:avLst/>
@@ -15053,8 +15053,8 @@
         </p:nvSpPr>
         <p:spPr>
           <a:xfrm>
-            <a:off x="4069080" y="1005840"/>
-            <a:ext cx="7802575" cy="731520"/>
+            <a:off x="5349240" y="1005840"/>
+            <a:ext cx="6522415" cy="731520"/>
           </a:xfrm>
           <a:prstGeom prst="rect">
             <a:avLst/>
@@ -15094,8 +15094,8 @@
         </p:nvSpPr>
         <p:spPr>
           <a:xfrm>
-            <a:off x="4069080" y="1783080"/>
-            <a:ext cx="7802575" cy="4663440"/>
+            <a:off x="5349240" y="1783080"/>
+            <a:ext cx="6522415" cy="4663440"/>
           </a:xfrm>
           <a:prstGeom prst="rect">
             <a:avLst/>
@@ -15142,7 +15142,7 @@
                 <a:ea typeface="Times New Roman" pitchFamily="34" charset="-122"/>
                 <a:cs typeface="Times New Roman" pitchFamily="34" charset="-120"/>
               </a:rPr>
-              <a:t>Look at an old iron gate, a roofing sheet or a nail left in the rain. Write what happened to it and what colour it became.</a:t>
+              <a:t>Name two processes of chemical weathering.</a:t>
             </a:r>
             <a:endParaRPr lang="en-US" sz="4000" dirty="0"/>
           </a:p>
@@ -16303,7 +16303,7 @@
                 <a:ea typeface="Times New Roman" pitchFamily="34" charset="-122"/>
                 <a:cs typeface="Times New Roman" pitchFamily="34" charset="-120"/>
               </a:rPr>
-              <a:t>Ask a farmer in your family where the soil of his farm comes from, and ask if he has seen rocks fall or roads blocked after heavy rain. Write his answers.</a:t>
+              <a:t>Give one positive impact of weathering.</a:t>
             </a:r>
             <a:endParaRPr lang="en-US" sz="4000" dirty="0"/>
           </a:p>
@@ -19243,7 +19243,7 @@
                           <a:ea typeface="Calibri" pitchFamily="34" charset="-122"/>
                           <a:cs typeface="Calibri" pitchFamily="34" charset="-120"/>
                         </a:rPr>
-                        <a:t>Ask a farmer in your family where the soil of his farm comes from, and ask if he has seen rocks fall or roads blocked after heavy rain. Write his answers.</a:t>
+                        <a:t>Give one positive impact of weathering.</a:t>
                       </a:r>
                       <a:endParaRPr lang="en-US" sz="1600" dirty="0">
                         <a:latin typeface="Calibri" charset="0"/>
@@ -20071,7 +20071,7 @@
                 <a:ea typeface="Times New Roman" pitchFamily="34" charset="-122"/>
                 <a:cs typeface="Times New Roman" pitchFamily="34" charset="-120"/>
               </a:rPr>
-              <a:t>The iron became rusty: it turned reddish-brown and weak, and pieces flake off. This is oxidation, a form of chemical weathering.</a:t>
+              <a:t>Oxidation and carbonation (also solution, hydrolysis and hydration).</a:t>
             </a:r>
             <a:endParaRPr lang="en-US" sz="4000" dirty="0"/>
           </a:p>
